--- a/parousiasidiktia.pptx
+++ b/parousiasidiktia.pptx
@@ -21780,31 +21780,68 @@
           </a:p>
         </p:txBody>
       </p:sp>
-      <p:sp>
-        <p:nvSpPr>
-          <p:cNvPr id="3" name="Θέση περιεχομένου 2">
+      <p:pic>
+        <p:nvPicPr>
+          <p:cNvPr id="5" name="Θέση περιεχομένου 4">
             <a:extLst>
               <a:ext uri="{FF2B5EF4-FFF2-40B4-BE49-F238E27FC236}">
-                <a16:creationId xmlns:a16="http://schemas.microsoft.com/office/drawing/2014/main" id="{5EB81BE0-2BB5-4223-AA7F-EF6D5A0DCD83}"/>
+                <a16:creationId xmlns:a16="http://schemas.microsoft.com/office/drawing/2014/main" id="{44A640C9-B839-4B46-B4A1-EE4DDE9A0829}"/>
               </a:ext>
             </a:extLst>
           </p:cNvPr>
-          <p:cNvSpPr>
-            <a:spLocks noGrp="1"/>
-          </p:cNvSpPr>
+          <p:cNvPicPr>
+            <a:picLocks noGrp="1" noChangeAspect="1"/>
+          </p:cNvPicPr>
           <p:nvPr>
             <p:ph idx="1"/>
           </p:nvPr>
-        </p:nvSpPr>
-        <p:spPr/>
-        <p:txBody>
-          <a:bodyPr/>
-          <a:lstStyle/>
-          <a:p>
-            <a:endParaRPr lang="el-GR"/>
-          </a:p>
-        </p:txBody>
-      </p:sp>
+        </p:nvPicPr>
+        <p:blipFill>
+          <a:blip r:embed="rId2"/>
+          <a:stretch>
+            <a:fillRect/>
+          </a:stretch>
+        </p:blipFill>
+        <p:spPr>
+          <a:xfrm>
+            <a:off x="872067" y="3989832"/>
+            <a:ext cx="5462323" cy="1226111"/>
+          </a:xfrm>
+          <a:prstGeom prst="rect">
+            <a:avLst/>
+          </a:prstGeom>
+        </p:spPr>
+      </p:pic>
+      <p:pic>
+        <p:nvPicPr>
+          <p:cNvPr id="6" name="Εικόνα 5">
+            <a:extLst>
+              <a:ext uri="{FF2B5EF4-FFF2-40B4-BE49-F238E27FC236}">
+                <a16:creationId xmlns:a16="http://schemas.microsoft.com/office/drawing/2014/main" id="{68A2FBFC-2F6B-4DE8-A259-217535BBB839}"/>
+              </a:ext>
+            </a:extLst>
+          </p:cNvPr>
+          <p:cNvPicPr>
+            <a:picLocks noChangeAspect="1"/>
+          </p:cNvPicPr>
+          <p:nvPr/>
+        </p:nvPicPr>
+        <p:blipFill>
+          <a:blip r:embed="rId3"/>
+          <a:stretch>
+            <a:fillRect/>
+          </a:stretch>
+        </p:blipFill>
+        <p:spPr>
+          <a:xfrm>
+            <a:off x="940689" y="1921934"/>
+            <a:ext cx="4943475" cy="1590675"/>
+          </a:xfrm>
+          <a:prstGeom prst="rect">
+            <a:avLst/>
+          </a:prstGeom>
+        </p:spPr>
+      </p:pic>
     </p:spTree>
     <p:extLst>
       <p:ext uri="{BB962C8B-B14F-4D97-AF65-F5344CB8AC3E}">
@@ -22909,6 +22946,23 @@
 </file>
 
 <file path=customXml/item1.xml><?xml version="1.0" encoding="utf-8"?>
+<?mso-contentType ?>
+<FormTemplates xmlns="http://schemas.microsoft.com/sharepoint/v3/contenttype/forms">
+  <Display>DocumentLibraryForm</Display>
+  <Edit>DocumentLibraryForm</Edit>
+  <New>DocumentLibraryForm</New>
+</FormTemplates>
+</file>
+
+<file path=customXml/item2.xml><?xml version="1.0" encoding="utf-8"?>
+<p:properties xmlns:p="http://schemas.microsoft.com/office/2006/metadata/properties" xmlns:xsi="http://www.w3.org/2001/XMLSchema-instance" xmlns:pc="http://schemas.microsoft.com/office/infopath/2007/PartnerControls">
+  <documentManagement>
+    <MediaServiceKeyPoints xmlns="71af3243-3dd4-4a8d-8c0d-dd76da1f02a5" xsi:nil="true"/>
+  </documentManagement>
+</p:properties>
+</file>
+
+<file path=customXml/item3.xml><?xml version="1.0" encoding="utf-8"?>
 <ct:contentTypeSchema xmlns:ct="http://schemas.microsoft.com/office/2006/metadata/contentType" xmlns:ma="http://schemas.microsoft.com/office/2006/metadata/properties/metaAttributes" ct:_="" ma:_="" ma:contentTypeName="Document" ma:contentTypeID="0x01010079F111ED35F8CC479449609E8A0923A6" ma:contentTypeVersion="11" ma:contentTypeDescription="Create a new document." ma:contentTypeScope="" ma:versionID="9677210f24a1be23c92c90fd886aa0aa">
   <xsd:schema xmlns:xsd="http://www.w3.org/2001/XMLSchema" xmlns:xs="http://www.w3.org/2001/XMLSchema" xmlns:p="http://schemas.microsoft.com/office/2006/metadata/properties" xmlns:ns2="71af3243-3dd4-4a8d-8c0d-dd76da1f02a5" xmlns:ns3="16c05727-aa75-4e4a-9b5f-8a80a1165891" targetNamespace="http://schemas.microsoft.com/office/2006/metadata/properties" ma:root="true" ma:fieldsID="60e05723c5c1908df1a1a4ebf11d344e" ns2:_="" ns3:_="">
     <xsd:import namespace="71af3243-3dd4-4a8d-8c0d-dd76da1f02a5"/>
@@ -23119,24 +23173,32 @@
 </ct:contentTypeSchema>
 </file>
 
-<file path=customXml/item2.xml><?xml version="1.0" encoding="utf-8"?>
-<p:properties xmlns:p="http://schemas.microsoft.com/office/2006/metadata/properties" xmlns:xsi="http://www.w3.org/2001/XMLSchema-instance" xmlns:pc="http://schemas.microsoft.com/office/infopath/2007/PartnerControls">
-  <documentManagement>
-    <MediaServiceKeyPoints xmlns="71af3243-3dd4-4a8d-8c0d-dd76da1f02a5" xsi:nil="true"/>
-  </documentManagement>
-</p:properties>
+<file path=customXml/itemProps1.xml><?xml version="1.0" encoding="utf-8"?>
+<ds:datastoreItem xmlns:ds="http://schemas.openxmlformats.org/officeDocument/2006/customXml" ds:itemID="{4F44C90D-2A62-4985-9618-3460247437B1}">
+  <ds:schemaRefs>
+    <ds:schemaRef ds:uri="http://schemas.microsoft.com/sharepoint/v3/contenttype/forms"/>
+  </ds:schemaRefs>
+</ds:datastoreItem>
 </file>
 
-<file path=customXml/item3.xml><?xml version="1.0" encoding="utf-8"?>
-<?mso-contentType ?>
-<FormTemplates xmlns="http://schemas.microsoft.com/sharepoint/v3/contenttype/forms">
-  <Display>DocumentLibraryForm</Display>
-  <Edit>DocumentLibraryForm</Edit>
-  <New>DocumentLibraryForm</New>
-</FormTemplates>
+<file path=customXml/itemProps2.xml><?xml version="1.0" encoding="utf-8"?>
+<ds:datastoreItem xmlns:ds="http://schemas.openxmlformats.org/officeDocument/2006/customXml" ds:itemID="{788A2F88-55C5-4ED1-9541-807C65424763}">
+  <ds:schemaRefs>
+    <ds:schemaRef ds:uri="http://purl.org/dc/elements/1.1/"/>
+    <ds:schemaRef ds:uri="http://schemas.microsoft.com/office/2006/metadata/properties"/>
+    <ds:schemaRef ds:uri="http://www.w3.org/XML/1998/namespace"/>
+    <ds:schemaRef ds:uri="http://schemas.microsoft.com/office/2006/documentManagement/types"/>
+    <ds:schemaRef ds:uri="71af3243-3dd4-4a8d-8c0d-dd76da1f02a5"/>
+    <ds:schemaRef ds:uri="16c05727-aa75-4e4a-9b5f-8a80a1165891"/>
+    <ds:schemaRef ds:uri="http://purl.org/dc/dcmitype/"/>
+    <ds:schemaRef ds:uri="http://purl.org/dc/terms/"/>
+    <ds:schemaRef ds:uri="http://schemas.microsoft.com/office/infopath/2007/PartnerControls"/>
+    <ds:schemaRef ds:uri="http://schemas.openxmlformats.org/package/2006/metadata/core-properties"/>
+  </ds:schemaRefs>
+</ds:datastoreItem>
 </file>
 
-<file path=customXml/itemProps1.xml><?xml version="1.0" encoding="utf-8"?>
+<file path=customXml/itemProps3.xml><?xml version="1.0" encoding="utf-8"?>
 <ds:datastoreItem xmlns:ds="http://schemas.openxmlformats.org/officeDocument/2006/customXml" ds:itemID="{B61EAB5F-88FC-4FAE-AE3C-037A3C365EB8}">
   <ds:schemaRefs>
     <ds:schemaRef ds:uri="http://schemas.microsoft.com/office/2006/metadata/contentType"/>
@@ -23153,22 +23215,4 @@
     <ds:schemaRef ds:uri="http://schemas.microsoft.com/internal/obd"/>
   </ds:schemaRefs>
 </ds:datastoreItem>
-</file>
-
-<file path=customXml/itemProps2.xml><?xml version="1.0" encoding="utf-8"?>
-<ds:datastoreItem xmlns:ds="http://schemas.openxmlformats.org/officeDocument/2006/customXml" ds:itemID="{788A2F88-55C5-4ED1-9541-807C65424763}">
-  <ds:schemaRefs>
-    <ds:schemaRef ds:uri="http://schemas.microsoft.com/office/2006/metadata/properties"/>
-    <ds:schemaRef ds:uri="http://schemas.microsoft.com/office/infopath/2007/PartnerControls"/>
-    <ds:schemaRef ds:uri="71af3243-3dd4-4a8d-8c0d-dd76da1f02a5"/>
-  </ds:schemaRefs>
-</ds:datastoreItem>
-</file>
-
-<file path=customXml/itemProps3.xml><?xml version="1.0" encoding="utf-8"?>
-<ds:datastoreItem xmlns:ds="http://schemas.openxmlformats.org/officeDocument/2006/customXml" ds:itemID="{4F44C90D-2A62-4985-9618-3460247437B1}">
-  <ds:schemaRefs>
-    <ds:schemaRef ds:uri="http://schemas.microsoft.com/sharepoint/v3/contenttype/forms"/>
-  </ds:schemaRefs>
-</ds:datastoreItem>
 </file>
--- a/parousiasidiktia.pptx
+++ b/parousiasidiktia.pptx
@@ -21718,7 +21718,63 @@
           <a:bodyPr/>
           <a:lstStyle/>
           <a:p>
-            <a:endParaRPr lang="el-GR"/>
+            <a:r>
+              <a:rPr lang="en-US" dirty="0" err="1"/>
+              <a:t>Numpy</a:t>
+            </a:r>
+            <a:r>
+              <a:rPr lang="en-US" dirty="0"/>
+              <a:t> for working with arrays</a:t>
+            </a:r>
+          </a:p>
+          <a:p>
+            <a:r>
+              <a:rPr lang="en-US" dirty="0"/>
+              <a:t>Pandas for working with relational or labeled data</a:t>
+            </a:r>
+          </a:p>
+          <a:p>
+            <a:r>
+              <a:rPr lang="en-US" dirty="0"/>
+              <a:t>Matplotlib for data visualization</a:t>
+            </a:r>
+          </a:p>
+          <a:p>
+            <a:r>
+              <a:rPr lang="en-US" dirty="0"/>
+              <a:t>Seaborn for data visualization</a:t>
+            </a:r>
+          </a:p>
+          <a:p>
+            <a:r>
+              <a:rPr lang="en-US" dirty="0" err="1"/>
+              <a:t>DateTime</a:t>
+            </a:r>
+            <a:r>
+              <a:rPr lang="en-US" dirty="0"/>
+              <a:t> to work with data and time</a:t>
+            </a:r>
+          </a:p>
+          <a:p>
+            <a:r>
+              <a:rPr lang="en-US" dirty="0" err="1"/>
+              <a:t>MinMaxScaler</a:t>
+            </a:r>
+            <a:r>
+              <a:rPr lang="en-US" dirty="0"/>
+              <a:t> for normalization</a:t>
+            </a:r>
+          </a:p>
+          <a:p>
+            <a:r>
+              <a:rPr lang="en-US" dirty="0" err="1"/>
+              <a:t>PyTorch</a:t>
+            </a:r>
+            <a:r>
+              <a:rPr lang="en-US"/>
+              <a:t> to build the neural network for training </a:t>
+            </a:r>
+            <a:endParaRPr lang="el-GR" dirty="0"/>
           </a:p>
         </p:txBody>
       </p:sp>

--- a/parousiasidiktia.pptx
+++ b/parousiasidiktia.pptx
@@ -5,17 +5,22 @@
     <p:sldMasterId id="2147483648" r:id="rId4"/>
   </p:sldMasterIdLst>
   <p:notesMasterIdLst>
-    <p:notesMasterId r:id="rId10"/>
+    <p:notesMasterId r:id="rId15"/>
   </p:notesMasterIdLst>
   <p:handoutMasterIdLst>
-    <p:handoutMasterId r:id="rId11"/>
+    <p:handoutMasterId r:id="rId16"/>
   </p:handoutMasterIdLst>
   <p:sldIdLst>
     <p:sldId id="256" r:id="rId5"/>
     <p:sldId id="277" r:id="rId6"/>
-    <p:sldId id="278" r:id="rId7"/>
-    <p:sldId id="279" r:id="rId8"/>
-    <p:sldId id="280" r:id="rId9"/>
+    <p:sldId id="281" r:id="rId7"/>
+    <p:sldId id="278" r:id="rId8"/>
+    <p:sldId id="279" r:id="rId9"/>
+    <p:sldId id="280" r:id="rId10"/>
+    <p:sldId id="282" r:id="rId11"/>
+    <p:sldId id="283" r:id="rId12"/>
+    <p:sldId id="285" r:id="rId13"/>
+    <p:sldId id="284" r:id="rId14"/>
   </p:sldIdLst>
   <p:sldSz cx="12192000" cy="6858000"/>
   <p:notesSz cx="6858000" cy="9144000"/>
@@ -209,7 +214,7 @@
             <a:pPr rtl="0"/>
             <a:fld id="{F0EC7D35-77BB-4867-BAC6-5C40C37B98F1}" type="datetime1">
               <a:rPr lang="el-GR" smtClean="0"/>
-              <a:t>27/3/2026</a:t>
+              <a:t>29/3/2026</a:t>
             </a:fld>
             <a:endParaRPr lang="el-GR" dirty="0"/>
           </a:p>
@@ -379,7 +384,7 @@
             <a:pPr rtl="0"/>
             <a:fld id="{707ABAE7-72BE-4378-9C66-B300388DE536}" type="datetime1">
               <a:rPr lang="el-GR" noProof="0" smtClean="0"/>
-              <a:t>27/3/2026</a:t>
+              <a:t>29/3/2026</a:t>
             </a:fld>
             <a:endParaRPr lang="el-GR" noProof="0" dirty="0"/>
           </a:p>
@@ -9618,7 +9623,7 @@
             <a:pPr rtl="0"/>
             <a:fld id="{EABDBA74-E4DB-4313-95D3-B7F630EE7B7F}" type="datetime1">
               <a:rPr lang="el-GR" noProof="0" smtClean="0"/>
-              <a:t>27/3/2026</a:t>
+              <a:t>29/3/2026</a:t>
             </a:fld>
             <a:endParaRPr lang="el-GR" noProof="0" dirty="0"/>
           </a:p>
@@ -9824,7 +9829,7 @@
             <a:pPr rtl="0"/>
             <a:fld id="{D9C97E28-F60A-427B-851A-BCC048F06BC7}" type="datetime1">
               <a:rPr lang="el-GR" noProof="0" smtClean="0"/>
-              <a:t>27/3/2026</a:t>
+              <a:t>29/3/2026</a:t>
             </a:fld>
             <a:endParaRPr lang="el-GR" noProof="0" dirty="0"/>
           </a:p>
@@ -10003,7 +10008,7 @@
             <a:pPr rtl="0"/>
             <a:fld id="{4EA33EDB-81C3-4DAA-87EA-DA21D6A7FC6C}" type="datetime1">
               <a:rPr lang="el-GR" noProof="0" smtClean="0"/>
-              <a:t>27/3/2026</a:t>
+              <a:t>29/3/2026</a:t>
             </a:fld>
             <a:endParaRPr lang="el-GR" noProof="0" dirty="0"/>
           </a:p>
@@ -10207,7 +10212,7 @@
             <a:pPr rtl="0"/>
             <a:fld id="{0FE5ACA5-56F5-4208-8101-108DA68822C6}" type="datetime1">
               <a:rPr lang="el-GR" noProof="0" smtClean="0"/>
-              <a:t>27/3/2026</a:t>
+              <a:t>29/3/2026</a:t>
             </a:fld>
             <a:endParaRPr lang="el-GR" noProof="0" dirty="0"/>
           </a:p>
@@ -19104,7 +19109,7 @@
             <a:pPr rtl="0"/>
             <a:fld id="{98AAE694-814A-4F58-A8E2-AA9B6575E0B5}" type="datetime1">
               <a:rPr lang="el-GR" noProof="0" smtClean="0"/>
-              <a:t>27/3/2026</a:t>
+              <a:t>29/3/2026</a:t>
             </a:fld>
             <a:endParaRPr lang="el-GR" noProof="0" dirty="0"/>
           </a:p>
@@ -19377,7 +19382,7 @@
             <a:pPr rtl="0"/>
             <a:fld id="{98B30D4A-F623-45A5-BE49-543B4B609AF2}" type="datetime1">
               <a:rPr lang="el-GR" noProof="0" smtClean="0"/>
-              <a:t>27/3/2026</a:t>
+              <a:t>29/3/2026</a:t>
             </a:fld>
             <a:endParaRPr lang="el-GR" noProof="0" dirty="0"/>
           </a:p>
@@ -19774,7 +19779,7 @@
             <a:pPr rtl="0"/>
             <a:fld id="{06412F62-D18F-463A-9A7E-E4809AAD76E4}" type="datetime1">
               <a:rPr lang="el-GR" noProof="0" smtClean="0"/>
-              <a:t>27/3/2026</a:t>
+              <a:t>29/3/2026</a:t>
             </a:fld>
             <a:endParaRPr lang="el-GR" noProof="0" dirty="0"/>
           </a:p>
@@ -19891,7 +19896,7 @@
             <a:pPr rtl="0"/>
             <a:fld id="{D2009D47-CF8A-48CB-81B8-5988DBFADA28}" type="datetime1">
               <a:rPr lang="el-GR" noProof="0" smtClean="0"/>
-              <a:t>27/3/2026</a:t>
+              <a:t>29/3/2026</a:t>
             </a:fld>
             <a:endParaRPr lang="el-GR" noProof="0" dirty="0"/>
           </a:p>
@@ -19984,7 +19989,7 @@
             <a:pPr rtl="0"/>
             <a:fld id="{89B075A6-4B0E-489A-92E5-C2C81D969D11}" type="datetime1">
               <a:rPr lang="el-GR" noProof="0" smtClean="0"/>
-              <a:t>27/3/2026</a:t>
+              <a:t>29/3/2026</a:t>
             </a:fld>
             <a:endParaRPr lang="el-GR" noProof="0" dirty="0"/>
           </a:p>
@@ -20273,7 +20278,7 @@
             <a:pPr rtl="0"/>
             <a:fld id="{7C290451-C354-46E0-BBD8-0317D7A1384C}" type="datetime1">
               <a:rPr lang="el-GR" noProof="0" smtClean="0"/>
-              <a:t>27/3/2026</a:t>
+              <a:t>29/3/2026</a:t>
             </a:fld>
             <a:endParaRPr lang="el-GR" noProof="0" dirty="0"/>
           </a:p>
@@ -20553,7 +20558,7 @@
             <a:pPr rtl="0"/>
             <a:fld id="{05DAA40D-D363-46A0-9276-B6A4797DC9A5}" type="datetime1">
               <a:rPr lang="el-GR" noProof="0" smtClean="0"/>
-              <a:t>27/3/2026</a:t>
+              <a:t>29/3/2026</a:t>
             </a:fld>
             <a:endParaRPr lang="el-GR" noProof="0" dirty="0"/>
           </a:p>
@@ -20799,7 +20804,7 @@
           <a:p>
             <a:fld id="{F98FDC76-A1F5-4EE8-BDE3-5EFC56AAE7AD}" type="datetime1">
               <a:rPr lang="el-GR" noProof="0" smtClean="0"/>
-              <a:t>27/3/2026</a:t>
+              <a:t>29/3/2026</a:t>
             </a:fld>
             <a:endParaRPr lang="el-GR" noProof="0" dirty="0"/>
           </a:p>
@@ -21637,6 +21642,121 @@
 </p:sld>
 </file>
 
+<file path=ppt/slides/slide10.xml><?xml version="1.0" encoding="utf-8"?>
+<p:sld xmlns:a="http://schemas.openxmlformats.org/drawingml/2006/main" xmlns:r="http://schemas.openxmlformats.org/officeDocument/2006/relationships" xmlns:p="http://schemas.openxmlformats.org/presentationml/2006/main">
+  <p:cSld>
+    <p:spTree>
+      <p:nvGrpSpPr>
+        <p:cNvPr id="1" name=""/>
+        <p:cNvGrpSpPr/>
+        <p:nvPr/>
+      </p:nvGrpSpPr>
+      <p:grpSpPr>
+        <a:xfrm>
+          <a:off x="0" y="0"/>
+          <a:ext cx="0" cy="0"/>
+          <a:chOff x="0" y="0"/>
+          <a:chExt cx="0" cy="0"/>
+        </a:xfrm>
+      </p:grpSpPr>
+      <p:sp>
+        <p:nvSpPr>
+          <p:cNvPr id="2" name="Τίτλος 1">
+            <a:extLst>
+              <a:ext uri="{FF2B5EF4-FFF2-40B4-BE49-F238E27FC236}">
+                <a16:creationId xmlns:a16="http://schemas.microsoft.com/office/drawing/2014/main" id="{0544732C-F72A-4B10-A476-DD554BAD1E51}"/>
+              </a:ext>
+            </a:extLst>
+          </p:cNvPr>
+          <p:cNvSpPr>
+            <a:spLocks noGrp="1"/>
+          </p:cNvSpPr>
+          <p:nvPr>
+            <p:ph type="title"/>
+          </p:nvPr>
+        </p:nvSpPr>
+        <p:spPr/>
+        <p:txBody>
+          <a:bodyPr/>
+          <a:lstStyle/>
+          <a:p>
+            <a:r>
+              <a:rPr lang="el-GR" dirty="0" err="1"/>
+              <a:t>Βιβλιογραφια</a:t>
+            </a:r>
+            <a:r>
+              <a:rPr lang="el-GR" dirty="0"/>
+              <a:t> </a:t>
+            </a:r>
+          </a:p>
+        </p:txBody>
+      </p:sp>
+      <p:sp>
+        <p:nvSpPr>
+          <p:cNvPr id="3" name="Θέση περιεχομένου 2">
+            <a:extLst>
+              <a:ext uri="{FF2B5EF4-FFF2-40B4-BE49-F238E27FC236}">
+                <a16:creationId xmlns:a16="http://schemas.microsoft.com/office/drawing/2014/main" id="{65E1C9D1-088C-4907-A90D-A38F7FB2D583}"/>
+              </a:ext>
+            </a:extLst>
+          </p:cNvPr>
+          <p:cNvSpPr>
+            <a:spLocks noGrp="1"/>
+          </p:cNvSpPr>
+          <p:nvPr>
+            <p:ph idx="1"/>
+          </p:nvPr>
+        </p:nvSpPr>
+        <p:spPr/>
+        <p:txBody>
+          <a:bodyPr/>
+          <a:lstStyle/>
+          <a:p>
+            <a:pPr>
+              <a:buFont typeface="Wingdings" panose="05000000000000000000" pitchFamily="2" charset="2"/>
+              <a:buChar char="§"/>
+            </a:pPr>
+            <a:r>
+              <a:rPr lang="en-US" dirty="0"/>
+              <a:t>https://www.geeksforgeeks.org/deep-learning/introduction-deep-learning/</a:t>
+            </a:r>
+          </a:p>
+          <a:p>
+            <a:pPr>
+              <a:buFont typeface="Wingdings" panose="05000000000000000000" pitchFamily="2" charset="2"/>
+              <a:buChar char="§"/>
+            </a:pPr>
+            <a:r>
+              <a:rPr lang="en-US" dirty="0"/>
+              <a:t>https://www.geeksforgeeks.org/machine-learning/time-series-analysis-and-forecasting/</a:t>
+            </a:r>
+          </a:p>
+          <a:p>
+            <a:pPr>
+              <a:buFont typeface="Wingdings" panose="05000000000000000000" pitchFamily="2" charset="2"/>
+              <a:buChar char="§"/>
+            </a:pPr>
+            <a:r>
+              <a:rPr lang="en-US" dirty="0"/>
+              <a:t>https://www.geeksforgeeks.org/time-series-forecasting-using-pytorch/</a:t>
+            </a:r>
+            <a:endParaRPr lang="el-GR" dirty="0"/>
+          </a:p>
+        </p:txBody>
+      </p:sp>
+    </p:spTree>
+    <p:extLst>
+      <p:ext uri="{BB962C8B-B14F-4D97-AF65-F5344CB8AC3E}">
+        <p14:creationId xmlns:p14="http://schemas.microsoft.com/office/powerpoint/2010/main" val="152612609"/>
+      </p:ext>
+    </p:extLst>
+  </p:cSld>
+  <p:clrMapOvr>
+    <a:masterClrMapping/>
+  </p:clrMapOvr>
+</p:sld>
+</file>
+
 <file path=ppt/slides/slide2.xml><?xml version="1.0" encoding="utf-8"?>
 <p:sld xmlns:a="http://schemas.openxmlformats.org/drawingml/2006/main" xmlns:r="http://schemas.openxmlformats.org/officeDocument/2006/relationships" xmlns:p="http://schemas.openxmlformats.org/presentationml/2006/main">
   <p:cSld>
@@ -21718,63 +21838,117 @@
           <a:bodyPr/>
           <a:lstStyle/>
           <a:p>
+            <a:pPr algn="just">
+              <a:buFont typeface="Wingdings" panose="05000000000000000000" pitchFamily="2" charset="2"/>
+              <a:buChar char="§"/>
+            </a:pPr>
             <a:r>
-              <a:rPr lang="en-US" dirty="0" err="1"/>
-              <a:t>Numpy</a:t>
+              <a:rPr lang="el-GR" dirty="0"/>
+              <a:t>Η εργασία αποσκοπεί στην πρόβλεψη της χρήσης πόρων σε </a:t>
             </a:r>
             <a:r>
               <a:rPr lang="en-US" dirty="0"/>
-              <a:t> for working with arrays</a:t>
+              <a:t>b</a:t>
             </a:r>
+            <a:r>
+              <a:rPr lang="el-GR" dirty="0" err="1"/>
+              <a:t>are</a:t>
+            </a:r>
+            <a:r>
+              <a:rPr lang="el-GR" dirty="0"/>
+              <a:t> </a:t>
+            </a:r>
+            <a:r>
+              <a:rPr lang="el-GR" dirty="0" err="1"/>
+              <a:t>metal</a:t>
+            </a:r>
+            <a:r>
+              <a:rPr lang="el-GR" dirty="0"/>
+              <a:t> </a:t>
+            </a:r>
+            <a:r>
+              <a:rPr lang="el-GR" dirty="0" err="1"/>
+              <a:t>nodes</a:t>
+            </a:r>
+            <a:r>
+              <a:rPr lang="el-GR" dirty="0"/>
+              <a:t>, χρησιμοποιώντας </a:t>
+            </a:r>
+            <a:r>
+              <a:rPr lang="el-GR" dirty="0" err="1"/>
+              <a:t>time</a:t>
+            </a:r>
+            <a:r>
+              <a:rPr lang="el-GR" dirty="0"/>
+              <a:t> </a:t>
+            </a:r>
+            <a:r>
+              <a:rPr lang="el-GR" dirty="0" err="1"/>
+              <a:t>series</a:t>
+            </a:r>
+            <a:r>
+              <a:rPr lang="el-GR" dirty="0"/>
+              <a:t> </a:t>
+            </a:r>
+            <a:r>
+              <a:rPr lang="el-GR" dirty="0" err="1"/>
+              <a:t>data</a:t>
+            </a:r>
+            <a:r>
+              <a:rPr lang="el-GR" dirty="0"/>
+              <a:t> από CPU και RAM. </a:t>
+            </a:r>
+            <a:endParaRPr lang="en-US" dirty="0"/>
           </a:p>
           <a:p>
+            <a:pPr algn="just">
+              <a:buFont typeface="Wingdings" panose="05000000000000000000" pitchFamily="2" charset="2"/>
+              <a:buChar char="§"/>
+            </a:pPr>
             <a:r>
-              <a:rPr lang="en-US" dirty="0"/>
-              <a:t>Pandas for working with relational or labeled data</a:t>
-            </a:r>
-          </a:p>
-          <a:p>
-            <a:r>
-              <a:rPr lang="en-US" dirty="0"/>
-              <a:t>Matplotlib for data visualization</a:t>
-            </a:r>
-          </a:p>
-          <a:p>
-            <a:r>
-              <a:rPr lang="en-US" dirty="0"/>
-              <a:t>Seaborn for data visualization</a:t>
-            </a:r>
-          </a:p>
-          <a:p>
-            <a:r>
-              <a:rPr lang="en-US" dirty="0" err="1"/>
-              <a:t>DateTime</a:t>
+              <a:rPr lang="el-GR" dirty="0"/>
+              <a:t>Σκοπός της παρόν εργασίας είναι η κατασκευή, η εκπαίδευση και ο έλεγχος (</a:t>
             </a:r>
             <a:r>
-              <a:rPr lang="en-US" dirty="0"/>
-              <a:t> to work with data and time</a:t>
-            </a:r>
-          </a:p>
-          <a:p>
-            <a:r>
-              <a:rPr lang="en-US" dirty="0" err="1"/>
-              <a:t>MinMaxScaler</a:t>
+              <a:rPr lang="el-GR" dirty="0" err="1"/>
+              <a:t>testing</a:t>
             </a:r>
             <a:r>
-              <a:rPr lang="en-US" dirty="0"/>
-              <a:t> for normalization</a:t>
-            </a:r>
-          </a:p>
-          <a:p>
-            <a:r>
-              <a:rPr lang="en-US" dirty="0" err="1"/>
-              <a:t>PyTorch</a:t>
+              <a:rPr lang="el-GR" dirty="0"/>
+              <a:t>) μοντέλων πρόβλεψης για </a:t>
             </a:r>
             <a:r>
-              <a:rPr lang="en-US"/>
-              <a:t> to build the neural network for training </a:t>
+              <a:rPr lang="el-GR" dirty="0" err="1"/>
+              <a:t>χρονοσειρές</a:t>
             </a:r>
-            <a:endParaRPr lang="el-GR" dirty="0"/>
+            <a:r>
+              <a:rPr lang="el-GR" dirty="0"/>
+              <a:t> τόσο για μικρά όσο και μεγάλα διαστήματά (</a:t>
+            </a:r>
+            <a:r>
+              <a:rPr lang="el-GR" dirty="0" err="1"/>
+              <a:t>short-term</a:t>
+            </a:r>
+            <a:r>
+              <a:rPr lang="el-GR" dirty="0"/>
+              <a:t>, </a:t>
+            </a:r>
+            <a:r>
+              <a:rPr lang="el-GR" dirty="0" err="1"/>
+              <a:t>long-term</a:t>
+            </a:r>
+            <a:r>
+              <a:rPr lang="el-GR" dirty="0"/>
+              <a:t> </a:t>
+            </a:r>
+            <a:r>
+              <a:rPr lang="el-GR" dirty="0" err="1"/>
+              <a:t>prediction</a:t>
+            </a:r>
+            <a:r>
+              <a:rPr lang="el-GR" dirty="0"/>
+              <a:t>).</a:t>
+            </a:r>
           </a:p>
         </p:txBody>
       </p:sp>
@@ -21813,6 +21987,211 @@
           <p:cNvPr id="2" name="Τίτλος 1">
             <a:extLst>
               <a:ext uri="{FF2B5EF4-FFF2-40B4-BE49-F238E27FC236}">
+                <a16:creationId xmlns:a16="http://schemas.microsoft.com/office/drawing/2014/main" id="{0EA9875D-160F-46FA-BDE3-529AFED16B7A}"/>
+              </a:ext>
+            </a:extLst>
+          </p:cNvPr>
+          <p:cNvSpPr>
+            <a:spLocks noGrp="1"/>
+          </p:cNvSpPr>
+          <p:nvPr>
+            <p:ph type="title"/>
+          </p:nvPr>
+        </p:nvSpPr>
+        <p:spPr/>
+        <p:txBody>
+          <a:bodyPr/>
+          <a:lstStyle/>
+          <a:p>
+            <a:r>
+              <a:rPr lang="el-GR" dirty="0"/>
+              <a:t>ΒΙΒΛΙΟΘΗΚΕΣ</a:t>
+            </a:r>
+          </a:p>
+        </p:txBody>
+      </p:sp>
+      <p:sp>
+        <p:nvSpPr>
+          <p:cNvPr id="3" name="Θέση περιεχομένου 2">
+            <a:extLst>
+              <a:ext uri="{FF2B5EF4-FFF2-40B4-BE49-F238E27FC236}">
+                <a16:creationId xmlns:a16="http://schemas.microsoft.com/office/drawing/2014/main" id="{E2052E99-8256-4CF8-B3FA-B6B0F1C9E459}"/>
+              </a:ext>
+            </a:extLst>
+          </p:cNvPr>
+          <p:cNvSpPr>
+            <a:spLocks noGrp="1"/>
+          </p:cNvSpPr>
+          <p:nvPr>
+            <p:ph idx="1"/>
+          </p:nvPr>
+        </p:nvSpPr>
+        <p:spPr/>
+        <p:txBody>
+          <a:bodyPr/>
+          <a:lstStyle/>
+          <a:p>
+            <a:pPr>
+              <a:buFont typeface="Wingdings" panose="05000000000000000000" pitchFamily="2" charset="2"/>
+              <a:buChar char="§"/>
+            </a:pPr>
+            <a:r>
+              <a:rPr lang="en-US" b="1" dirty="0" err="1"/>
+              <a:t>Numpy</a:t>
+            </a:r>
+            <a:r>
+              <a:rPr lang="en-US" dirty="0"/>
+              <a:t> for working with arrays</a:t>
+            </a:r>
+          </a:p>
+          <a:p>
+            <a:pPr>
+              <a:buFont typeface="Wingdings" panose="05000000000000000000" pitchFamily="2" charset="2"/>
+              <a:buChar char="§"/>
+            </a:pPr>
+            <a:r>
+              <a:rPr lang="en-US" b="1" dirty="0"/>
+              <a:t>Pandas</a:t>
+            </a:r>
+            <a:r>
+              <a:rPr lang="en-US" dirty="0"/>
+              <a:t> for working with relational or labeled data</a:t>
+            </a:r>
+          </a:p>
+          <a:p>
+            <a:pPr>
+              <a:buFont typeface="Wingdings" panose="05000000000000000000" pitchFamily="2" charset="2"/>
+              <a:buChar char="§"/>
+            </a:pPr>
+            <a:r>
+              <a:rPr lang="en-US" b="1" dirty="0"/>
+              <a:t>Matplotlib</a:t>
+            </a:r>
+            <a:r>
+              <a:rPr lang="en-US" dirty="0"/>
+              <a:t> for data visualization</a:t>
+            </a:r>
+          </a:p>
+          <a:p>
+            <a:pPr>
+              <a:buFont typeface="Wingdings" panose="05000000000000000000" pitchFamily="2" charset="2"/>
+              <a:buChar char="§"/>
+            </a:pPr>
+            <a:r>
+              <a:rPr lang="en-US" b="1" dirty="0" err="1"/>
+              <a:t>DateTime</a:t>
+            </a:r>
+            <a:r>
+              <a:rPr lang="en-US" dirty="0"/>
+              <a:t> to work with data and time</a:t>
+            </a:r>
+          </a:p>
+          <a:p>
+            <a:pPr>
+              <a:buFont typeface="Wingdings" panose="05000000000000000000" pitchFamily="2" charset="2"/>
+              <a:buChar char="§"/>
+            </a:pPr>
+            <a:r>
+              <a:rPr lang="en-US" b="1" dirty="0" err="1"/>
+              <a:t>MinMaxScaler</a:t>
+            </a:r>
+            <a:r>
+              <a:rPr lang="en-US" dirty="0"/>
+              <a:t> for normalization</a:t>
+            </a:r>
+          </a:p>
+          <a:p>
+            <a:pPr>
+              <a:buFont typeface="Wingdings" panose="05000000000000000000" pitchFamily="2" charset="2"/>
+              <a:buChar char="§"/>
+            </a:pPr>
+            <a:r>
+              <a:rPr lang="en-US" b="1" dirty="0" err="1"/>
+              <a:t>PyTorch</a:t>
+            </a:r>
+            <a:r>
+              <a:rPr lang="en-US" dirty="0"/>
+              <a:t> to build the neural network for training </a:t>
+            </a:r>
+            <a:endParaRPr lang="el-GR" dirty="0"/>
+          </a:p>
+          <a:p>
+            <a:endParaRPr lang="el-GR" dirty="0"/>
+          </a:p>
+        </p:txBody>
+      </p:sp>
+    </p:spTree>
+    <p:extLst>
+      <p:ext uri="{BB962C8B-B14F-4D97-AF65-F5344CB8AC3E}">
+        <p14:creationId xmlns:p14="http://schemas.microsoft.com/office/powerpoint/2010/main" val="2064187446"/>
+      </p:ext>
+    </p:extLst>
+  </p:cSld>
+  <p:clrMapOvr>
+    <a:masterClrMapping/>
+  </p:clrMapOvr>
+</p:sld>
+</file>
+
+<file path=ppt/slides/slide4.xml><?xml version="1.0" encoding="utf-8"?>
+<p:sld xmlns:a="http://schemas.openxmlformats.org/drawingml/2006/main" xmlns:r="http://schemas.openxmlformats.org/officeDocument/2006/relationships" xmlns:p="http://schemas.openxmlformats.org/presentationml/2006/main">
+  <p:cSld>
+    <p:spTree>
+      <p:nvGrpSpPr>
+        <p:cNvPr id="1" name=""/>
+        <p:cNvGrpSpPr/>
+        <p:nvPr/>
+      </p:nvGrpSpPr>
+      <p:grpSpPr>
+        <a:xfrm>
+          <a:off x="0" y="0"/>
+          <a:ext cx="0" cy="0"/>
+          <a:chOff x="0" y="0"/>
+          <a:chExt cx="0" cy="0"/>
+        </a:xfrm>
+      </p:grpSpPr>
+      <p:pic>
+        <p:nvPicPr>
+          <p:cNvPr id="3" name="Εικόνα 2">
+            <a:extLst>
+              <a:ext uri="{FF2B5EF4-FFF2-40B4-BE49-F238E27FC236}">
+                <a16:creationId xmlns:a16="http://schemas.microsoft.com/office/drawing/2014/main" id="{05B6AA2D-A20D-45A1-8538-5CF4858DD90E}"/>
+              </a:ext>
+            </a:extLst>
+          </p:cNvPr>
+          <p:cNvPicPr>
+            <a:picLocks noChangeAspect="1"/>
+          </p:cNvPicPr>
+          <p:nvPr/>
+        </p:nvPicPr>
+        <p:blipFill>
+          <a:blip r:embed="rId2"/>
+          <a:stretch>
+            <a:fillRect/>
+          </a:stretch>
+        </p:blipFill>
+        <p:spPr>
+          <a:xfrm>
+            <a:off x="714840" y="1819835"/>
+            <a:ext cx="10935824" cy="4661647"/>
+          </a:xfrm>
+          <a:prstGeom prst="rect">
+            <a:avLst/>
+          </a:prstGeom>
+          <a:effectLst>
+            <a:outerShdw blurRad="50800" dist="50800" dir="5400000" sx="5000" sy="5000" algn="ctr" rotWithShape="0">
+              <a:srgbClr val="000000">
+                <a:alpha val="43137"/>
+              </a:srgbClr>
+            </a:outerShdw>
+          </a:effectLst>
+        </p:spPr>
+      </p:pic>
+      <p:sp>
+        <p:nvSpPr>
+          <p:cNvPr id="2" name="Τίτλος 1">
+            <a:extLst>
+              <a:ext uri="{FF2B5EF4-FFF2-40B4-BE49-F238E27FC236}">
                 <a16:creationId xmlns:a16="http://schemas.microsoft.com/office/drawing/2014/main" id="{0C475809-3183-44E6-BD92-8173E857EA74}"/>
               </a:ext>
             </a:extLst>
@@ -21830,9 +22209,22 @@
           <a:lstStyle/>
           <a:p>
             <a:r>
-              <a:rPr lang="el-GR" dirty="0"/>
-              <a:t>Δεδομένα</a:t>
+              <a:rPr lang="el-GR"/>
+              <a:t>ΤΟ</a:t>
             </a:r>
+            <a:r>
+              <a:rPr lang="en-US"/>
+              <a:t> ALIBABA CLUSTER</a:t>
+            </a:r>
+            <a:r>
+              <a:rPr lang="el-GR"/>
+              <a:t> </a:t>
+            </a:r>
+            <a:r>
+              <a:rPr lang="en-US"/>
+              <a:t>DATASET</a:t>
+            </a:r>
+            <a:endParaRPr lang="el-GR" dirty="0"/>
           </a:p>
         </p:txBody>
       </p:sp>
@@ -21853,19 +22245,24 @@
           </p:nvPr>
         </p:nvPicPr>
         <p:blipFill>
-          <a:blip r:embed="rId2"/>
+          <a:blip r:embed="rId3"/>
           <a:stretch>
             <a:fillRect/>
           </a:stretch>
         </p:blipFill>
         <p:spPr>
           <a:xfrm>
-            <a:off x="872067" y="3989832"/>
-            <a:ext cx="5462323" cy="1226111"/>
+            <a:off x="5273232" y="4365812"/>
+            <a:ext cx="6203928" cy="1767033"/>
           </a:xfrm>
           <a:prstGeom prst="rect">
             <a:avLst/>
           </a:prstGeom>
+          <a:ln w="38100">
+            <a:solidFill>
+              <a:srgbClr val="C00000"/>
+            </a:solidFill>
+          </a:ln>
         </p:spPr>
       </p:pic>
       <p:pic>
@@ -21883,19 +22280,24 @@
           <p:nvPr/>
         </p:nvPicPr>
         <p:blipFill>
-          <a:blip r:embed="rId3"/>
+          <a:blip r:embed="rId4"/>
           <a:stretch>
             <a:fillRect/>
           </a:stretch>
         </p:blipFill>
         <p:spPr>
           <a:xfrm>
-            <a:off x="940689" y="1921934"/>
-            <a:ext cx="4943475" cy="1590675"/>
+            <a:off x="1024128" y="2211909"/>
+            <a:ext cx="3782458" cy="1382938"/>
           </a:xfrm>
           <a:prstGeom prst="rect">
             <a:avLst/>
           </a:prstGeom>
+          <a:ln w="47625">
+            <a:solidFill>
+              <a:srgbClr val="C00000"/>
+            </a:solidFill>
+          </a:ln>
         </p:spPr>
       </p:pic>
     </p:spTree>
@@ -21911,7 +22313,7 @@
 </p:sld>
 </file>
 
-<file path=ppt/slides/slide4.xml><?xml version="1.0" encoding="utf-8"?>
+<file path=ppt/slides/slide5.xml><?xml version="1.0" encoding="utf-8"?>
 <p:sld xmlns:a="http://schemas.openxmlformats.org/drawingml/2006/main" xmlns:r="http://schemas.openxmlformats.org/officeDocument/2006/relationships" xmlns:p="http://schemas.openxmlformats.org/presentationml/2006/main">
   <p:cSld>
     <p:spTree>
@@ -21952,6 +22354,10 @@
             <a:r>
               <a:rPr lang="el-GR" dirty="0" err="1"/>
               <a:t>Προεπεξεργασία</a:t>
+            </a:r>
+            <a:r>
+              <a:rPr lang="en-US" dirty="0"/>
+              <a:t>(1)</a:t>
             </a:r>
             <a:endParaRPr lang="el-GR" dirty="0"/>
           </a:p>
@@ -22039,7 +22445,7 @@
 </p:sld>
 </file>
 
-<file path=ppt/slides/slide5.xml><?xml version="1.0" encoding="utf-8"?>
+<file path=ppt/slides/slide6.xml><?xml version="1.0" encoding="utf-8"?>
 <p:sld xmlns:a="http://schemas.openxmlformats.org/drawingml/2006/main" xmlns:r="http://schemas.openxmlformats.org/officeDocument/2006/relationships" xmlns:p="http://schemas.openxmlformats.org/presentationml/2006/main">
   <p:cSld>
     <p:spTree>
@@ -22077,7 +22483,15 @@
           <a:bodyPr/>
           <a:lstStyle/>
           <a:p>
-            <a:endParaRPr lang="el-GR"/>
+            <a:r>
+              <a:rPr lang="el-GR" dirty="0" err="1"/>
+              <a:t>Προεπεξεργασία</a:t>
+            </a:r>
+            <a:r>
+              <a:rPr lang="en-US" dirty="0"/>
+              <a:t>(2)</a:t>
+            </a:r>
+            <a:endParaRPr lang="el-GR" dirty="0"/>
           </a:p>
         </p:txBody>
       </p:sp>
@@ -22164,10 +22578,379 @@
           </a:p>
         </p:txBody>
       </p:sp>
+      <p:pic>
+        <p:nvPicPr>
+          <p:cNvPr id="6" name="Εικόνα 5">
+            <a:extLst>
+              <a:ext uri="{FF2B5EF4-FFF2-40B4-BE49-F238E27FC236}">
+                <a16:creationId xmlns:a16="http://schemas.microsoft.com/office/drawing/2014/main" id="{1246D02A-3514-45D5-96EE-882ED9D84B59}"/>
+              </a:ext>
+            </a:extLst>
+          </p:cNvPr>
+          <p:cNvPicPr>
+            <a:picLocks noChangeAspect="1"/>
+          </p:cNvPicPr>
+          <p:nvPr/>
+        </p:nvPicPr>
+        <p:blipFill>
+          <a:blip r:embed="rId2"/>
+          <a:stretch>
+            <a:fillRect/>
+          </a:stretch>
+        </p:blipFill>
+        <p:spPr>
+          <a:xfrm>
+            <a:off x="3067468" y="3765176"/>
+            <a:ext cx="7994240" cy="2242540"/>
+          </a:xfrm>
+          <a:prstGeom prst="rect">
+            <a:avLst/>
+          </a:prstGeom>
+        </p:spPr>
+      </p:pic>
     </p:spTree>
     <p:extLst>
       <p:ext uri="{BB962C8B-B14F-4D97-AF65-F5344CB8AC3E}">
         <p14:creationId xmlns:p14="http://schemas.microsoft.com/office/powerpoint/2010/main" val="3551492529"/>
+      </p:ext>
+    </p:extLst>
+  </p:cSld>
+  <p:clrMapOvr>
+    <a:masterClrMapping/>
+  </p:clrMapOvr>
+</p:sld>
+</file>
+
+<file path=ppt/slides/slide7.xml><?xml version="1.0" encoding="utf-8"?>
+<p:sld xmlns:a="http://schemas.openxmlformats.org/drawingml/2006/main" xmlns:r="http://schemas.openxmlformats.org/officeDocument/2006/relationships" xmlns:p="http://schemas.openxmlformats.org/presentationml/2006/main">
+  <p:cSld>
+    <p:spTree>
+      <p:nvGrpSpPr>
+        <p:cNvPr id="1" name=""/>
+        <p:cNvGrpSpPr/>
+        <p:nvPr/>
+      </p:nvGrpSpPr>
+      <p:grpSpPr>
+        <a:xfrm>
+          <a:off x="0" y="0"/>
+          <a:ext cx="0" cy="0"/>
+          <a:chOff x="0" y="0"/>
+          <a:chExt cx="0" cy="0"/>
+        </a:xfrm>
+      </p:grpSpPr>
+      <p:sp>
+        <p:nvSpPr>
+          <p:cNvPr id="2" name="Τίτλος 1">
+            <a:extLst>
+              <a:ext uri="{FF2B5EF4-FFF2-40B4-BE49-F238E27FC236}">
+                <a16:creationId xmlns:a16="http://schemas.microsoft.com/office/drawing/2014/main" id="{7718DFC3-34AC-4DEC-8EB8-A30B31F8166D}"/>
+              </a:ext>
+            </a:extLst>
+          </p:cNvPr>
+          <p:cNvSpPr>
+            <a:spLocks noGrp="1"/>
+          </p:cNvSpPr>
+          <p:nvPr>
+            <p:ph type="title"/>
+          </p:nvPr>
+        </p:nvSpPr>
+        <p:spPr/>
+        <p:txBody>
+          <a:bodyPr/>
+          <a:lstStyle/>
+          <a:p>
+            <a:r>
+              <a:rPr lang="en-US" dirty="0"/>
+              <a:t>LSTM MODEL</a:t>
+            </a:r>
+            <a:endParaRPr lang="el-GR" dirty="0"/>
+          </a:p>
+        </p:txBody>
+      </p:sp>
+      <p:pic>
+        <p:nvPicPr>
+          <p:cNvPr id="5" name="Θέση περιεχομένου 4">
+            <a:extLst>
+              <a:ext uri="{FF2B5EF4-FFF2-40B4-BE49-F238E27FC236}">
+                <a16:creationId xmlns:a16="http://schemas.microsoft.com/office/drawing/2014/main" id="{37CCD86A-B033-432B-A9D4-E8E55E8D4F48}"/>
+              </a:ext>
+            </a:extLst>
+          </p:cNvPr>
+          <p:cNvPicPr>
+            <a:picLocks noGrp="1" noChangeAspect="1"/>
+          </p:cNvPicPr>
+          <p:nvPr>
+            <p:ph idx="1"/>
+          </p:nvPr>
+        </p:nvPicPr>
+        <p:blipFill>
+          <a:blip r:embed="rId2"/>
+          <a:stretch>
+            <a:fillRect/>
+          </a:stretch>
+        </p:blipFill>
+        <p:spPr>
+          <a:xfrm>
+            <a:off x="368768" y="1751249"/>
+            <a:ext cx="5979888" cy="2917801"/>
+          </a:xfrm>
+        </p:spPr>
+      </p:pic>
+      <p:pic>
+        <p:nvPicPr>
+          <p:cNvPr id="7" name="Εικόνα 6">
+            <a:extLst>
+              <a:ext uri="{FF2B5EF4-FFF2-40B4-BE49-F238E27FC236}">
+                <a16:creationId xmlns:a16="http://schemas.microsoft.com/office/drawing/2014/main" id="{3AEA134B-1E93-426B-B309-73429B6BEDB0}"/>
+              </a:ext>
+            </a:extLst>
+          </p:cNvPr>
+          <p:cNvPicPr>
+            <a:picLocks noChangeAspect="1"/>
+          </p:cNvPicPr>
+          <p:nvPr/>
+        </p:nvPicPr>
+        <p:blipFill>
+          <a:blip r:embed="rId3"/>
+          <a:stretch>
+            <a:fillRect/>
+          </a:stretch>
+        </p:blipFill>
+        <p:spPr>
+          <a:xfrm>
+            <a:off x="6885227" y="421342"/>
+            <a:ext cx="4209533" cy="3564829"/>
+          </a:xfrm>
+          <a:prstGeom prst="rect">
+            <a:avLst/>
+          </a:prstGeom>
+        </p:spPr>
+      </p:pic>
+    </p:spTree>
+    <p:extLst>
+      <p:ext uri="{BB962C8B-B14F-4D97-AF65-F5344CB8AC3E}">
+        <p14:creationId xmlns:p14="http://schemas.microsoft.com/office/powerpoint/2010/main" val="2047836088"/>
+      </p:ext>
+    </p:extLst>
+  </p:cSld>
+  <p:clrMapOvr>
+    <a:masterClrMapping/>
+  </p:clrMapOvr>
+</p:sld>
+</file>
+
+<file path=ppt/slides/slide8.xml><?xml version="1.0" encoding="utf-8"?>
+<p:sld xmlns:a="http://schemas.openxmlformats.org/drawingml/2006/main" xmlns:r="http://schemas.openxmlformats.org/officeDocument/2006/relationships" xmlns:p="http://schemas.openxmlformats.org/presentationml/2006/main">
+  <p:cSld>
+    <p:spTree>
+      <p:nvGrpSpPr>
+        <p:cNvPr id="1" name=""/>
+        <p:cNvGrpSpPr/>
+        <p:nvPr/>
+      </p:nvGrpSpPr>
+      <p:grpSpPr>
+        <a:xfrm>
+          <a:off x="0" y="0"/>
+          <a:ext cx="0" cy="0"/>
+          <a:chOff x="0" y="0"/>
+          <a:chExt cx="0" cy="0"/>
+        </a:xfrm>
+      </p:grpSpPr>
+      <p:sp>
+        <p:nvSpPr>
+          <p:cNvPr id="2" name="Τίτλος 1">
+            <a:extLst>
+              <a:ext uri="{FF2B5EF4-FFF2-40B4-BE49-F238E27FC236}">
+                <a16:creationId xmlns:a16="http://schemas.microsoft.com/office/drawing/2014/main" id="{9ADAA3A8-AB1A-4C0E-83C1-18DF22D28B73}"/>
+              </a:ext>
+            </a:extLst>
+          </p:cNvPr>
+          <p:cNvSpPr>
+            <a:spLocks noGrp="1"/>
+          </p:cNvSpPr>
+          <p:nvPr>
+            <p:ph type="title"/>
+          </p:nvPr>
+        </p:nvSpPr>
+        <p:spPr/>
+        <p:txBody>
+          <a:bodyPr/>
+          <a:lstStyle/>
+          <a:p>
+            <a:r>
+              <a:rPr lang="en-US" dirty="0"/>
+              <a:t>GRU MODEL</a:t>
+            </a:r>
+            <a:endParaRPr lang="el-GR" dirty="0"/>
+          </a:p>
+        </p:txBody>
+      </p:sp>
+      <p:sp>
+        <p:nvSpPr>
+          <p:cNvPr id="3" name="Θέση περιεχομένου 2">
+            <a:extLst>
+              <a:ext uri="{FF2B5EF4-FFF2-40B4-BE49-F238E27FC236}">
+                <a16:creationId xmlns:a16="http://schemas.microsoft.com/office/drawing/2014/main" id="{423FF861-58D2-4EA5-8E10-B4D94ED0DC21}"/>
+              </a:ext>
+            </a:extLst>
+          </p:cNvPr>
+          <p:cNvSpPr>
+            <a:spLocks noGrp="1"/>
+          </p:cNvSpPr>
+          <p:nvPr>
+            <p:ph idx="1"/>
+          </p:nvPr>
+        </p:nvSpPr>
+        <p:spPr/>
+        <p:txBody>
+          <a:bodyPr/>
+          <a:lstStyle/>
+          <a:p>
+            <a:endParaRPr lang="el-GR"/>
+          </a:p>
+        </p:txBody>
+      </p:sp>
+    </p:spTree>
+    <p:extLst>
+      <p:ext uri="{BB962C8B-B14F-4D97-AF65-F5344CB8AC3E}">
+        <p14:creationId xmlns:p14="http://schemas.microsoft.com/office/powerpoint/2010/main" val="2703931260"/>
+      </p:ext>
+    </p:extLst>
+  </p:cSld>
+  <p:clrMapOvr>
+    <a:masterClrMapping/>
+  </p:clrMapOvr>
+</p:sld>
+</file>
+
+<file path=ppt/slides/slide9.xml><?xml version="1.0" encoding="utf-8"?>
+<p:sld xmlns:a="http://schemas.openxmlformats.org/drawingml/2006/main" xmlns:r="http://schemas.openxmlformats.org/officeDocument/2006/relationships" xmlns:p="http://schemas.openxmlformats.org/presentationml/2006/main">
+  <p:cSld>
+    <p:spTree>
+      <p:nvGrpSpPr>
+        <p:cNvPr id="1" name=""/>
+        <p:cNvGrpSpPr/>
+        <p:nvPr/>
+      </p:nvGrpSpPr>
+      <p:grpSpPr>
+        <a:xfrm>
+          <a:off x="0" y="0"/>
+          <a:ext cx="0" cy="0"/>
+          <a:chOff x="0" y="0"/>
+          <a:chExt cx="0" cy="0"/>
+        </a:xfrm>
+      </p:grpSpPr>
+      <p:sp>
+        <p:nvSpPr>
+          <p:cNvPr id="2" name="Τίτλος 1">
+            <a:extLst>
+              <a:ext uri="{FF2B5EF4-FFF2-40B4-BE49-F238E27FC236}">
+                <a16:creationId xmlns:a16="http://schemas.microsoft.com/office/drawing/2014/main" id="{35868DF7-0EC0-439B-AC94-9DFBDE2E2368}"/>
+              </a:ext>
+            </a:extLst>
+          </p:cNvPr>
+          <p:cNvSpPr>
+            <a:spLocks noGrp="1"/>
+          </p:cNvSpPr>
+          <p:nvPr>
+            <p:ph type="title"/>
+          </p:nvPr>
+        </p:nvSpPr>
+        <p:spPr>
+          <a:xfrm>
+            <a:off x="1024129" y="881050"/>
+            <a:ext cx="9720072" cy="873522"/>
+          </a:xfrm>
+        </p:spPr>
+        <p:txBody>
+          <a:bodyPr/>
+          <a:lstStyle/>
+          <a:p>
+            <a:r>
+              <a:rPr lang="el-GR" dirty="0"/>
+              <a:t>Η ΕΡΓΑΣΙΑ ΣΤΟ </a:t>
+            </a:r>
+            <a:r>
+              <a:rPr lang="en-US" dirty="0"/>
+              <a:t>GITHUB</a:t>
+            </a:r>
+            <a:endParaRPr lang="el-GR" dirty="0"/>
+          </a:p>
+        </p:txBody>
+      </p:sp>
+      <p:sp>
+        <p:nvSpPr>
+          <p:cNvPr id="3" name="Θέση περιεχομένου 2">
+            <a:extLst>
+              <a:ext uri="{FF2B5EF4-FFF2-40B4-BE49-F238E27FC236}">
+                <a16:creationId xmlns:a16="http://schemas.microsoft.com/office/drawing/2014/main" id="{781143FF-632A-44B1-A75D-754A0F96369E}"/>
+              </a:ext>
+            </a:extLst>
+          </p:cNvPr>
+          <p:cNvSpPr>
+            <a:spLocks noGrp="1"/>
+          </p:cNvSpPr>
+          <p:nvPr>
+            <p:ph idx="1"/>
+          </p:nvPr>
+        </p:nvSpPr>
+        <p:spPr>
+          <a:xfrm>
+            <a:off x="1024128" y="1882587"/>
+            <a:ext cx="9720073" cy="4652683"/>
+          </a:xfrm>
+        </p:spPr>
+        <p:txBody>
+          <a:bodyPr/>
+          <a:lstStyle/>
+          <a:p>
+            <a:r>
+              <a:rPr lang="en-US" dirty="0"/>
+              <a:t>https://github.com/grgmyl/alibabacluster.git</a:t>
+            </a:r>
+          </a:p>
+          <a:p>
+            <a:endParaRPr lang="en-US" dirty="0"/>
+          </a:p>
+          <a:p>
+            <a:endParaRPr lang="el-GR" dirty="0"/>
+          </a:p>
+        </p:txBody>
+      </p:sp>
+      <p:pic>
+        <p:nvPicPr>
+          <p:cNvPr id="5" name="Εικόνα 4">
+            <a:extLst>
+              <a:ext uri="{FF2B5EF4-FFF2-40B4-BE49-F238E27FC236}">
+                <a16:creationId xmlns:a16="http://schemas.microsoft.com/office/drawing/2014/main" id="{B383B069-ED51-46B9-9E49-2D99EC0CC26F}"/>
+              </a:ext>
+            </a:extLst>
+          </p:cNvPr>
+          <p:cNvPicPr>
+            <a:picLocks noChangeAspect="1"/>
+          </p:cNvPicPr>
+          <p:nvPr/>
+        </p:nvPicPr>
+        <p:blipFill>
+          <a:blip r:embed="rId2"/>
+          <a:stretch>
+            <a:fillRect/>
+          </a:stretch>
+        </p:blipFill>
+        <p:spPr>
+          <a:xfrm>
+            <a:off x="1193019" y="2446185"/>
+            <a:ext cx="4311309" cy="3826599"/>
+          </a:xfrm>
+          <a:prstGeom prst="rect">
+            <a:avLst/>
+          </a:prstGeom>
+        </p:spPr>
+      </p:pic>
+    </p:spTree>
+    <p:extLst>
+      <p:ext uri="{BB962C8B-B14F-4D97-AF65-F5344CB8AC3E}">
+        <p14:creationId xmlns:p14="http://schemas.microsoft.com/office/powerpoint/2010/main" val="1803626025"/>
       </p:ext>
     </p:extLst>
   </p:cSld>
@@ -23002,23 +23785,6 @@
 </file>
 
 <file path=customXml/item1.xml><?xml version="1.0" encoding="utf-8"?>
-<?mso-contentType ?>
-<FormTemplates xmlns="http://schemas.microsoft.com/sharepoint/v3/contenttype/forms">
-  <Display>DocumentLibraryForm</Display>
-  <Edit>DocumentLibraryForm</Edit>
-  <New>DocumentLibraryForm</New>
-</FormTemplates>
-</file>
-
-<file path=customXml/item2.xml><?xml version="1.0" encoding="utf-8"?>
-<p:properties xmlns:p="http://schemas.microsoft.com/office/2006/metadata/properties" xmlns:xsi="http://www.w3.org/2001/XMLSchema-instance" xmlns:pc="http://schemas.microsoft.com/office/infopath/2007/PartnerControls">
-  <documentManagement>
-    <MediaServiceKeyPoints xmlns="71af3243-3dd4-4a8d-8c0d-dd76da1f02a5" xsi:nil="true"/>
-  </documentManagement>
-</p:properties>
-</file>
-
-<file path=customXml/item3.xml><?xml version="1.0" encoding="utf-8"?>
 <ct:contentTypeSchema xmlns:ct="http://schemas.microsoft.com/office/2006/metadata/contentType" xmlns:ma="http://schemas.microsoft.com/office/2006/metadata/properties/metaAttributes" ct:_="" ma:_="" ma:contentTypeName="Document" ma:contentTypeID="0x01010079F111ED35F8CC479449609E8A0923A6" ma:contentTypeVersion="11" ma:contentTypeDescription="Create a new document." ma:contentTypeScope="" ma:versionID="9677210f24a1be23c92c90fd886aa0aa">
   <xsd:schema xmlns:xsd="http://www.w3.org/2001/XMLSchema" xmlns:xs="http://www.w3.org/2001/XMLSchema" xmlns:p="http://schemas.microsoft.com/office/2006/metadata/properties" xmlns:ns2="71af3243-3dd4-4a8d-8c0d-dd76da1f02a5" xmlns:ns3="16c05727-aa75-4e4a-9b5f-8a80a1165891" targetNamespace="http://schemas.microsoft.com/office/2006/metadata/properties" ma:root="true" ma:fieldsID="60e05723c5c1908df1a1a4ebf11d344e" ns2:_="" ns3:_="">
     <xsd:import namespace="71af3243-3dd4-4a8d-8c0d-dd76da1f02a5"/>
@@ -23229,10 +23995,38 @@
 </ct:contentTypeSchema>
 </file>
 
+<file path=customXml/item2.xml><?xml version="1.0" encoding="utf-8"?>
+<p:properties xmlns:p="http://schemas.microsoft.com/office/2006/metadata/properties" xmlns:xsi="http://www.w3.org/2001/XMLSchema-instance" xmlns:pc="http://schemas.microsoft.com/office/infopath/2007/PartnerControls">
+  <documentManagement>
+    <MediaServiceKeyPoints xmlns="71af3243-3dd4-4a8d-8c0d-dd76da1f02a5" xsi:nil="true"/>
+  </documentManagement>
+</p:properties>
+</file>
+
+<file path=customXml/item3.xml><?xml version="1.0" encoding="utf-8"?>
+<?mso-contentType ?>
+<FormTemplates xmlns="http://schemas.microsoft.com/sharepoint/v3/contenttype/forms">
+  <Display>DocumentLibraryForm</Display>
+  <Edit>DocumentLibraryForm</Edit>
+  <New>DocumentLibraryForm</New>
+</FormTemplates>
+</file>
+
 <file path=customXml/itemProps1.xml><?xml version="1.0" encoding="utf-8"?>
-<ds:datastoreItem xmlns:ds="http://schemas.openxmlformats.org/officeDocument/2006/customXml" ds:itemID="{4F44C90D-2A62-4985-9618-3460247437B1}">
+<ds:datastoreItem xmlns:ds="http://schemas.openxmlformats.org/officeDocument/2006/customXml" ds:itemID="{B61EAB5F-88FC-4FAE-AE3C-037A3C365EB8}">
   <ds:schemaRefs>
-    <ds:schemaRef ds:uri="http://schemas.microsoft.com/sharepoint/v3/contenttype/forms"/>
+    <ds:schemaRef ds:uri="http://schemas.microsoft.com/office/2006/metadata/contentType"/>
+    <ds:schemaRef ds:uri="http://schemas.microsoft.com/office/2006/metadata/properties/metaAttributes"/>
+    <ds:schemaRef ds:uri="http://www.w3.org/2001/XMLSchema"/>
+    <ds:schemaRef ds:uri="http://schemas.microsoft.com/office/2006/metadata/properties"/>
+    <ds:schemaRef ds:uri="71af3243-3dd4-4a8d-8c0d-dd76da1f02a5"/>
+    <ds:schemaRef ds:uri="16c05727-aa75-4e4a-9b5f-8a80a1165891"/>
+    <ds:schemaRef ds:uri="http://schemas.microsoft.com/office/2006/documentManagement/types"/>
+    <ds:schemaRef ds:uri="http://schemas.microsoft.com/office/infopath/2007/PartnerControls"/>
+    <ds:schemaRef ds:uri="http://schemas.openxmlformats.org/package/2006/metadata/core-properties"/>
+    <ds:schemaRef ds:uri="http://purl.org/dc/elements/1.1/"/>
+    <ds:schemaRef ds:uri="http://purl.org/dc/terms/"/>
+    <ds:schemaRef ds:uri="http://schemas.microsoft.com/internal/obd"/>
   </ds:schemaRefs>
 </ds:datastoreItem>
 </file>
@@ -23255,20 +24049,9 @@
 </file>
 
 <file path=customXml/itemProps3.xml><?xml version="1.0" encoding="utf-8"?>
-<ds:datastoreItem xmlns:ds="http://schemas.openxmlformats.org/officeDocument/2006/customXml" ds:itemID="{B61EAB5F-88FC-4FAE-AE3C-037A3C365EB8}">
+<ds:datastoreItem xmlns:ds="http://schemas.openxmlformats.org/officeDocument/2006/customXml" ds:itemID="{4F44C90D-2A62-4985-9618-3460247437B1}">
   <ds:schemaRefs>
-    <ds:schemaRef ds:uri="http://schemas.microsoft.com/office/2006/metadata/contentType"/>
-    <ds:schemaRef ds:uri="http://schemas.microsoft.com/office/2006/metadata/properties/metaAttributes"/>
-    <ds:schemaRef ds:uri="http://www.w3.org/2001/XMLSchema"/>
-    <ds:schemaRef ds:uri="http://schemas.microsoft.com/office/2006/metadata/properties"/>
-    <ds:schemaRef ds:uri="71af3243-3dd4-4a8d-8c0d-dd76da1f02a5"/>
-    <ds:schemaRef ds:uri="16c05727-aa75-4e4a-9b5f-8a80a1165891"/>
-    <ds:schemaRef ds:uri="http://schemas.microsoft.com/office/2006/documentManagement/types"/>
-    <ds:schemaRef ds:uri="http://schemas.microsoft.com/office/infopath/2007/PartnerControls"/>
-    <ds:schemaRef ds:uri="http://schemas.openxmlformats.org/package/2006/metadata/core-properties"/>
-    <ds:schemaRef ds:uri="http://purl.org/dc/elements/1.1/"/>
-    <ds:schemaRef ds:uri="http://purl.org/dc/terms/"/>
-    <ds:schemaRef ds:uri="http://schemas.microsoft.com/internal/obd"/>
+    <ds:schemaRef ds:uri="http://schemas.microsoft.com/sharepoint/v3/contenttype/forms"/>
   </ds:schemaRefs>
 </ds:datastoreItem>
 </file>
--- a/parousiasidiktia.pptx
+++ b/parousiasidiktia.pptx
@@ -5,22 +5,28 @@
     <p:sldMasterId id="2147483648" r:id="rId4"/>
   </p:sldMasterIdLst>
   <p:notesMasterIdLst>
-    <p:notesMasterId r:id="rId15"/>
+    <p:notesMasterId r:id="rId21"/>
   </p:notesMasterIdLst>
   <p:handoutMasterIdLst>
-    <p:handoutMasterId r:id="rId16"/>
+    <p:handoutMasterId r:id="rId22"/>
   </p:handoutMasterIdLst>
   <p:sldIdLst>
     <p:sldId id="256" r:id="rId5"/>
     <p:sldId id="277" r:id="rId6"/>
-    <p:sldId id="281" r:id="rId7"/>
-    <p:sldId id="278" r:id="rId8"/>
-    <p:sldId id="279" r:id="rId9"/>
-    <p:sldId id="280" r:id="rId10"/>
-    <p:sldId id="282" r:id="rId11"/>
-    <p:sldId id="283" r:id="rId12"/>
-    <p:sldId id="285" r:id="rId13"/>
-    <p:sldId id="284" r:id="rId14"/>
+    <p:sldId id="291" r:id="rId7"/>
+    <p:sldId id="281" r:id="rId8"/>
+    <p:sldId id="278" r:id="rId9"/>
+    <p:sldId id="279" r:id="rId10"/>
+    <p:sldId id="287" r:id="rId11"/>
+    <p:sldId id="280" r:id="rId12"/>
+    <p:sldId id="288" r:id="rId13"/>
+    <p:sldId id="289" r:id="rId14"/>
+    <p:sldId id="283" r:id="rId15"/>
+    <p:sldId id="286" r:id="rId16"/>
+    <p:sldId id="282" r:id="rId17"/>
+    <p:sldId id="285" r:id="rId18"/>
+    <p:sldId id="284" r:id="rId19"/>
+    <p:sldId id="290" r:id="rId20"/>
   </p:sldIdLst>
   <p:sldSz cx="12192000" cy="6858000"/>
   <p:notesSz cx="6858000" cy="9144000"/>
@@ -214,7 +220,7 @@
             <a:pPr rtl="0"/>
             <a:fld id="{F0EC7D35-77BB-4867-BAC6-5C40C37B98F1}" type="datetime1">
               <a:rPr lang="el-GR" smtClean="0"/>
-              <a:t>29/3/2026</a:t>
+              <a:t>31/3/2026</a:t>
             </a:fld>
             <a:endParaRPr lang="el-GR" dirty="0"/>
           </a:p>
@@ -384,7 +390,7 @@
             <a:pPr rtl="0"/>
             <a:fld id="{707ABAE7-72BE-4378-9C66-B300388DE536}" type="datetime1">
               <a:rPr lang="el-GR" noProof="0" smtClean="0"/>
-              <a:t>29/3/2026</a:t>
+              <a:t>31/3/2026</a:t>
             </a:fld>
             <a:endParaRPr lang="el-GR" noProof="0" dirty="0"/>
           </a:p>
@@ -883,6 +889,13 @@
             <a:schemeClr val="lt1"/>
           </a:fontRef>
         </p:style>
+        <p:txBody>
+          <a:bodyPr/>
+          <a:lstStyle/>
+          <a:p>
+            <a:endParaRPr lang="el-GR"/>
+          </a:p>
+        </p:txBody>
       </p:sp>
       <p:sp>
         <p:nvSpPr>
@@ -9484,6 +9497,13 @@
             <a:schemeClr val="lt1"/>
           </a:fontRef>
         </p:style>
+        <p:txBody>
+          <a:bodyPr/>
+          <a:lstStyle/>
+          <a:p>
+            <a:endParaRPr lang="el-GR"/>
+          </a:p>
+        </p:txBody>
       </p:sp>
       <p:sp>
         <p:nvSpPr>
@@ -9623,7 +9643,7 @@
             <a:pPr rtl="0"/>
             <a:fld id="{EABDBA74-E4DB-4313-95D3-B7F630EE7B7F}" type="datetime1">
               <a:rPr lang="el-GR" noProof="0" smtClean="0"/>
-              <a:t>29/3/2026</a:t>
+              <a:t>31/3/2026</a:t>
             </a:fld>
             <a:endParaRPr lang="el-GR" noProof="0" dirty="0"/>
           </a:p>
@@ -9829,7 +9849,7 @@
             <a:pPr rtl="0"/>
             <a:fld id="{D9C97E28-F60A-427B-851A-BCC048F06BC7}" type="datetime1">
               <a:rPr lang="el-GR" noProof="0" smtClean="0"/>
-              <a:t>29/3/2026</a:t>
+              <a:t>31/3/2026</a:t>
             </a:fld>
             <a:endParaRPr lang="el-GR" noProof="0" dirty="0"/>
           </a:p>
@@ -10008,7 +10028,7 @@
             <a:pPr rtl="0"/>
             <a:fld id="{4EA33EDB-81C3-4DAA-87EA-DA21D6A7FC6C}" type="datetime1">
               <a:rPr lang="el-GR" noProof="0" smtClean="0"/>
-              <a:t>29/3/2026</a:t>
+              <a:t>31/3/2026</a:t>
             </a:fld>
             <a:endParaRPr lang="el-GR" noProof="0" dirty="0"/>
           </a:p>
@@ -10212,7 +10232,7 @@
             <a:pPr rtl="0"/>
             <a:fld id="{0FE5ACA5-56F5-4208-8101-108DA68822C6}" type="datetime1">
               <a:rPr lang="el-GR" noProof="0" smtClean="0"/>
-              <a:t>29/3/2026</a:t>
+              <a:t>31/3/2026</a:t>
             </a:fld>
             <a:endParaRPr lang="el-GR" noProof="0" dirty="0"/>
           </a:p>
@@ -19109,7 +19129,7 @@
             <a:pPr rtl="0"/>
             <a:fld id="{98AAE694-814A-4F58-A8E2-AA9B6575E0B5}" type="datetime1">
               <a:rPr lang="el-GR" noProof="0" smtClean="0"/>
-              <a:t>29/3/2026</a:t>
+              <a:t>31/3/2026</a:t>
             </a:fld>
             <a:endParaRPr lang="el-GR" noProof="0" dirty="0"/>
           </a:p>
@@ -19382,7 +19402,7 @@
             <a:pPr rtl="0"/>
             <a:fld id="{98B30D4A-F623-45A5-BE49-543B4B609AF2}" type="datetime1">
               <a:rPr lang="el-GR" noProof="0" smtClean="0"/>
-              <a:t>29/3/2026</a:t>
+              <a:t>31/3/2026</a:t>
             </a:fld>
             <a:endParaRPr lang="el-GR" noProof="0" dirty="0"/>
           </a:p>
@@ -19779,7 +19799,7 @@
             <a:pPr rtl="0"/>
             <a:fld id="{06412F62-D18F-463A-9A7E-E4809AAD76E4}" type="datetime1">
               <a:rPr lang="el-GR" noProof="0" smtClean="0"/>
-              <a:t>29/3/2026</a:t>
+              <a:t>31/3/2026</a:t>
             </a:fld>
             <a:endParaRPr lang="el-GR" noProof="0" dirty="0"/>
           </a:p>
@@ -19896,7 +19916,7 @@
             <a:pPr rtl="0"/>
             <a:fld id="{D2009D47-CF8A-48CB-81B8-5988DBFADA28}" type="datetime1">
               <a:rPr lang="el-GR" noProof="0" smtClean="0"/>
-              <a:t>29/3/2026</a:t>
+              <a:t>31/3/2026</a:t>
             </a:fld>
             <a:endParaRPr lang="el-GR" noProof="0" dirty="0"/>
           </a:p>
@@ -19989,7 +20009,7 @@
             <a:pPr rtl="0"/>
             <a:fld id="{89B075A6-4B0E-489A-92E5-C2C81D969D11}" type="datetime1">
               <a:rPr lang="el-GR" noProof="0" smtClean="0"/>
-              <a:t>29/3/2026</a:t>
+              <a:t>31/3/2026</a:t>
             </a:fld>
             <a:endParaRPr lang="el-GR" noProof="0" dirty="0"/>
           </a:p>
@@ -20278,7 +20298,7 @@
             <a:pPr rtl="0"/>
             <a:fld id="{7C290451-C354-46E0-BBD8-0317D7A1384C}" type="datetime1">
               <a:rPr lang="el-GR" noProof="0" smtClean="0"/>
-              <a:t>29/3/2026</a:t>
+              <a:t>31/3/2026</a:t>
             </a:fld>
             <a:endParaRPr lang="el-GR" noProof="0" dirty="0"/>
           </a:p>
@@ -20558,7 +20578,7 @@
             <a:pPr rtl="0"/>
             <a:fld id="{05DAA40D-D363-46A0-9276-B6A4797DC9A5}" type="datetime1">
               <a:rPr lang="el-GR" noProof="0" smtClean="0"/>
-              <a:t>29/3/2026</a:t>
+              <a:t>31/3/2026</a:t>
             </a:fld>
             <a:endParaRPr lang="el-GR" noProof="0" dirty="0"/>
           </a:p>
@@ -20804,7 +20824,7 @@
           <a:p>
             <a:fld id="{F98FDC76-A1F5-4EE8-BDE3-5EFC56AAE7AD}" type="datetime1">
               <a:rPr lang="el-GR" noProof="0" smtClean="0"/>
-              <a:t>29/3/2026</a:t>
+              <a:t>31/3/2026</a:t>
             </a:fld>
             <a:endParaRPr lang="el-GR" noProof="0" dirty="0"/>
           </a:p>
@@ -21664,6 +21684,1614 @@
           <p:cNvPr id="2" name="Τίτλος 1">
             <a:extLst>
               <a:ext uri="{FF2B5EF4-FFF2-40B4-BE49-F238E27FC236}">
+                <a16:creationId xmlns:a16="http://schemas.microsoft.com/office/drawing/2014/main" id="{2D5EEF79-CE81-4705-A513-7CB9BABACE4E}"/>
+              </a:ext>
+            </a:extLst>
+          </p:cNvPr>
+          <p:cNvSpPr>
+            <a:spLocks noGrp="1"/>
+          </p:cNvSpPr>
+          <p:nvPr>
+            <p:ph type="title"/>
+          </p:nvPr>
+        </p:nvSpPr>
+        <p:spPr/>
+        <p:txBody>
+          <a:bodyPr/>
+          <a:lstStyle/>
+          <a:p>
+            <a:r>
+              <a:rPr lang="el-GR" dirty="0"/>
+              <a:t>Η </a:t>
+            </a:r>
+            <a:r>
+              <a:rPr lang="el-GR" dirty="0" err="1"/>
+              <a:t>αναλυση</a:t>
+            </a:r>
+            <a:r>
+              <a:rPr lang="el-GR" dirty="0"/>
+              <a:t> των </a:t>
+            </a:r>
+            <a:r>
+              <a:rPr lang="el-GR" dirty="0" err="1"/>
+              <a:t>δεδομενων</a:t>
+            </a:r>
+            <a:r>
+              <a:rPr lang="el-GR" dirty="0"/>
+              <a:t>(3)</a:t>
+            </a:r>
+          </a:p>
+        </p:txBody>
+      </p:sp>
+      <p:pic>
+        <p:nvPicPr>
+          <p:cNvPr id="4" name="Θέση περιεχομένου 3">
+            <a:extLst>
+              <a:ext uri="{FF2B5EF4-FFF2-40B4-BE49-F238E27FC236}">
+                <a16:creationId xmlns:a16="http://schemas.microsoft.com/office/drawing/2014/main" id="{1896197E-5A56-4E4C-A8D5-28CE01741143}"/>
+              </a:ext>
+            </a:extLst>
+          </p:cNvPr>
+          <p:cNvPicPr>
+            <a:picLocks noGrp="1" noChangeAspect="1"/>
+          </p:cNvPicPr>
+          <p:nvPr>
+            <p:ph idx="1"/>
+          </p:nvPr>
+        </p:nvPicPr>
+        <p:blipFill>
+          <a:blip r:embed="rId2"/>
+          <a:stretch>
+            <a:fillRect/>
+          </a:stretch>
+        </p:blipFill>
+        <p:spPr>
+          <a:xfrm>
+            <a:off x="1978389" y="1870398"/>
+            <a:ext cx="7591756" cy="2141448"/>
+          </a:xfrm>
+          <a:prstGeom prst="rect">
+            <a:avLst/>
+          </a:prstGeom>
+        </p:spPr>
+      </p:pic>
+      <p:sp>
+        <p:nvSpPr>
+          <p:cNvPr id="6" name="Ορθογώνιο 5">
+            <a:extLst>
+              <a:ext uri="{FF2B5EF4-FFF2-40B4-BE49-F238E27FC236}">
+                <a16:creationId xmlns:a16="http://schemas.microsoft.com/office/drawing/2014/main" id="{56D6ED03-4C0B-4CDF-94D3-104FD1005CDD}"/>
+              </a:ext>
+            </a:extLst>
+          </p:cNvPr>
+          <p:cNvSpPr/>
+          <p:nvPr/>
+        </p:nvSpPr>
+        <p:spPr>
+          <a:xfrm>
+            <a:off x="440267" y="4253637"/>
+            <a:ext cx="6096000" cy="1754326"/>
+          </a:xfrm>
+          <a:prstGeom prst="rect">
+            <a:avLst/>
+          </a:prstGeom>
+        </p:spPr>
+        <p:txBody>
+          <a:bodyPr>
+            <a:spAutoFit/>
+          </a:bodyPr>
+          <a:lstStyle/>
+          <a:p>
+            <a:pPr marL="285750" indent="-285750" algn="just">
+              <a:buClr>
+                <a:schemeClr val="accent2">
+                  <a:lumMod val="75000"/>
+                </a:schemeClr>
+              </a:buClr>
+              <a:buFont typeface="Wingdings" panose="05000000000000000000" pitchFamily="2" charset="2"/>
+              <a:buChar char="§"/>
+            </a:pPr>
+            <a:r>
+              <a:rPr lang="el-GR" dirty="0"/>
+              <a:t>Η ACF της CPU δείχνει πολύ ισχυρή θετική </a:t>
+            </a:r>
+            <a:r>
+              <a:rPr lang="el-GR" dirty="0" err="1"/>
+              <a:t>αυτοσυσχέτιση</a:t>
+            </a:r>
+            <a:r>
+              <a:rPr lang="el-GR" dirty="0"/>
+              <a:t> για μεγάλο αριθμό </a:t>
+            </a:r>
+            <a:r>
+              <a:rPr lang="el-GR" dirty="0" err="1"/>
+              <a:t>lags</a:t>
+            </a:r>
+            <a:r>
+              <a:rPr lang="el-GR" dirty="0"/>
+              <a:t>. Οι τιμές παραμένουν υψηλές και μειώνονται αργά όσο αυξάνει το </a:t>
+            </a:r>
+            <a:r>
+              <a:rPr lang="el-GR" dirty="0" err="1"/>
+              <a:t>lag</a:t>
+            </a:r>
+            <a:r>
+              <a:rPr lang="el-GR" dirty="0"/>
+              <a:t>. Αυτό σημαίνει ότι η τρέχουσα τιμή της CPU εξαρτάται έντονα από τις προηγούμενες τιμές της, άρα η σειρά έχει ισχυρή χρονική μνήμη.</a:t>
+            </a:r>
+          </a:p>
+        </p:txBody>
+      </p:sp>
+      <p:sp>
+        <p:nvSpPr>
+          <p:cNvPr id="7" name="Ορθογώνιο 6">
+            <a:extLst>
+              <a:ext uri="{FF2B5EF4-FFF2-40B4-BE49-F238E27FC236}">
+                <a16:creationId xmlns:a16="http://schemas.microsoft.com/office/drawing/2014/main" id="{234601AE-B16F-4819-929E-20374D193181}"/>
+              </a:ext>
+            </a:extLst>
+          </p:cNvPr>
+          <p:cNvSpPr/>
+          <p:nvPr/>
+        </p:nvSpPr>
+        <p:spPr>
+          <a:xfrm>
+            <a:off x="6695519" y="4253636"/>
+            <a:ext cx="4251402" cy="1200329"/>
+          </a:xfrm>
+          <a:prstGeom prst="rect">
+            <a:avLst/>
+          </a:prstGeom>
+        </p:spPr>
+        <p:txBody>
+          <a:bodyPr wrap="square">
+            <a:spAutoFit/>
+          </a:bodyPr>
+          <a:lstStyle/>
+          <a:p>
+            <a:pPr marL="285750" indent="-285750" algn="just">
+              <a:buClr>
+                <a:schemeClr val="accent2">
+                  <a:lumMod val="75000"/>
+                </a:schemeClr>
+              </a:buClr>
+              <a:buFont typeface="Wingdings" panose="05000000000000000000" pitchFamily="2" charset="2"/>
+              <a:buChar char="§"/>
+            </a:pPr>
+            <a:r>
+              <a:rPr lang="el-GR" dirty="0"/>
+              <a:t>Η μνήμη εμφανίζει πολύ ασθενέστερη </a:t>
+            </a:r>
+            <a:r>
+              <a:rPr lang="el-GR" dirty="0" err="1"/>
+              <a:t>αυτοσυσχέτιση</a:t>
+            </a:r>
+            <a:r>
+              <a:rPr lang="el-GR" dirty="0"/>
+              <a:t>, γεγονός που υποδηλώνει μικρότερη </a:t>
+            </a:r>
+            <a:r>
+              <a:rPr lang="el-GR" dirty="0" err="1"/>
+              <a:t>προβλεψιμότητα</a:t>
+            </a:r>
+            <a:r>
+              <a:rPr lang="el-GR" dirty="0"/>
+              <a:t>.</a:t>
+            </a:r>
+          </a:p>
+        </p:txBody>
+      </p:sp>
+    </p:spTree>
+    <p:extLst>
+      <p:ext uri="{BB962C8B-B14F-4D97-AF65-F5344CB8AC3E}">
+        <p14:creationId xmlns:p14="http://schemas.microsoft.com/office/powerpoint/2010/main" val="510189808"/>
+      </p:ext>
+    </p:extLst>
+  </p:cSld>
+  <p:clrMapOvr>
+    <a:masterClrMapping/>
+  </p:clrMapOvr>
+</p:sld>
+</file>
+
+<file path=ppt/slides/slide11.xml><?xml version="1.0" encoding="utf-8"?>
+<p:sld xmlns:a="http://schemas.openxmlformats.org/drawingml/2006/main" xmlns:r="http://schemas.openxmlformats.org/officeDocument/2006/relationships" xmlns:p="http://schemas.openxmlformats.org/presentationml/2006/main">
+  <p:cSld>
+    <p:spTree>
+      <p:nvGrpSpPr>
+        <p:cNvPr id="1" name=""/>
+        <p:cNvGrpSpPr/>
+        <p:nvPr/>
+      </p:nvGrpSpPr>
+      <p:grpSpPr>
+        <a:xfrm>
+          <a:off x="0" y="0"/>
+          <a:ext cx="0" cy="0"/>
+          <a:chOff x="0" y="0"/>
+          <a:chExt cx="0" cy="0"/>
+        </a:xfrm>
+      </p:grpSpPr>
+      <p:sp>
+        <p:nvSpPr>
+          <p:cNvPr id="2" name="Τίτλος 1">
+            <a:extLst>
+              <a:ext uri="{FF2B5EF4-FFF2-40B4-BE49-F238E27FC236}">
+                <a16:creationId xmlns:a16="http://schemas.microsoft.com/office/drawing/2014/main" id="{9ADAA3A8-AB1A-4C0E-83C1-18DF22D28B73}"/>
+              </a:ext>
+            </a:extLst>
+          </p:cNvPr>
+          <p:cNvSpPr>
+            <a:spLocks noGrp="1"/>
+          </p:cNvSpPr>
+          <p:nvPr>
+            <p:ph type="title"/>
+          </p:nvPr>
+        </p:nvSpPr>
+        <p:spPr/>
+        <p:txBody>
+          <a:bodyPr/>
+          <a:lstStyle/>
+          <a:p>
+            <a:r>
+              <a:rPr lang="en-US" dirty="0"/>
+              <a:t>GRU MODEL</a:t>
+            </a:r>
+            <a:endParaRPr lang="el-GR" dirty="0"/>
+          </a:p>
+        </p:txBody>
+      </p:sp>
+      <p:sp>
+        <p:nvSpPr>
+          <p:cNvPr id="3" name="Θέση περιεχομένου 2">
+            <a:extLst>
+              <a:ext uri="{FF2B5EF4-FFF2-40B4-BE49-F238E27FC236}">
+                <a16:creationId xmlns:a16="http://schemas.microsoft.com/office/drawing/2014/main" id="{423FF861-58D2-4EA5-8E10-B4D94ED0DC21}"/>
+              </a:ext>
+            </a:extLst>
+          </p:cNvPr>
+          <p:cNvSpPr>
+            <a:spLocks noGrp="1"/>
+          </p:cNvSpPr>
+          <p:nvPr>
+            <p:ph idx="1"/>
+          </p:nvPr>
+        </p:nvSpPr>
+        <p:spPr>
+          <a:xfrm>
+            <a:off x="744728" y="2023533"/>
+            <a:ext cx="9720073" cy="4023360"/>
+          </a:xfrm>
+        </p:spPr>
+        <p:txBody>
+          <a:bodyPr>
+            <a:normAutofit/>
+          </a:bodyPr>
+          <a:lstStyle/>
+          <a:p>
+            <a:pPr marL="0" indent="0">
+              <a:buNone/>
+            </a:pPr>
+            <a:r>
+              <a:rPr lang="en-US" sz="2400" b="1" i="1" dirty="0"/>
+              <a:t>Data Preparation:</a:t>
+            </a:r>
+          </a:p>
+          <a:p>
+            <a:pPr marL="0" indent="0">
+              <a:buNone/>
+            </a:pPr>
+            <a:r>
+              <a:rPr lang="el-GR" dirty="0"/>
+              <a:t>Βάζουμε σε πίνακα μόνο </a:t>
+            </a:r>
+            <a:r>
+              <a:rPr lang="en-US" b="1" dirty="0"/>
+              <a:t>CPU &amp; Memory usage</a:t>
+            </a:r>
+          </a:p>
+          <a:p>
+            <a:pPr marL="0" indent="0">
+              <a:buNone/>
+            </a:pPr>
+            <a:r>
+              <a:rPr lang="el-GR" dirty="0"/>
+              <a:t>Μετατροπή </a:t>
+            </a:r>
+            <a:r>
+              <a:rPr lang="el-GR" dirty="0" err="1"/>
+              <a:t>χρονοσειράς</a:t>
+            </a:r>
+            <a:r>
+              <a:rPr lang="el-GR" dirty="0"/>
+              <a:t> σε </a:t>
+            </a:r>
+            <a:r>
+              <a:rPr lang="en-US" b="1" dirty="0"/>
+              <a:t>sequences</a:t>
+            </a:r>
+            <a:r>
+              <a:rPr lang="en-US" dirty="0"/>
+              <a:t> (sliding window)</a:t>
+            </a:r>
+          </a:p>
+          <a:p>
+            <a:pPr marL="0" indent="0">
+              <a:buNone/>
+            </a:pPr>
+            <a:r>
+              <a:rPr lang="el-GR" dirty="0"/>
+              <a:t>Μήκος εισόδου: 20 χρονικά βήματα</a:t>
+            </a:r>
+            <a:endParaRPr lang="en-US" dirty="0"/>
+          </a:p>
+          <a:p>
+            <a:pPr marL="0" indent="0">
+              <a:buNone/>
+            </a:pPr>
+            <a:r>
+              <a:rPr lang="el-GR" dirty="0"/>
+              <a:t>Δημιουργία </a:t>
+            </a:r>
+            <a:r>
+              <a:rPr lang="el-GR" b="1" dirty="0"/>
+              <a:t>στόχων πρόβλεψης </a:t>
+            </a:r>
+            <a:r>
+              <a:rPr lang="el-GR" dirty="0"/>
+              <a:t>(</a:t>
+            </a:r>
+            <a:r>
+              <a:rPr lang="en-US" dirty="0"/>
+              <a:t>future horizons):</a:t>
+            </a:r>
+          </a:p>
+          <a:p>
+            <a:pPr marL="0" indent="0">
+              <a:buNone/>
+            </a:pPr>
+            <a:r>
+              <a:rPr lang="en-US" dirty="0"/>
+              <a:t>    Short-term: 5 timesteps </a:t>
+            </a:r>
+          </a:p>
+          <a:p>
+            <a:pPr marL="0" indent="0">
+              <a:buNone/>
+            </a:pPr>
+            <a:r>
+              <a:rPr lang="en-US" dirty="0"/>
+              <a:t>    Long-term: 15 timesteps</a:t>
+            </a:r>
+          </a:p>
+          <a:p>
+            <a:pPr marL="0" indent="0">
+              <a:buNone/>
+            </a:pPr>
+            <a:r>
+              <a:rPr lang="el-GR" dirty="0"/>
+              <a:t>Διαχωρισμός δεδομένων σε </a:t>
+            </a:r>
+            <a:r>
+              <a:rPr lang="en-US" b="1" dirty="0"/>
+              <a:t>train</a:t>
+            </a:r>
+            <a:r>
+              <a:rPr lang="en-US" dirty="0"/>
+              <a:t> (80%) </a:t>
+            </a:r>
+            <a:r>
+              <a:rPr lang="el-GR" dirty="0"/>
+              <a:t>και </a:t>
+            </a:r>
+            <a:r>
+              <a:rPr lang="en-US" b="1" dirty="0"/>
+              <a:t>test</a:t>
+            </a:r>
+            <a:r>
+              <a:rPr lang="en-US" dirty="0"/>
+              <a:t> (20%)</a:t>
+            </a:r>
+            <a:endParaRPr lang="el-GR" dirty="0"/>
+          </a:p>
+        </p:txBody>
+      </p:sp>
+    </p:spTree>
+    <p:extLst>
+      <p:ext uri="{BB962C8B-B14F-4D97-AF65-F5344CB8AC3E}">
+        <p14:creationId xmlns:p14="http://schemas.microsoft.com/office/powerpoint/2010/main" val="2703931260"/>
+      </p:ext>
+    </p:extLst>
+  </p:cSld>
+  <p:clrMapOvr>
+    <a:masterClrMapping/>
+  </p:clrMapOvr>
+</p:sld>
+</file>
+
+<file path=ppt/slides/slide12.xml><?xml version="1.0" encoding="utf-8"?>
+<p:sld xmlns:a="http://schemas.openxmlformats.org/drawingml/2006/main" xmlns:r="http://schemas.openxmlformats.org/officeDocument/2006/relationships" xmlns:p="http://schemas.openxmlformats.org/presentationml/2006/main">
+  <p:cSld>
+    <p:spTree>
+      <p:nvGrpSpPr>
+        <p:cNvPr id="1" name="">
+          <a:extLst>
+            <a:ext uri="{FF2B5EF4-FFF2-40B4-BE49-F238E27FC236}">
+              <a16:creationId xmlns:a16="http://schemas.microsoft.com/office/drawing/2014/main" id="{10B6ED07-6015-7A53-9D90-68132B338961}"/>
+            </a:ext>
+          </a:extLst>
+        </p:cNvPr>
+        <p:cNvGrpSpPr/>
+        <p:nvPr/>
+      </p:nvGrpSpPr>
+      <p:grpSpPr>
+        <a:xfrm>
+          <a:off x="0" y="0"/>
+          <a:ext cx="0" cy="0"/>
+          <a:chOff x="0" y="0"/>
+          <a:chExt cx="0" cy="0"/>
+        </a:xfrm>
+      </p:grpSpPr>
+      <p:sp>
+        <p:nvSpPr>
+          <p:cNvPr id="2" name="Τίτλος 1">
+            <a:extLst>
+              <a:ext uri="{FF2B5EF4-FFF2-40B4-BE49-F238E27FC236}">
+                <a16:creationId xmlns:a16="http://schemas.microsoft.com/office/drawing/2014/main" id="{4E89994D-2E3C-F1EF-DDE7-9B0098B8FCD6}"/>
+              </a:ext>
+            </a:extLst>
+          </p:cNvPr>
+          <p:cNvSpPr>
+            <a:spLocks noGrp="1"/>
+          </p:cNvSpPr>
+          <p:nvPr>
+            <p:ph type="title"/>
+          </p:nvPr>
+        </p:nvSpPr>
+        <p:spPr/>
+        <p:txBody>
+          <a:bodyPr/>
+          <a:lstStyle/>
+          <a:p>
+            <a:r>
+              <a:rPr lang="en-US" dirty="0"/>
+              <a:t>GRU MODEL</a:t>
+            </a:r>
+            <a:endParaRPr lang="el-GR" dirty="0"/>
+          </a:p>
+        </p:txBody>
+      </p:sp>
+      <p:sp>
+        <p:nvSpPr>
+          <p:cNvPr id="4" name="Rectangle 1">
+            <a:extLst>
+              <a:ext uri="{FF2B5EF4-FFF2-40B4-BE49-F238E27FC236}">
+                <a16:creationId xmlns:a16="http://schemas.microsoft.com/office/drawing/2014/main" id="{8E70724D-984D-EF81-CD83-AF6D91AD9A92}"/>
+              </a:ext>
+            </a:extLst>
+          </p:cNvPr>
+          <p:cNvSpPr>
+            <a:spLocks noGrp="1" noChangeArrowheads="1"/>
+          </p:cNvSpPr>
+          <p:nvPr>
+            <p:ph idx="1"/>
+          </p:nvPr>
+        </p:nvSpPr>
+        <p:spPr bwMode="auto">
+          <a:xfrm>
+            <a:off x="727881" y="2021659"/>
+            <a:ext cx="5173133" cy="4524315"/>
+          </a:xfrm>
+          <a:prstGeom prst="rect">
+            <a:avLst/>
+          </a:prstGeom>
+          <a:noFill/>
+          <a:ln>
+            <a:noFill/>
+          </a:ln>
+          <a:effectLst/>
+          <a:extLst>
+            <a:ext uri="{909E8E84-426E-40DD-AFC4-6F175D3DCCD1}">
+              <a14:hiddenFill xmlns:a14="http://schemas.microsoft.com/office/drawing/2010/main">
+                <a:solidFill>
+                  <a:schemeClr val="accent1"/>
+                </a:solidFill>
+              </a14:hiddenFill>
+            </a:ext>
+            <a:ext uri="{91240B29-F687-4F45-9708-019B960494DF}">
+              <a14:hiddenLine xmlns:a14="http://schemas.microsoft.com/office/drawing/2010/main" w="9525">
+                <a:solidFill>
+                  <a:schemeClr val="tx1"/>
+                </a:solidFill>
+                <a:miter lim="800000"/>
+                <a:headEnd/>
+                <a:tailEnd/>
+              </a14:hiddenLine>
+            </a:ext>
+            <a:ext uri="{AF507438-7753-43E0-B8FC-AC1667EBCBE1}">
+              <a14:hiddenEffects xmlns:a14="http://schemas.microsoft.com/office/drawing/2010/main">
+                <a:effectLst>
+                  <a:outerShdw dist="35921" dir="2700000" algn="ctr" rotWithShape="0">
+                    <a:schemeClr val="bg2"/>
+                  </a:outerShdw>
+                </a:effectLst>
+              </a14:hiddenEffects>
+            </a:ext>
+          </a:extLst>
+        </p:spPr>
+        <p:txBody>
+          <a:bodyPr vert="horz" wrap="square" lIns="91440" tIns="45720" rIns="91440" bIns="45720" numCol="1" anchor="ctr" anchorCtr="0" compatLnSpc="1">
+            <a:prstTxWarp prst="textNoShape">
+              <a:avLst/>
+            </a:prstTxWarp>
+            <a:spAutoFit/>
+          </a:bodyPr>
+          <a:lstStyle/>
+          <a:p>
+            <a:pPr marL="0" marR="0" lvl="0" indent="0" algn="l" defTabSz="914400" rtl="0" eaLnBrk="0" fontAlgn="base" latinLnBrk="0" hangingPunct="0">
+              <a:lnSpc>
+                <a:spcPct val="100000"/>
+              </a:lnSpc>
+              <a:spcBef>
+                <a:spcPct val="0"/>
+              </a:spcBef>
+              <a:spcAft>
+                <a:spcPct val="0"/>
+              </a:spcAft>
+              <a:buClrTx/>
+              <a:buSzTx/>
+              <a:buFontTx/>
+              <a:buNone/>
+              <a:tabLst/>
+            </a:pPr>
+            <a:r>
+              <a:rPr kumimoji="0" lang="en-US" altLang="el-GR" sz="2400" b="1" i="1" u="none" strike="noStrike" cap="none" normalizeH="0" baseline="0" dirty="0">
+                <a:ln>
+                  <a:noFill/>
+                </a:ln>
+                <a:solidFill>
+                  <a:schemeClr val="tx1"/>
+                </a:solidFill>
+                <a:effectLst/>
+                <a:ea typeface="Calibri" panose="020F0502020204030204" pitchFamily="34" charset="0"/>
+                <a:cs typeface="Calibri" panose="020F0502020204030204" pitchFamily="34" charset="0"/>
+              </a:rPr>
+              <a:t>Training and Evaluation:</a:t>
+            </a:r>
+          </a:p>
+          <a:p>
+            <a:pPr marL="0" marR="0" lvl="0" indent="0" algn="l" defTabSz="914400" rtl="0" eaLnBrk="0" fontAlgn="base" latinLnBrk="0" hangingPunct="0">
+              <a:lnSpc>
+                <a:spcPct val="100000"/>
+              </a:lnSpc>
+              <a:spcBef>
+                <a:spcPct val="0"/>
+              </a:spcBef>
+              <a:spcAft>
+                <a:spcPct val="0"/>
+              </a:spcAft>
+              <a:buClrTx/>
+              <a:buSzTx/>
+              <a:buFontTx/>
+              <a:buNone/>
+              <a:tabLst/>
+            </a:pPr>
+            <a:endParaRPr kumimoji="0" lang="el-GR" altLang="el-GR" b="1" i="1" u="none" strike="noStrike" cap="none" normalizeH="0" baseline="0" dirty="0">
+              <a:ln>
+                <a:noFill/>
+              </a:ln>
+              <a:solidFill>
+                <a:schemeClr val="tx1"/>
+              </a:solidFill>
+              <a:effectLst/>
+              <a:ea typeface="Calibri" panose="020F0502020204030204" pitchFamily="34" charset="0"/>
+              <a:cs typeface="Calibri" panose="020F0502020204030204" pitchFamily="34" charset="0"/>
+            </a:endParaRPr>
+          </a:p>
+          <a:p>
+            <a:pPr marL="0" marR="0" lvl="0" indent="0" algn="l" defTabSz="914400" rtl="0" eaLnBrk="0" fontAlgn="base" latinLnBrk="0" hangingPunct="0">
+              <a:lnSpc>
+                <a:spcPct val="100000"/>
+              </a:lnSpc>
+              <a:spcBef>
+                <a:spcPct val="0"/>
+              </a:spcBef>
+              <a:spcAft>
+                <a:spcPct val="0"/>
+              </a:spcAft>
+              <a:buClrTx/>
+              <a:buSzTx/>
+              <a:buNone/>
+              <a:tabLst/>
+            </a:pPr>
+            <a:r>
+              <a:rPr kumimoji="0" lang="el-GR" altLang="el-GR" b="0" i="0" u="none" strike="noStrike" cap="none" normalizeH="0" baseline="0" dirty="0">
+                <a:ln>
+                  <a:noFill/>
+                </a:ln>
+                <a:solidFill>
+                  <a:schemeClr val="tx1"/>
+                </a:solidFill>
+                <a:effectLst/>
+                <a:ea typeface="Calibri" panose="020F0502020204030204" pitchFamily="34" charset="0"/>
+                <a:cs typeface="Calibri" panose="020F0502020204030204" pitchFamily="34" charset="0"/>
+              </a:rPr>
+              <a:t>Εκπαίδευση μοντέλου:</a:t>
+            </a:r>
+            <a:endParaRPr kumimoji="0" lang="en-US" altLang="el-GR" b="0" i="0" u="none" strike="noStrike" cap="none" normalizeH="0" baseline="0" dirty="0">
+              <a:ln>
+                <a:noFill/>
+              </a:ln>
+              <a:solidFill>
+                <a:schemeClr val="tx1"/>
+              </a:solidFill>
+              <a:effectLst/>
+              <a:ea typeface="Calibri" panose="020F0502020204030204" pitchFamily="34" charset="0"/>
+              <a:cs typeface="Calibri" panose="020F0502020204030204" pitchFamily="34" charset="0"/>
+            </a:endParaRPr>
+          </a:p>
+          <a:p>
+            <a:pPr marL="0" marR="0" lvl="0" indent="0" algn="l" defTabSz="914400" rtl="0" eaLnBrk="0" fontAlgn="base" latinLnBrk="0" hangingPunct="0">
+              <a:lnSpc>
+                <a:spcPct val="100000"/>
+              </a:lnSpc>
+              <a:spcBef>
+                <a:spcPct val="0"/>
+              </a:spcBef>
+              <a:spcAft>
+                <a:spcPct val="0"/>
+              </a:spcAft>
+              <a:buClrTx/>
+              <a:buSzTx/>
+              <a:buNone/>
+              <a:tabLst/>
+            </a:pPr>
+            <a:r>
+              <a:rPr kumimoji="0" lang="en-US" altLang="el-GR" b="0" i="0" u="none" strike="noStrike" cap="none" normalizeH="0" baseline="0" dirty="0">
+                <a:ln>
+                  <a:noFill/>
+                </a:ln>
+                <a:solidFill>
+                  <a:schemeClr val="tx1"/>
+                </a:solidFill>
+                <a:effectLst/>
+                <a:ea typeface="Calibri" panose="020F0502020204030204" pitchFamily="34" charset="0"/>
+                <a:cs typeface="Calibri" panose="020F0502020204030204" pitchFamily="34" charset="0"/>
+              </a:rPr>
+              <a:t>   Lookback: 24</a:t>
+            </a:r>
+            <a:endParaRPr kumimoji="0" lang="el-GR" altLang="el-GR" b="0" i="0" u="none" strike="noStrike" cap="none" normalizeH="0" baseline="0" dirty="0">
+              <a:ln>
+                <a:noFill/>
+              </a:ln>
+              <a:solidFill>
+                <a:schemeClr val="tx1"/>
+              </a:solidFill>
+              <a:effectLst/>
+              <a:ea typeface="Calibri" panose="020F0502020204030204" pitchFamily="34" charset="0"/>
+              <a:cs typeface="Calibri" panose="020F0502020204030204" pitchFamily="34" charset="0"/>
+            </a:endParaRPr>
+          </a:p>
+          <a:p>
+            <a:pPr marL="0" marR="0" lvl="0" indent="0" algn="l" defTabSz="914400" rtl="0" eaLnBrk="0" fontAlgn="base" latinLnBrk="0" hangingPunct="0">
+              <a:lnSpc>
+                <a:spcPct val="100000"/>
+              </a:lnSpc>
+              <a:spcBef>
+                <a:spcPct val="0"/>
+              </a:spcBef>
+              <a:spcAft>
+                <a:spcPct val="0"/>
+              </a:spcAft>
+              <a:buClrTx/>
+              <a:buSzTx/>
+              <a:buNone/>
+              <a:tabLst/>
+            </a:pPr>
+            <a:r>
+              <a:rPr kumimoji="0" lang="en-US" altLang="el-GR" b="0" i="0" u="none" strike="noStrike" cap="none" normalizeH="0" baseline="0" dirty="0">
+                <a:ln>
+                  <a:noFill/>
+                </a:ln>
+                <a:solidFill>
+                  <a:schemeClr val="tx1"/>
+                </a:solidFill>
+                <a:effectLst/>
+                <a:ea typeface="Calibri" panose="020F0502020204030204" pitchFamily="34" charset="0"/>
+                <a:cs typeface="Calibri" panose="020F0502020204030204" pitchFamily="34" charset="0"/>
+              </a:rPr>
+              <a:t>   Epochs: </a:t>
+            </a:r>
+            <a:r>
+              <a:rPr lang="en-US" altLang="el-GR" dirty="0">
+                <a:ea typeface="Calibri" panose="020F0502020204030204" pitchFamily="34" charset="0"/>
+                <a:cs typeface="Calibri" panose="020F0502020204030204" pitchFamily="34" charset="0"/>
+              </a:rPr>
+              <a:t>20</a:t>
+            </a:r>
+            <a:endParaRPr kumimoji="0" lang="en-US" altLang="el-GR" b="0" i="0" u="none" strike="noStrike" cap="none" normalizeH="0" baseline="0" dirty="0">
+              <a:ln>
+                <a:noFill/>
+              </a:ln>
+              <a:solidFill>
+                <a:schemeClr val="tx1"/>
+              </a:solidFill>
+              <a:effectLst/>
+              <a:ea typeface="Calibri" panose="020F0502020204030204" pitchFamily="34" charset="0"/>
+              <a:cs typeface="Calibri" panose="020F0502020204030204" pitchFamily="34" charset="0"/>
+            </a:endParaRPr>
+          </a:p>
+          <a:p>
+            <a:pPr marL="0" marR="0" lvl="0" indent="0" algn="l" defTabSz="914400" rtl="0" eaLnBrk="0" fontAlgn="base" latinLnBrk="0" hangingPunct="0">
+              <a:lnSpc>
+                <a:spcPct val="100000"/>
+              </a:lnSpc>
+              <a:spcBef>
+                <a:spcPct val="0"/>
+              </a:spcBef>
+              <a:spcAft>
+                <a:spcPct val="0"/>
+              </a:spcAft>
+              <a:buClrTx/>
+              <a:buSzTx/>
+              <a:buNone/>
+              <a:tabLst/>
+            </a:pPr>
+            <a:r>
+              <a:rPr lang="en-US" altLang="el-GR" dirty="0">
+                <a:ea typeface="Calibri" panose="020F0502020204030204" pitchFamily="34" charset="0"/>
+                <a:cs typeface="Calibri" panose="020F0502020204030204" pitchFamily="34" charset="0"/>
+              </a:rPr>
+              <a:t>   </a:t>
+            </a:r>
+            <a:r>
+              <a:rPr kumimoji="0" lang="en-US" altLang="el-GR" b="0" i="0" u="none" strike="noStrike" cap="none" normalizeH="0" baseline="0" dirty="0">
+                <a:ln>
+                  <a:noFill/>
+                </a:ln>
+                <a:solidFill>
+                  <a:schemeClr val="tx1"/>
+                </a:solidFill>
+                <a:effectLst/>
+                <a:ea typeface="Calibri" panose="020F0502020204030204" pitchFamily="34" charset="0"/>
+                <a:cs typeface="Calibri" panose="020F0502020204030204" pitchFamily="34" charset="0"/>
+              </a:rPr>
+              <a:t>Batch size: 32</a:t>
+            </a:r>
+            <a:endParaRPr kumimoji="0" lang="el-GR" altLang="el-GR" b="0" i="0" u="none" strike="noStrike" cap="none" normalizeH="0" baseline="0" dirty="0">
+              <a:ln>
+                <a:noFill/>
+              </a:ln>
+              <a:solidFill>
+                <a:schemeClr val="tx1"/>
+              </a:solidFill>
+              <a:effectLst/>
+              <a:ea typeface="Calibri" panose="020F0502020204030204" pitchFamily="34" charset="0"/>
+              <a:cs typeface="Calibri" panose="020F0502020204030204" pitchFamily="34" charset="0"/>
+            </a:endParaRPr>
+          </a:p>
+          <a:p>
+            <a:pPr marL="0" marR="0" lvl="0" indent="0" algn="l" defTabSz="914400" rtl="0" eaLnBrk="0" fontAlgn="base" latinLnBrk="0" hangingPunct="0">
+              <a:lnSpc>
+                <a:spcPct val="100000"/>
+              </a:lnSpc>
+              <a:spcBef>
+                <a:spcPct val="0"/>
+              </a:spcBef>
+              <a:spcAft>
+                <a:spcPct val="0"/>
+              </a:spcAft>
+              <a:buClrTx/>
+              <a:buSzTx/>
+              <a:buNone/>
+              <a:tabLst/>
+            </a:pPr>
+            <a:r>
+              <a:rPr kumimoji="0" lang="el-GR" altLang="el-GR" b="0" i="0" u="none" strike="noStrike" cap="none" normalizeH="0" baseline="0" dirty="0">
+                <a:ln>
+                  <a:noFill/>
+                </a:ln>
+                <a:solidFill>
+                  <a:schemeClr val="tx1"/>
+                </a:solidFill>
+                <a:effectLst/>
+                <a:ea typeface="Calibri" panose="020F0502020204030204" pitchFamily="34" charset="0"/>
+                <a:cs typeface="Calibri" panose="020F0502020204030204" pitchFamily="34" charset="0"/>
+              </a:rPr>
+              <a:t>Εκπαίδευση σε δύο σενάρια:</a:t>
+            </a:r>
+          </a:p>
+          <a:p>
+            <a:pPr marL="0" marR="0" lvl="0" indent="0" algn="l" defTabSz="914400" rtl="0" eaLnBrk="0" fontAlgn="base" latinLnBrk="0" hangingPunct="0">
+              <a:lnSpc>
+                <a:spcPct val="100000"/>
+              </a:lnSpc>
+              <a:spcBef>
+                <a:spcPct val="0"/>
+              </a:spcBef>
+              <a:spcAft>
+                <a:spcPct val="0"/>
+              </a:spcAft>
+              <a:buClrTx/>
+              <a:buSzTx/>
+              <a:buNone/>
+              <a:tabLst/>
+            </a:pPr>
+            <a:r>
+              <a:rPr kumimoji="0" lang="en-US" altLang="el-GR" b="0" i="0" u="none" strike="noStrike" cap="none" normalizeH="0" baseline="0" dirty="0">
+                <a:ln>
+                  <a:noFill/>
+                </a:ln>
+                <a:solidFill>
+                  <a:schemeClr val="tx1"/>
+                </a:solidFill>
+                <a:effectLst/>
+                <a:ea typeface="Calibri" panose="020F0502020204030204" pitchFamily="34" charset="0"/>
+                <a:cs typeface="Calibri" panose="020F0502020204030204" pitchFamily="34" charset="0"/>
+              </a:rPr>
+              <a:t>   Short-term prediction</a:t>
+            </a:r>
+            <a:endParaRPr kumimoji="0" lang="el-GR" altLang="el-GR" b="0" i="0" u="none" strike="noStrike" cap="none" normalizeH="0" baseline="0" dirty="0">
+              <a:ln>
+                <a:noFill/>
+              </a:ln>
+              <a:solidFill>
+                <a:schemeClr val="tx1"/>
+              </a:solidFill>
+              <a:effectLst/>
+              <a:ea typeface="Calibri" panose="020F0502020204030204" pitchFamily="34" charset="0"/>
+              <a:cs typeface="Calibri" panose="020F0502020204030204" pitchFamily="34" charset="0"/>
+            </a:endParaRPr>
+          </a:p>
+          <a:p>
+            <a:pPr marL="0" marR="0" lvl="0" indent="0" algn="l" defTabSz="914400" rtl="0" eaLnBrk="0" fontAlgn="base" latinLnBrk="0" hangingPunct="0">
+              <a:lnSpc>
+                <a:spcPct val="100000"/>
+              </a:lnSpc>
+              <a:spcBef>
+                <a:spcPct val="0"/>
+              </a:spcBef>
+              <a:spcAft>
+                <a:spcPct val="0"/>
+              </a:spcAft>
+              <a:buClrTx/>
+              <a:buSzTx/>
+              <a:buNone/>
+              <a:tabLst/>
+            </a:pPr>
+            <a:r>
+              <a:rPr kumimoji="0" lang="en-US" altLang="el-GR" b="0" i="0" u="none" strike="noStrike" cap="none" normalizeH="0" baseline="0" dirty="0">
+                <a:ln>
+                  <a:noFill/>
+                </a:ln>
+                <a:solidFill>
+                  <a:schemeClr val="tx1"/>
+                </a:solidFill>
+                <a:effectLst/>
+                <a:ea typeface="Calibri" panose="020F0502020204030204" pitchFamily="34" charset="0"/>
+                <a:cs typeface="Calibri" panose="020F0502020204030204" pitchFamily="34" charset="0"/>
+              </a:rPr>
+              <a:t>   Long-term prediction</a:t>
+            </a:r>
+            <a:endParaRPr kumimoji="0" lang="el-GR" altLang="el-GR" b="0" i="0" u="none" strike="noStrike" cap="none" normalizeH="0" baseline="0" dirty="0">
+              <a:ln>
+                <a:noFill/>
+              </a:ln>
+              <a:solidFill>
+                <a:schemeClr val="tx1"/>
+              </a:solidFill>
+              <a:effectLst/>
+              <a:ea typeface="Calibri" panose="020F0502020204030204" pitchFamily="34" charset="0"/>
+              <a:cs typeface="Calibri" panose="020F0502020204030204" pitchFamily="34" charset="0"/>
+            </a:endParaRPr>
+          </a:p>
+          <a:p>
+            <a:pPr marL="0" marR="0" lvl="0" indent="0" algn="l" defTabSz="914400" rtl="0" eaLnBrk="0" fontAlgn="base" latinLnBrk="0" hangingPunct="0">
+              <a:lnSpc>
+                <a:spcPct val="100000"/>
+              </a:lnSpc>
+              <a:spcBef>
+                <a:spcPct val="0"/>
+              </a:spcBef>
+              <a:spcAft>
+                <a:spcPct val="0"/>
+              </a:spcAft>
+              <a:buClrTx/>
+              <a:buSzTx/>
+              <a:buNone/>
+              <a:tabLst/>
+            </a:pPr>
+            <a:r>
+              <a:rPr kumimoji="0" lang="el-GR" altLang="el-GR" b="0" i="0" u="none" strike="noStrike" cap="none" normalizeH="0" baseline="0" dirty="0">
+                <a:ln>
+                  <a:noFill/>
+                </a:ln>
+                <a:solidFill>
+                  <a:schemeClr val="tx1"/>
+                </a:solidFill>
+                <a:effectLst/>
+                <a:ea typeface="Calibri" panose="020F0502020204030204" pitchFamily="34" charset="0"/>
+                <a:cs typeface="Calibri" panose="020F0502020204030204" pitchFamily="34" charset="0"/>
+              </a:rPr>
+              <a:t>Αξιολόγηση με:</a:t>
+            </a:r>
+          </a:p>
+          <a:p>
+            <a:pPr marL="0" marR="0" lvl="0" indent="0" algn="l" defTabSz="914400" rtl="0" eaLnBrk="0" fontAlgn="base" latinLnBrk="0" hangingPunct="0">
+              <a:lnSpc>
+                <a:spcPct val="100000"/>
+              </a:lnSpc>
+              <a:spcBef>
+                <a:spcPct val="0"/>
+              </a:spcBef>
+              <a:spcAft>
+                <a:spcPct val="0"/>
+              </a:spcAft>
+              <a:buClrTx/>
+              <a:buSzTx/>
+              <a:buNone/>
+              <a:tabLst/>
+            </a:pPr>
+            <a:r>
+              <a:rPr lang="en-US" altLang="el-GR" dirty="0">
+                <a:ea typeface="Calibri" panose="020F0502020204030204" pitchFamily="34" charset="0"/>
+                <a:cs typeface="Calibri" panose="020F0502020204030204" pitchFamily="34" charset="0"/>
+              </a:rPr>
+              <a:t>   </a:t>
+            </a:r>
+            <a:r>
+              <a:rPr kumimoji="0" lang="en-US" altLang="el-GR" b="0" i="0" u="none" strike="noStrike" cap="none" normalizeH="0" baseline="0" dirty="0">
+                <a:ln>
+                  <a:noFill/>
+                </a:ln>
+                <a:solidFill>
+                  <a:schemeClr val="tx1"/>
+                </a:solidFill>
+                <a:effectLst/>
+                <a:ea typeface="Calibri" panose="020F0502020204030204" pitchFamily="34" charset="0"/>
+                <a:cs typeface="Calibri" panose="020F0502020204030204" pitchFamily="34" charset="0"/>
+              </a:rPr>
+              <a:t>MSE (Mean Squared Error)</a:t>
+            </a:r>
+            <a:endParaRPr kumimoji="0" lang="el-GR" altLang="el-GR" b="0" i="0" u="none" strike="noStrike" cap="none" normalizeH="0" baseline="0" dirty="0">
+              <a:ln>
+                <a:noFill/>
+              </a:ln>
+              <a:solidFill>
+                <a:schemeClr val="tx1"/>
+              </a:solidFill>
+              <a:effectLst/>
+              <a:ea typeface="Calibri" panose="020F0502020204030204" pitchFamily="34" charset="0"/>
+              <a:cs typeface="Calibri" panose="020F0502020204030204" pitchFamily="34" charset="0"/>
+            </a:endParaRPr>
+          </a:p>
+          <a:p>
+            <a:pPr marL="0" marR="0" lvl="0" indent="0" algn="l" defTabSz="914400" rtl="0" eaLnBrk="0" fontAlgn="base" latinLnBrk="0" hangingPunct="0">
+              <a:lnSpc>
+                <a:spcPct val="100000"/>
+              </a:lnSpc>
+              <a:spcBef>
+                <a:spcPct val="0"/>
+              </a:spcBef>
+              <a:spcAft>
+                <a:spcPct val="0"/>
+              </a:spcAft>
+              <a:buClrTx/>
+              <a:buSzTx/>
+              <a:buNone/>
+              <a:tabLst/>
+            </a:pPr>
+            <a:r>
+              <a:rPr kumimoji="0" lang="en-US" altLang="el-GR" b="0" i="0" u="none" strike="noStrike" cap="none" normalizeH="0" baseline="0" dirty="0">
+                <a:ln>
+                  <a:noFill/>
+                </a:ln>
+                <a:solidFill>
+                  <a:schemeClr val="tx1"/>
+                </a:solidFill>
+                <a:effectLst/>
+                <a:ea typeface="Calibri" panose="020F0502020204030204" pitchFamily="34" charset="0"/>
+                <a:cs typeface="Calibri" panose="020F0502020204030204" pitchFamily="34" charset="0"/>
+              </a:rPr>
+              <a:t>   MAE (Mean Absolute Error)</a:t>
+            </a:r>
+            <a:endParaRPr kumimoji="0" lang="el-GR" altLang="el-GR" b="0" i="0" u="none" strike="noStrike" cap="none" normalizeH="0" baseline="0" dirty="0">
+              <a:ln>
+                <a:noFill/>
+              </a:ln>
+              <a:solidFill>
+                <a:schemeClr val="tx1"/>
+              </a:solidFill>
+              <a:effectLst/>
+              <a:ea typeface="Calibri" panose="020F0502020204030204" pitchFamily="34" charset="0"/>
+              <a:cs typeface="Calibri" panose="020F0502020204030204" pitchFamily="34" charset="0"/>
+            </a:endParaRPr>
+          </a:p>
+          <a:p>
+            <a:pPr marL="0" marR="0" lvl="0" indent="0" algn="l" defTabSz="914400" rtl="0" eaLnBrk="0" fontAlgn="base" latinLnBrk="0" hangingPunct="0">
+              <a:lnSpc>
+                <a:spcPct val="100000"/>
+              </a:lnSpc>
+              <a:spcBef>
+                <a:spcPct val="0"/>
+              </a:spcBef>
+              <a:spcAft>
+                <a:spcPct val="0"/>
+              </a:spcAft>
+              <a:buClrTx/>
+              <a:buSzTx/>
+              <a:buNone/>
+              <a:tabLst/>
+            </a:pPr>
+            <a:r>
+              <a:rPr kumimoji="0" lang="en-US" altLang="el-GR" b="0" i="0" u="none" strike="noStrike" cap="none" normalizeH="0" baseline="0" dirty="0">
+                <a:ln>
+                  <a:noFill/>
+                </a:ln>
+                <a:solidFill>
+                  <a:schemeClr val="tx1"/>
+                </a:solidFill>
+                <a:effectLst/>
+                <a:ea typeface="Calibri" panose="020F0502020204030204" pitchFamily="34" charset="0"/>
+                <a:cs typeface="Calibri" panose="020F0502020204030204" pitchFamily="34" charset="0"/>
+              </a:rPr>
+              <a:t>   MAPE (Mean Absolute Percentage Error)</a:t>
+            </a:r>
+            <a:endParaRPr kumimoji="0" lang="el-GR" altLang="el-GR" b="0" i="0" u="none" strike="noStrike" cap="none" normalizeH="0" baseline="0" dirty="0">
+              <a:ln>
+                <a:noFill/>
+              </a:ln>
+              <a:solidFill>
+                <a:schemeClr val="tx1"/>
+              </a:solidFill>
+              <a:effectLst/>
+              <a:ea typeface="Calibri" panose="020F0502020204030204" pitchFamily="34" charset="0"/>
+              <a:cs typeface="Calibri" panose="020F0502020204030204" pitchFamily="34" charset="0"/>
+            </a:endParaRPr>
+          </a:p>
+        </p:txBody>
+      </p:sp>
+      <p:pic>
+        <p:nvPicPr>
+          <p:cNvPr id="5" name="Εικόνα 4">
+            <a:extLst>
+              <a:ext uri="{FF2B5EF4-FFF2-40B4-BE49-F238E27FC236}">
+                <a16:creationId xmlns:a16="http://schemas.microsoft.com/office/drawing/2014/main" id="{D377445F-C128-4F82-83A4-7A7F58FFD6DE}"/>
+              </a:ext>
+            </a:extLst>
+          </p:cNvPr>
+          <p:cNvPicPr>
+            <a:picLocks noChangeAspect="1"/>
+          </p:cNvPicPr>
+          <p:nvPr/>
+        </p:nvPicPr>
+        <p:blipFill>
+          <a:blip r:embed="rId2"/>
+          <a:stretch>
+            <a:fillRect/>
+          </a:stretch>
+        </p:blipFill>
+        <p:spPr>
+          <a:xfrm>
+            <a:off x="6864701" y="4471586"/>
+            <a:ext cx="2482499" cy="1873367"/>
+          </a:xfrm>
+          <a:prstGeom prst="rect">
+            <a:avLst/>
+          </a:prstGeom>
+        </p:spPr>
+      </p:pic>
+      <p:pic>
+        <p:nvPicPr>
+          <p:cNvPr id="7" name="Εικόνα 6">
+            <a:extLst>
+              <a:ext uri="{FF2B5EF4-FFF2-40B4-BE49-F238E27FC236}">
+                <a16:creationId xmlns:a16="http://schemas.microsoft.com/office/drawing/2014/main" id="{D61DBE5A-E23C-4F3C-8263-13ADAE0D610F}"/>
+              </a:ext>
+            </a:extLst>
+          </p:cNvPr>
+          <p:cNvPicPr>
+            <a:picLocks noChangeAspect="1"/>
+          </p:cNvPicPr>
+          <p:nvPr/>
+        </p:nvPicPr>
+        <p:blipFill>
+          <a:blip r:embed="rId3"/>
+          <a:stretch>
+            <a:fillRect/>
+          </a:stretch>
+        </p:blipFill>
+        <p:spPr>
+          <a:xfrm>
+            <a:off x="6180666" y="1102265"/>
+            <a:ext cx="5173133" cy="2911367"/>
+          </a:xfrm>
+          <a:prstGeom prst="rect">
+            <a:avLst/>
+          </a:prstGeom>
+        </p:spPr>
+      </p:pic>
+    </p:spTree>
+    <p:extLst>
+      <p:ext uri="{BB962C8B-B14F-4D97-AF65-F5344CB8AC3E}">
+        <p14:creationId xmlns:p14="http://schemas.microsoft.com/office/powerpoint/2010/main" val="1399165493"/>
+      </p:ext>
+    </p:extLst>
+  </p:cSld>
+  <p:clrMapOvr>
+    <a:masterClrMapping/>
+  </p:clrMapOvr>
+</p:sld>
+</file>
+
+<file path=ppt/slides/slide13.xml><?xml version="1.0" encoding="utf-8"?>
+<p:sld xmlns:a="http://schemas.openxmlformats.org/drawingml/2006/main" xmlns:r="http://schemas.openxmlformats.org/officeDocument/2006/relationships" xmlns:p="http://schemas.openxmlformats.org/presentationml/2006/main">
+  <p:cSld>
+    <p:spTree>
+      <p:nvGrpSpPr>
+        <p:cNvPr id="1" name=""/>
+        <p:cNvGrpSpPr/>
+        <p:nvPr/>
+      </p:nvGrpSpPr>
+      <p:grpSpPr>
+        <a:xfrm>
+          <a:off x="0" y="0"/>
+          <a:ext cx="0" cy="0"/>
+          <a:chOff x="0" y="0"/>
+          <a:chExt cx="0" cy="0"/>
+        </a:xfrm>
+      </p:grpSpPr>
+      <p:sp>
+        <p:nvSpPr>
+          <p:cNvPr id="2" name="Τίτλος 1">
+            <a:extLst>
+              <a:ext uri="{FF2B5EF4-FFF2-40B4-BE49-F238E27FC236}">
+                <a16:creationId xmlns:a16="http://schemas.microsoft.com/office/drawing/2014/main" id="{7718DFC3-34AC-4DEC-8EB8-A30B31F8166D}"/>
+              </a:ext>
+            </a:extLst>
+          </p:cNvPr>
+          <p:cNvSpPr>
+            <a:spLocks noGrp="1"/>
+          </p:cNvSpPr>
+          <p:nvPr>
+            <p:ph type="title"/>
+          </p:nvPr>
+        </p:nvSpPr>
+        <p:spPr/>
+        <p:txBody>
+          <a:bodyPr/>
+          <a:lstStyle/>
+          <a:p>
+            <a:r>
+              <a:rPr lang="en-US" dirty="0"/>
+              <a:t>LSTM MODEL</a:t>
+            </a:r>
+            <a:endParaRPr lang="el-GR" dirty="0"/>
+          </a:p>
+        </p:txBody>
+      </p:sp>
+      <p:pic>
+        <p:nvPicPr>
+          <p:cNvPr id="6" name="Θέση περιεχομένου 5">
+            <a:extLst>
+              <a:ext uri="{FF2B5EF4-FFF2-40B4-BE49-F238E27FC236}">
+                <a16:creationId xmlns:a16="http://schemas.microsoft.com/office/drawing/2014/main" id="{E7F2AFED-2659-4589-AD07-00FB7AE58B53}"/>
+              </a:ext>
+            </a:extLst>
+          </p:cNvPr>
+          <p:cNvPicPr>
+            <a:picLocks noGrp="1" noChangeAspect="1"/>
+          </p:cNvPicPr>
+          <p:nvPr>
+            <p:ph idx="1"/>
+          </p:nvPr>
+        </p:nvPicPr>
+        <p:blipFill>
+          <a:blip r:embed="rId2"/>
+          <a:stretch>
+            <a:fillRect/>
+          </a:stretch>
+        </p:blipFill>
+        <p:spPr>
+          <a:xfrm>
+            <a:off x="546847" y="1905558"/>
+            <a:ext cx="5491881" cy="2693336"/>
+          </a:xfrm>
+          <a:prstGeom prst="rect">
+            <a:avLst/>
+          </a:prstGeom>
+        </p:spPr>
+      </p:pic>
+      <p:pic>
+        <p:nvPicPr>
+          <p:cNvPr id="8" name="Εικόνα 7">
+            <a:extLst>
+              <a:ext uri="{FF2B5EF4-FFF2-40B4-BE49-F238E27FC236}">
+                <a16:creationId xmlns:a16="http://schemas.microsoft.com/office/drawing/2014/main" id="{D92D86BE-B280-4B5F-A39B-CE50943AF8ED}"/>
+              </a:ext>
+            </a:extLst>
+          </p:cNvPr>
+          <p:cNvPicPr>
+            <a:picLocks noChangeAspect="1"/>
+          </p:cNvPicPr>
+          <p:nvPr/>
+        </p:nvPicPr>
+        <p:blipFill>
+          <a:blip r:embed="rId3"/>
+          <a:stretch>
+            <a:fillRect/>
+          </a:stretch>
+        </p:blipFill>
+        <p:spPr>
+          <a:xfrm>
+            <a:off x="6096000" y="3429000"/>
+            <a:ext cx="5549152" cy="3026810"/>
+          </a:xfrm>
+          <a:prstGeom prst="rect">
+            <a:avLst/>
+          </a:prstGeom>
+        </p:spPr>
+      </p:pic>
+      <p:pic>
+        <p:nvPicPr>
+          <p:cNvPr id="9" name="Εικόνα 8">
+            <a:extLst>
+              <a:ext uri="{FF2B5EF4-FFF2-40B4-BE49-F238E27FC236}">
+                <a16:creationId xmlns:a16="http://schemas.microsoft.com/office/drawing/2014/main" id="{14CC2562-788A-417A-B6B4-0D56C2D9D25A}"/>
+              </a:ext>
+            </a:extLst>
+          </p:cNvPr>
+          <p:cNvPicPr>
+            <a:picLocks noChangeAspect="1"/>
+          </p:cNvPicPr>
+          <p:nvPr/>
+        </p:nvPicPr>
+        <p:blipFill>
+          <a:blip r:embed="rId4"/>
+          <a:stretch>
+            <a:fillRect/>
+          </a:stretch>
+        </p:blipFill>
+        <p:spPr>
+          <a:xfrm>
+            <a:off x="791045" y="5658577"/>
+            <a:ext cx="3658210" cy="521317"/>
+          </a:xfrm>
+          <a:prstGeom prst="rect">
+            <a:avLst/>
+          </a:prstGeom>
+        </p:spPr>
+      </p:pic>
+      <p:sp>
+        <p:nvSpPr>
+          <p:cNvPr id="12" name="Ορθογώνιο 11">
+            <a:extLst>
+              <a:ext uri="{FF2B5EF4-FFF2-40B4-BE49-F238E27FC236}">
+                <a16:creationId xmlns:a16="http://schemas.microsoft.com/office/drawing/2014/main" id="{C3E56900-18D7-4786-9AAC-3CFAD6DEC093}"/>
+              </a:ext>
+            </a:extLst>
+          </p:cNvPr>
+          <p:cNvSpPr/>
+          <p:nvPr/>
+        </p:nvSpPr>
+        <p:spPr>
+          <a:xfrm>
+            <a:off x="6910456" y="1443317"/>
+            <a:ext cx="3363097" cy="1446550"/>
+          </a:xfrm>
+          <a:prstGeom prst="rect">
+            <a:avLst/>
+          </a:prstGeom>
+        </p:spPr>
+        <p:txBody>
+          <a:bodyPr wrap="square">
+            <a:spAutoFit/>
+          </a:bodyPr>
+          <a:lstStyle/>
+          <a:p>
+            <a:r>
+              <a:rPr lang="el-GR" sz="2200" dirty="0">
+                <a:latin typeface="Calibri" panose="020F0502020204030204" pitchFamily="34" charset="0"/>
+                <a:ea typeface="Calibri" panose="020F0502020204030204" pitchFamily="34" charset="0"/>
+                <a:cs typeface="Calibri" panose="020F0502020204030204" pitchFamily="34" charset="0"/>
+              </a:rPr>
+              <a:t>Εκπαίδευση μοντέλου</a:t>
+            </a:r>
+            <a:r>
+              <a:rPr lang="en-US" sz="2200" dirty="0">
+                <a:latin typeface="Calibri" panose="020F0502020204030204" pitchFamily="34" charset="0"/>
+                <a:ea typeface="Calibri" panose="020F0502020204030204" pitchFamily="34" charset="0"/>
+                <a:cs typeface="Calibri" panose="020F0502020204030204" pitchFamily="34" charset="0"/>
+              </a:rPr>
+              <a:t>:</a:t>
+            </a:r>
+          </a:p>
+          <a:p>
+            <a:pPr marL="342900" indent="-342900">
+              <a:buClr>
+                <a:schemeClr val="accent2">
+                  <a:lumMod val="75000"/>
+                </a:schemeClr>
+              </a:buClr>
+              <a:buFont typeface="Wingdings" panose="05000000000000000000" pitchFamily="2" charset="2"/>
+              <a:buChar char="§"/>
+            </a:pPr>
+            <a:r>
+              <a:rPr lang="en-US" sz="2200" dirty="0">
+                <a:latin typeface="Calibri" panose="020F0502020204030204" pitchFamily="34" charset="0"/>
+                <a:ea typeface="Calibri" panose="020F0502020204030204" pitchFamily="34" charset="0"/>
+                <a:cs typeface="Calibri" panose="020F0502020204030204" pitchFamily="34" charset="0"/>
+              </a:rPr>
+              <a:t>Lookback = 24</a:t>
+            </a:r>
+          </a:p>
+          <a:p>
+            <a:pPr marL="342900" indent="-342900">
+              <a:buClr>
+                <a:schemeClr val="accent2">
+                  <a:lumMod val="75000"/>
+                </a:schemeClr>
+              </a:buClr>
+              <a:buFont typeface="Wingdings" panose="05000000000000000000" pitchFamily="2" charset="2"/>
+              <a:buChar char="§"/>
+            </a:pPr>
+            <a:r>
+              <a:rPr lang="en-US" sz="2200" dirty="0">
+                <a:latin typeface="Calibri" panose="020F0502020204030204" pitchFamily="34" charset="0"/>
+                <a:ea typeface="Calibri" panose="020F0502020204030204" pitchFamily="34" charset="0"/>
+                <a:cs typeface="Calibri" panose="020F0502020204030204" pitchFamily="34" charset="0"/>
+              </a:rPr>
+              <a:t>Epochs = 40</a:t>
+            </a:r>
+          </a:p>
+          <a:p>
+            <a:pPr marL="342900" indent="-342900">
+              <a:buClr>
+                <a:schemeClr val="accent2">
+                  <a:lumMod val="75000"/>
+                </a:schemeClr>
+              </a:buClr>
+              <a:buFont typeface="Wingdings" panose="05000000000000000000" pitchFamily="2" charset="2"/>
+              <a:buChar char="§"/>
+            </a:pPr>
+            <a:r>
+              <a:rPr lang="en-US" sz="2200" dirty="0">
+                <a:latin typeface="Calibri" panose="020F0502020204030204" pitchFamily="34" charset="0"/>
+                <a:ea typeface="Calibri" panose="020F0502020204030204" pitchFamily="34" charset="0"/>
+                <a:cs typeface="Calibri" panose="020F0502020204030204" pitchFamily="34" charset="0"/>
+              </a:rPr>
+              <a:t>Batch size = 16</a:t>
+            </a:r>
+            <a:endParaRPr lang="el-GR" sz="2200" dirty="0">
+              <a:latin typeface="Calibri" panose="020F0502020204030204" pitchFamily="34" charset="0"/>
+              <a:ea typeface="Calibri" panose="020F0502020204030204" pitchFamily="34" charset="0"/>
+              <a:cs typeface="Calibri" panose="020F0502020204030204" pitchFamily="34" charset="0"/>
+            </a:endParaRPr>
+          </a:p>
+        </p:txBody>
+      </p:sp>
+      <p:sp>
+        <p:nvSpPr>
+          <p:cNvPr id="13" name="Ορθογώνιο 12">
+            <a:extLst>
+              <a:ext uri="{FF2B5EF4-FFF2-40B4-BE49-F238E27FC236}">
+                <a16:creationId xmlns:a16="http://schemas.microsoft.com/office/drawing/2014/main" id="{4FA0BB24-71A6-454E-A258-FB1392A55673}"/>
+              </a:ext>
+            </a:extLst>
+          </p:cNvPr>
+          <p:cNvSpPr/>
+          <p:nvPr/>
+        </p:nvSpPr>
+        <p:spPr>
+          <a:xfrm>
+            <a:off x="730748" y="5104708"/>
+            <a:ext cx="3363097" cy="430887"/>
+          </a:xfrm>
+          <a:prstGeom prst="rect">
+            <a:avLst/>
+          </a:prstGeom>
+        </p:spPr>
+        <p:txBody>
+          <a:bodyPr wrap="square">
+            <a:spAutoFit/>
+          </a:bodyPr>
+          <a:lstStyle/>
+          <a:p>
+            <a:r>
+              <a:rPr lang="el-GR" sz="2200" dirty="0">
+                <a:latin typeface="Calibri" panose="020F0502020204030204" pitchFamily="34" charset="0"/>
+                <a:ea typeface="Calibri" panose="020F0502020204030204" pitchFamily="34" charset="0"/>
+                <a:cs typeface="Calibri" panose="020F0502020204030204" pitchFamily="34" charset="0"/>
+              </a:rPr>
+              <a:t>Αξιολόγηση σφαλμάτων</a:t>
+            </a:r>
+            <a:r>
+              <a:rPr lang="en-US" sz="2200" dirty="0">
+                <a:latin typeface="Calibri" panose="020F0502020204030204" pitchFamily="34" charset="0"/>
+                <a:ea typeface="Calibri" panose="020F0502020204030204" pitchFamily="34" charset="0"/>
+                <a:cs typeface="Calibri" panose="020F0502020204030204" pitchFamily="34" charset="0"/>
+              </a:rPr>
+              <a:t>:</a:t>
+            </a:r>
+            <a:endParaRPr lang="el-GR" sz="2200" dirty="0">
+              <a:latin typeface="Calibri" panose="020F0502020204030204" pitchFamily="34" charset="0"/>
+              <a:ea typeface="Calibri" panose="020F0502020204030204" pitchFamily="34" charset="0"/>
+              <a:cs typeface="Calibri" panose="020F0502020204030204" pitchFamily="34" charset="0"/>
+            </a:endParaRPr>
+          </a:p>
+        </p:txBody>
+      </p:sp>
+    </p:spTree>
+    <p:extLst>
+      <p:ext uri="{BB962C8B-B14F-4D97-AF65-F5344CB8AC3E}">
+        <p14:creationId xmlns:p14="http://schemas.microsoft.com/office/powerpoint/2010/main" val="2047836088"/>
+      </p:ext>
+    </p:extLst>
+  </p:cSld>
+  <p:clrMapOvr>
+    <a:masterClrMapping/>
+  </p:clrMapOvr>
+</p:sld>
+</file>
+
+<file path=ppt/slides/slide14.xml><?xml version="1.0" encoding="utf-8"?>
+<p:sld xmlns:a="http://schemas.openxmlformats.org/drawingml/2006/main" xmlns:r="http://schemas.openxmlformats.org/officeDocument/2006/relationships" xmlns:p="http://schemas.openxmlformats.org/presentationml/2006/main">
+  <p:cSld>
+    <p:spTree>
+      <p:nvGrpSpPr>
+        <p:cNvPr id="1" name=""/>
+        <p:cNvGrpSpPr/>
+        <p:nvPr/>
+      </p:nvGrpSpPr>
+      <p:grpSpPr>
+        <a:xfrm>
+          <a:off x="0" y="0"/>
+          <a:ext cx="0" cy="0"/>
+          <a:chOff x="0" y="0"/>
+          <a:chExt cx="0" cy="0"/>
+        </a:xfrm>
+      </p:grpSpPr>
+      <p:sp>
+        <p:nvSpPr>
+          <p:cNvPr id="2" name="Τίτλος 1">
+            <a:extLst>
+              <a:ext uri="{FF2B5EF4-FFF2-40B4-BE49-F238E27FC236}">
+                <a16:creationId xmlns:a16="http://schemas.microsoft.com/office/drawing/2014/main" id="{35868DF7-0EC0-439B-AC94-9DFBDE2E2368}"/>
+              </a:ext>
+            </a:extLst>
+          </p:cNvPr>
+          <p:cNvSpPr>
+            <a:spLocks noGrp="1"/>
+          </p:cNvSpPr>
+          <p:nvPr>
+            <p:ph type="title"/>
+          </p:nvPr>
+        </p:nvSpPr>
+        <p:spPr>
+          <a:xfrm>
+            <a:off x="1024129" y="881050"/>
+            <a:ext cx="9720072" cy="873522"/>
+          </a:xfrm>
+        </p:spPr>
+        <p:txBody>
+          <a:bodyPr/>
+          <a:lstStyle/>
+          <a:p>
+            <a:r>
+              <a:rPr lang="el-GR" dirty="0"/>
+              <a:t>Η ΕΡΓΑΣΙΑ ΣΤΟ </a:t>
+            </a:r>
+            <a:r>
+              <a:rPr lang="en-US" dirty="0"/>
+              <a:t>GITHUB</a:t>
+            </a:r>
+            <a:endParaRPr lang="el-GR" dirty="0"/>
+          </a:p>
+        </p:txBody>
+      </p:sp>
+      <p:sp>
+        <p:nvSpPr>
+          <p:cNvPr id="3" name="Θέση περιεχομένου 2">
+            <a:extLst>
+              <a:ext uri="{FF2B5EF4-FFF2-40B4-BE49-F238E27FC236}">
+                <a16:creationId xmlns:a16="http://schemas.microsoft.com/office/drawing/2014/main" id="{781143FF-632A-44B1-A75D-754A0F96369E}"/>
+              </a:ext>
+            </a:extLst>
+          </p:cNvPr>
+          <p:cNvSpPr>
+            <a:spLocks noGrp="1"/>
+          </p:cNvSpPr>
+          <p:nvPr>
+            <p:ph idx="1"/>
+          </p:nvPr>
+        </p:nvSpPr>
+        <p:spPr>
+          <a:xfrm>
+            <a:off x="1024128" y="1882587"/>
+            <a:ext cx="9720073" cy="4652683"/>
+          </a:xfrm>
+        </p:spPr>
+        <p:txBody>
+          <a:bodyPr/>
+          <a:lstStyle/>
+          <a:p>
+            <a:r>
+              <a:rPr lang="en-US" dirty="0"/>
+              <a:t>https://github.com/grgmyl/alibabacluster.git</a:t>
+            </a:r>
+          </a:p>
+          <a:p>
+            <a:endParaRPr lang="en-US" dirty="0"/>
+          </a:p>
+          <a:p>
+            <a:endParaRPr lang="el-GR" dirty="0"/>
+          </a:p>
+        </p:txBody>
+      </p:sp>
+      <p:pic>
+        <p:nvPicPr>
+          <p:cNvPr id="5" name="Εικόνα 4">
+            <a:extLst>
+              <a:ext uri="{FF2B5EF4-FFF2-40B4-BE49-F238E27FC236}">
+                <a16:creationId xmlns:a16="http://schemas.microsoft.com/office/drawing/2014/main" id="{B383B069-ED51-46B9-9E49-2D99EC0CC26F}"/>
+              </a:ext>
+            </a:extLst>
+          </p:cNvPr>
+          <p:cNvPicPr>
+            <a:picLocks noChangeAspect="1"/>
+          </p:cNvPicPr>
+          <p:nvPr/>
+        </p:nvPicPr>
+        <p:blipFill>
+          <a:blip r:embed="rId2"/>
+          <a:stretch>
+            <a:fillRect/>
+          </a:stretch>
+        </p:blipFill>
+        <p:spPr>
+          <a:xfrm>
+            <a:off x="1193019" y="2446185"/>
+            <a:ext cx="4311309" cy="3826599"/>
+          </a:xfrm>
+          <a:prstGeom prst="rect">
+            <a:avLst/>
+          </a:prstGeom>
+        </p:spPr>
+      </p:pic>
+    </p:spTree>
+    <p:extLst>
+      <p:ext uri="{BB962C8B-B14F-4D97-AF65-F5344CB8AC3E}">
+        <p14:creationId xmlns:p14="http://schemas.microsoft.com/office/powerpoint/2010/main" val="1803626025"/>
+      </p:ext>
+    </p:extLst>
+  </p:cSld>
+  <p:clrMapOvr>
+    <a:masterClrMapping/>
+  </p:clrMapOvr>
+</p:sld>
+</file>
+
+<file path=ppt/slides/slide15.xml><?xml version="1.0" encoding="utf-8"?>
+<p:sld xmlns:a="http://schemas.openxmlformats.org/drawingml/2006/main" xmlns:r="http://schemas.openxmlformats.org/officeDocument/2006/relationships" xmlns:p="http://schemas.openxmlformats.org/presentationml/2006/main">
+  <p:cSld>
+    <p:spTree>
+      <p:nvGrpSpPr>
+        <p:cNvPr id="1" name=""/>
+        <p:cNvGrpSpPr/>
+        <p:nvPr/>
+      </p:nvGrpSpPr>
+      <p:grpSpPr>
+        <a:xfrm>
+          <a:off x="0" y="0"/>
+          <a:ext cx="0" cy="0"/>
+          <a:chOff x="0" y="0"/>
+          <a:chExt cx="0" cy="0"/>
+        </a:xfrm>
+      </p:grpSpPr>
+      <p:sp>
+        <p:nvSpPr>
+          <p:cNvPr id="2" name="Τίτλος 1">
+            <a:extLst>
+              <a:ext uri="{FF2B5EF4-FFF2-40B4-BE49-F238E27FC236}">
                 <a16:creationId xmlns:a16="http://schemas.microsoft.com/office/drawing/2014/main" id="{0544732C-F72A-4B10-A476-DD554BAD1E51}"/>
               </a:ext>
             </a:extLst>
@@ -21740,6 +23368,16 @@
               <a:rPr lang="en-US" dirty="0"/>
               <a:t>https://www.geeksforgeeks.org/time-series-forecasting-using-pytorch/</a:t>
             </a:r>
+          </a:p>
+          <a:p>
+            <a:pPr>
+              <a:buFont typeface="Wingdings" panose="05000000000000000000" pitchFamily="2" charset="2"/>
+              <a:buChar char="§"/>
+            </a:pPr>
+            <a:r>
+              <a:rPr lang="en-US" dirty="0"/>
+              <a:t>https://www.tensorflow.org/guide/keras/training_with_built_in_methods</a:t>
+            </a:r>
             <a:endParaRPr lang="el-GR" dirty="0"/>
           </a:p>
         </p:txBody>
@@ -21748,6 +23386,82 @@
     <p:extLst>
       <p:ext uri="{BB962C8B-B14F-4D97-AF65-F5344CB8AC3E}">
         <p14:creationId xmlns:p14="http://schemas.microsoft.com/office/powerpoint/2010/main" val="152612609"/>
+      </p:ext>
+    </p:extLst>
+  </p:cSld>
+  <p:clrMapOvr>
+    <a:masterClrMapping/>
+  </p:clrMapOvr>
+</p:sld>
+</file>
+
+<file path=ppt/slides/slide16.xml><?xml version="1.0" encoding="utf-8"?>
+<p:sld xmlns:a="http://schemas.openxmlformats.org/drawingml/2006/main" xmlns:r="http://schemas.openxmlformats.org/officeDocument/2006/relationships" xmlns:p="http://schemas.openxmlformats.org/presentationml/2006/main">
+  <p:cSld>
+    <p:bg>
+      <p:bgPr>
+        <a:solidFill>
+          <a:schemeClr val="accent1">
+            <a:lumMod val="20000"/>
+            <a:lumOff val="80000"/>
+          </a:schemeClr>
+        </a:solidFill>
+        <a:effectLst/>
+      </p:bgPr>
+    </p:bg>
+    <p:spTree>
+      <p:nvGrpSpPr>
+        <p:cNvPr id="1" name=""/>
+        <p:cNvGrpSpPr/>
+        <p:nvPr/>
+      </p:nvGrpSpPr>
+      <p:grpSpPr>
+        <a:xfrm>
+          <a:off x="0" y="0"/>
+          <a:ext cx="0" cy="0"/>
+          <a:chOff x="0" y="0"/>
+          <a:chExt cx="0" cy="0"/>
+        </a:xfrm>
+      </p:grpSpPr>
+      <p:sp>
+        <p:nvSpPr>
+          <p:cNvPr id="2" name="TextBox 1">
+            <a:extLst>
+              <a:ext uri="{FF2B5EF4-FFF2-40B4-BE49-F238E27FC236}">
+                <a16:creationId xmlns:a16="http://schemas.microsoft.com/office/drawing/2014/main" id="{78C2F603-2F6B-4ADD-BE29-1717163F20BC}"/>
+              </a:ext>
+            </a:extLst>
+          </p:cNvPr>
+          <p:cNvSpPr txBox="1"/>
+          <p:nvPr/>
+        </p:nvSpPr>
+        <p:spPr>
+          <a:xfrm>
+            <a:off x="3666564" y="2850775"/>
+            <a:ext cx="4571999" cy="646331"/>
+          </a:xfrm>
+          <a:prstGeom prst="rect">
+            <a:avLst/>
+          </a:prstGeom>
+          <a:noFill/>
+        </p:spPr>
+        <p:txBody>
+          <a:bodyPr wrap="square" rtlCol="0">
+            <a:spAutoFit/>
+          </a:bodyPr>
+          <a:lstStyle/>
+          <a:p>
+            <a:r>
+              <a:rPr lang="el-GR" sz="3600" b="1" dirty="0"/>
+              <a:t>ΕΥΧΑΡΙΣΤΟΥΜΕ ΠΟΛΥ!</a:t>
+            </a:r>
+          </a:p>
+        </p:txBody>
+      </p:sp>
+    </p:spTree>
+    <p:extLst>
+      <p:ext uri="{BB962C8B-B14F-4D97-AF65-F5344CB8AC3E}">
+        <p14:creationId xmlns:p14="http://schemas.microsoft.com/office/powerpoint/2010/main" val="1745761994"/>
       </p:ext>
     </p:extLst>
   </p:cSld>
@@ -21811,9 +23525,18 @@
           <a:lstStyle/>
           <a:p>
             <a:r>
+              <a:rPr lang="el-GR" dirty="0" err="1"/>
+              <a:t>Στοχος</a:t>
+            </a:r>
+            <a:r>
               <a:rPr lang="el-GR" dirty="0"/>
-              <a:t>Στόχος Εργασίας</a:t>
-            </a:r>
+              <a:t> </a:t>
+            </a:r>
+            <a:r>
+              <a:rPr lang="el-GR" dirty="0" err="1"/>
+              <a:t>Εργασιας</a:t>
+            </a:r>
+            <a:endParaRPr lang="el-GR" dirty="0"/>
           </a:p>
         </p:txBody>
       </p:sp>
@@ -21923,7 +23646,7 @@
             </a:r>
             <a:r>
               <a:rPr lang="el-GR" dirty="0"/>
-              <a:t> τόσο για μικρά όσο και μεγάλα διαστήματά (</a:t>
+              <a:t> τόσο για μικρά όσο και μεγάλα διαστήματα (</a:t>
             </a:r>
             <a:r>
               <a:rPr lang="el-GR" dirty="0" err="1"/>
@@ -21947,8 +23670,13 @@
             </a:r>
             <a:r>
               <a:rPr lang="el-GR" dirty="0"/>
-              <a:t>).</a:t>
-            </a:r>
+              <a:t>)</a:t>
+            </a:r>
+            <a:r>
+              <a:rPr lang="en-US" dirty="0"/>
+              <a:t>.</a:t>
+            </a:r>
+            <a:endParaRPr lang="el-GR" dirty="0"/>
           </a:p>
         </p:txBody>
       </p:sp>
@@ -21987,6 +23715,165 @@
           <p:cNvPr id="2" name="Τίτλος 1">
             <a:extLst>
               <a:ext uri="{FF2B5EF4-FFF2-40B4-BE49-F238E27FC236}">
+                <a16:creationId xmlns:a16="http://schemas.microsoft.com/office/drawing/2014/main" id="{E6FE2BBD-AB75-4B79-B5E9-A83326D854AA}"/>
+              </a:ext>
+            </a:extLst>
+          </p:cNvPr>
+          <p:cNvSpPr>
+            <a:spLocks noGrp="1"/>
+          </p:cNvSpPr>
+          <p:nvPr>
+            <p:ph type="title"/>
+          </p:nvPr>
+        </p:nvSpPr>
+        <p:spPr/>
+        <p:txBody>
+          <a:bodyPr/>
+          <a:lstStyle/>
+          <a:p>
+            <a:r>
+              <a:rPr lang="el-GR" dirty="0" err="1"/>
+              <a:t>Εργαλεια</a:t>
+            </a:r>
+            <a:r>
+              <a:rPr lang="el-GR" dirty="0"/>
+              <a:t> που </a:t>
+            </a:r>
+            <a:r>
+              <a:rPr lang="el-GR" dirty="0" err="1"/>
+              <a:t>χρησιμοποιηθηκαν</a:t>
+            </a:r>
+            <a:endParaRPr lang="el-GR" dirty="0"/>
+          </a:p>
+        </p:txBody>
+      </p:sp>
+      <p:pic>
+        <p:nvPicPr>
+          <p:cNvPr id="4" name="Θέση περιεχομένου 3">
+            <a:extLst>
+              <a:ext uri="{FF2B5EF4-FFF2-40B4-BE49-F238E27FC236}">
+                <a16:creationId xmlns:a16="http://schemas.microsoft.com/office/drawing/2014/main" id="{6DF8E1AA-A7C5-4F9D-BF36-DB26B8EF1D07}"/>
+              </a:ext>
+            </a:extLst>
+          </p:cNvPr>
+          <p:cNvPicPr>
+            <a:picLocks noGrp="1" noChangeAspect="1"/>
+          </p:cNvPicPr>
+          <p:nvPr>
+            <p:ph idx="1"/>
+          </p:nvPr>
+        </p:nvPicPr>
+        <p:blipFill>
+          <a:blip r:embed="rId2"/>
+          <a:stretch>
+            <a:fillRect/>
+          </a:stretch>
+        </p:blipFill>
+        <p:spPr>
+          <a:xfrm>
+            <a:off x="320646" y="2787625"/>
+            <a:ext cx="3371380" cy="2225233"/>
+          </a:xfrm>
+          <a:prstGeom prst="rect">
+            <a:avLst/>
+          </a:prstGeom>
+        </p:spPr>
+      </p:pic>
+      <p:pic>
+        <p:nvPicPr>
+          <p:cNvPr id="6" name="Εικόνα 5">
+            <a:extLst>
+              <a:ext uri="{FF2B5EF4-FFF2-40B4-BE49-F238E27FC236}">
+                <a16:creationId xmlns:a16="http://schemas.microsoft.com/office/drawing/2014/main" id="{23F0E3BE-0C15-401E-9260-97CDC0390048}"/>
+              </a:ext>
+            </a:extLst>
+          </p:cNvPr>
+          <p:cNvPicPr>
+            <a:picLocks noChangeAspect="1"/>
+          </p:cNvPicPr>
+          <p:nvPr/>
+        </p:nvPicPr>
+        <p:blipFill>
+          <a:blip r:embed="rId3"/>
+          <a:stretch>
+            <a:fillRect/>
+          </a:stretch>
+        </p:blipFill>
+        <p:spPr>
+          <a:xfrm>
+            <a:off x="4800600" y="2682313"/>
+            <a:ext cx="2706345" cy="2750802"/>
+          </a:xfrm>
+          <a:prstGeom prst="rect">
+            <a:avLst/>
+          </a:prstGeom>
+        </p:spPr>
+      </p:pic>
+      <p:pic>
+        <p:nvPicPr>
+          <p:cNvPr id="8" name="Εικόνα 7">
+            <a:extLst>
+              <a:ext uri="{FF2B5EF4-FFF2-40B4-BE49-F238E27FC236}">
+                <a16:creationId xmlns:a16="http://schemas.microsoft.com/office/drawing/2014/main" id="{DF2E7F75-0938-4A20-9182-FADD0D3DEF54}"/>
+              </a:ext>
+            </a:extLst>
+          </p:cNvPr>
+          <p:cNvPicPr>
+            <a:picLocks noChangeAspect="1"/>
+          </p:cNvPicPr>
+          <p:nvPr/>
+        </p:nvPicPr>
+        <p:blipFill>
+          <a:blip r:embed="rId4"/>
+          <a:stretch>
+            <a:fillRect/>
+          </a:stretch>
+        </p:blipFill>
+        <p:spPr>
+          <a:xfrm>
+            <a:off x="7975600" y="2840092"/>
+            <a:ext cx="3962400" cy="2281518"/>
+          </a:xfrm>
+          <a:prstGeom prst="rect">
+            <a:avLst/>
+          </a:prstGeom>
+        </p:spPr>
+      </p:pic>
+    </p:spTree>
+    <p:extLst>
+      <p:ext uri="{BB962C8B-B14F-4D97-AF65-F5344CB8AC3E}">
+        <p14:creationId xmlns:p14="http://schemas.microsoft.com/office/powerpoint/2010/main" val="2079147970"/>
+      </p:ext>
+    </p:extLst>
+  </p:cSld>
+  <p:clrMapOvr>
+    <a:masterClrMapping/>
+  </p:clrMapOvr>
+</p:sld>
+</file>
+
+<file path=ppt/slides/slide4.xml><?xml version="1.0" encoding="utf-8"?>
+<p:sld xmlns:a="http://schemas.openxmlformats.org/drawingml/2006/main" xmlns:r="http://schemas.openxmlformats.org/officeDocument/2006/relationships" xmlns:p="http://schemas.openxmlformats.org/presentationml/2006/main">
+  <p:cSld>
+    <p:spTree>
+      <p:nvGrpSpPr>
+        <p:cNvPr id="1" name=""/>
+        <p:cNvGrpSpPr/>
+        <p:nvPr/>
+      </p:nvGrpSpPr>
+      <p:grpSpPr>
+        <a:xfrm>
+          <a:off x="0" y="0"/>
+          <a:ext cx="0" cy="0"/>
+          <a:chOff x="0" y="0"/>
+          <a:chExt cx="0" cy="0"/>
+        </a:xfrm>
+      </p:grpSpPr>
+      <p:sp>
+        <p:nvSpPr>
+          <p:cNvPr id="2" name="Τίτλος 1">
+            <a:extLst>
+              <a:ext uri="{FF2B5EF4-FFF2-40B4-BE49-F238E27FC236}">
                 <a16:creationId xmlns:a16="http://schemas.microsoft.com/office/drawing/2014/main" id="{0EA9875D-160F-46FA-BDE3-529AFED16B7A}"/>
               </a:ext>
             </a:extLst>
@@ -22028,7 +23915,9 @@
         </p:nvSpPr>
         <p:spPr/>
         <p:txBody>
-          <a:bodyPr/>
+          <a:bodyPr>
+            <a:normAutofit lnSpcReduction="10000"/>
+          </a:bodyPr>
           <a:lstStyle/>
           <a:p>
             <a:pPr>
@@ -22079,11 +23968,11 @@
             </a:pPr>
             <a:r>
               <a:rPr lang="en-US" b="1" dirty="0" err="1"/>
-              <a:t>DateTime</a:t>
+              <a:t>MinMaxScaler</a:t>
             </a:r>
             <a:r>
               <a:rPr lang="en-US" dirty="0"/>
-              <a:t> to work with data and time</a:t>
+              <a:t> for normalization</a:t>
             </a:r>
           </a:p>
           <a:p>
@@ -22093,12 +23982,13 @@
             </a:pPr>
             <a:r>
               <a:rPr lang="en-US" b="1" dirty="0" err="1"/>
-              <a:t>MinMaxScaler</a:t>
+              <a:t>PyTorch</a:t>
             </a:r>
             <a:r>
               <a:rPr lang="en-US" dirty="0"/>
-              <a:t> for normalization</a:t>
-            </a:r>
+              <a:t> to build the neural network for training</a:t>
+            </a:r>
+            <a:endParaRPr lang="el-GR" dirty="0"/>
           </a:p>
           <a:p>
             <a:pPr>
@@ -22107,11 +23997,64 @@
             </a:pPr>
             <a:r>
               <a:rPr lang="en-US" b="1" dirty="0" err="1"/>
-              <a:t>PyTorch</a:t>
+              <a:t>Tensorflow</a:t>
             </a:r>
             <a:r>
               <a:rPr lang="en-US" dirty="0"/>
-              <a:t> to build the neural network for training </a:t>
+              <a:t> for</a:t>
+            </a:r>
+            <a:r>
+              <a:rPr lang="el-GR" dirty="0"/>
+              <a:t> </a:t>
+            </a:r>
+            <a:r>
+              <a:rPr lang="en-US" dirty="0"/>
+              <a:t>deep learning</a:t>
+            </a:r>
+            <a:endParaRPr lang="el-GR" dirty="0"/>
+          </a:p>
+          <a:p>
+            <a:pPr>
+              <a:buFont typeface="Wingdings" panose="05000000000000000000" pitchFamily="2" charset="2"/>
+              <a:buChar char="§"/>
+            </a:pPr>
+            <a:r>
+              <a:rPr lang="en-US" b="1" dirty="0"/>
+              <a:t>Sequential</a:t>
+            </a:r>
+            <a:r>
+              <a:rPr lang="en-US" dirty="0"/>
+              <a:t> for model creation</a:t>
+            </a:r>
+            <a:endParaRPr lang="el-GR" dirty="0"/>
+          </a:p>
+          <a:p>
+            <a:pPr>
+              <a:buFont typeface="Wingdings" panose="05000000000000000000" pitchFamily="2" charset="2"/>
+              <a:buChar char="§"/>
+            </a:pPr>
+            <a:r>
+              <a:rPr lang="en-US" b="1" dirty="0"/>
+              <a:t>GRU</a:t>
+            </a:r>
+            <a:r>
+              <a:rPr lang="en-US" dirty="0"/>
+              <a:t> layer for timeseries</a:t>
+            </a:r>
+            <a:endParaRPr lang="el-GR" dirty="0"/>
+          </a:p>
+          <a:p>
+            <a:pPr>
+              <a:buFont typeface="Wingdings" panose="05000000000000000000" pitchFamily="2" charset="2"/>
+              <a:buChar char="§"/>
+            </a:pPr>
+            <a:r>
+              <a:rPr lang="en-US" b="1" dirty="0"/>
+              <a:t>Dense</a:t>
+            </a:r>
+            <a:r>
+              <a:rPr lang="en-US" dirty="0"/>
+              <a:t> final exit layer</a:t>
             </a:r>
             <a:endParaRPr lang="el-GR" dirty="0"/>
           </a:p>
@@ -22133,7 +24076,7 @@
 </p:sld>
 </file>
 
-<file path=ppt/slides/slide4.xml><?xml version="1.0" encoding="utf-8"?>
+<file path=ppt/slides/slide5.xml><?xml version="1.0" encoding="utf-8"?>
 <p:sld xmlns:a="http://schemas.openxmlformats.org/drawingml/2006/main" xmlns:r="http://schemas.openxmlformats.org/officeDocument/2006/relationships" xmlns:p="http://schemas.openxmlformats.org/presentationml/2006/main">
   <p:cSld>
     <p:spTree>
@@ -22313,7 +24256,7 @@
 </p:sld>
 </file>
 
-<file path=ppt/slides/slide5.xml><?xml version="1.0" encoding="utf-8"?>
+<file path=ppt/slides/slide6.xml><?xml version="1.0" encoding="utf-8"?>
 <p:sld xmlns:a="http://schemas.openxmlformats.org/drawingml/2006/main" xmlns:r="http://schemas.openxmlformats.org/officeDocument/2006/relationships" xmlns:p="http://schemas.openxmlformats.org/presentationml/2006/main">
   <p:cSld>
     <p:spTree>
@@ -22352,12 +24295,20 @@
           <a:lstStyle/>
           <a:p>
             <a:r>
+              <a:rPr lang="el-GR" dirty="0"/>
+              <a:t>Η </a:t>
+            </a:r>
+            <a:r>
               <a:rPr lang="el-GR" dirty="0" err="1"/>
-              <a:t>Προεπεξεργασία</a:t>
-            </a:r>
-            <a:r>
-              <a:rPr lang="en-US" dirty="0"/>
-              <a:t>(1)</a:t>
+              <a:t>ΠροεπεξεργασΙα</a:t>
+            </a:r>
+            <a:r>
+              <a:rPr lang="el-GR" dirty="0"/>
+              <a:t> των </a:t>
+            </a:r>
+            <a:r>
+              <a:rPr lang="el-GR" dirty="0" err="1"/>
+              <a:t>δεδομενων</a:t>
             </a:r>
             <a:endParaRPr lang="el-GR" dirty="0"/>
           </a:p>
@@ -22384,6 +24335,10 @@
           <a:bodyPr/>
           <a:lstStyle/>
           <a:p>
+            <a:pPr>
+              <a:buFont typeface="Wingdings" panose="05000000000000000000" pitchFamily="2" charset="2"/>
+              <a:buChar char="§"/>
+            </a:pPr>
             <a:r>
               <a:rPr lang="el-GR" dirty="0"/>
               <a:t>Αφαίρεση </a:t>
@@ -22392,42 +24347,111 @@
               <a:rPr lang="en-US" dirty="0"/>
               <a:t>duplicates</a:t>
             </a:r>
+            <a:r>
+              <a:rPr lang="el-GR" dirty="0"/>
+              <a:t> με χρήση </a:t>
+            </a:r>
+            <a:r>
+              <a:rPr lang="en-US" dirty="0" err="1"/>
+              <a:t>drop_duplicates</a:t>
+            </a:r>
+            <a:r>
+              <a:rPr lang="en-US" dirty="0"/>
+              <a:t>()</a:t>
+            </a:r>
+            <a:r>
+              <a:rPr lang="el-GR" dirty="0"/>
+              <a:t> </a:t>
+            </a:r>
           </a:p>
           <a:p>
+            <a:pPr>
+              <a:buFont typeface="Wingdings" panose="05000000000000000000" pitchFamily="2" charset="2"/>
+              <a:buChar char="§"/>
+            </a:pPr>
+            <a:r>
+              <a:rPr lang="el-GR" dirty="0"/>
+              <a:t>Διαχείριση </a:t>
+            </a:r>
             <a:r>
               <a:rPr lang="en-US" dirty="0"/>
               <a:t>missing values</a:t>
             </a:r>
+            <a:r>
+              <a:rPr lang="el-GR" dirty="0"/>
+              <a:t>: Έλεγχος </a:t>
+            </a:r>
+            <a:r>
+              <a:rPr lang="el-GR" dirty="0" err="1"/>
+              <a:t>ελλειπών</a:t>
+            </a:r>
+            <a:r>
+              <a:rPr lang="el-GR" dirty="0"/>
+              <a:t> τιμών, γραμμική παρεμβολή για </a:t>
+            </a:r>
+            <a:r>
+              <a:rPr lang="en-US" dirty="0"/>
+              <a:t>missing values (interpolate(method= ‘linear’))</a:t>
+            </a:r>
           </a:p>
           <a:p>
+            <a:pPr>
+              <a:buFont typeface="Wingdings" panose="05000000000000000000" pitchFamily="2" charset="2"/>
+              <a:buChar char="§"/>
+            </a:pPr>
+            <a:r>
+              <a:rPr lang="el-GR" dirty="0"/>
+              <a:t>Αφαίρεση ακραίων τιμών με ορισμό συνάρτησης </a:t>
+            </a:r>
+            <a:r>
+              <a:rPr lang="en-US" dirty="0" err="1"/>
+              <a:t>remove_outliers</a:t>
+            </a:r>
             <a:r>
               <a:rPr lang="en-US" dirty="0"/>
-              <a:t> </a:t>
-            </a:r>
-            <a:r>
-              <a:rPr lang="el-GR" dirty="0"/>
-              <a:t>Αφαίρεση </a:t>
+              <a:t>(</a:t>
+            </a:r>
+            <a:r>
+              <a:rPr lang="en-US" dirty="0" err="1"/>
+              <a:t>df</a:t>
             </a:r>
             <a:r>
               <a:rPr lang="en-US" dirty="0"/>
-              <a:t>outliers (IQR)</a:t>
-            </a:r>
+              <a:t>, cols)</a:t>
+            </a:r>
+            <a:endParaRPr lang="el-GR" dirty="0"/>
           </a:p>
           <a:p>
-            <a:r>
-              <a:rPr lang="en-US" dirty="0"/>
-              <a:t> </a:t>
-            </a:r>
+            <a:pPr>
+              <a:buFont typeface="Wingdings" panose="05000000000000000000" pitchFamily="2" charset="2"/>
+              <a:buChar char="§"/>
+            </a:pPr>
             <a:r>
               <a:rPr lang="el-GR" dirty="0" err="1"/>
               <a:t>Κανονικοποίηση</a:t>
             </a:r>
             <a:r>
               <a:rPr lang="el-GR" dirty="0"/>
-              <a:t> [0,1]</a:t>
-            </a:r>
+              <a:t> [0,1] με χρήση  του </a:t>
+            </a:r>
+            <a:r>
+              <a:rPr lang="en-US" dirty="0" err="1"/>
+              <a:t>MinMaxscaler</a:t>
+            </a:r>
+            <a:endParaRPr lang="el-GR" dirty="0"/>
           </a:p>
           <a:p>
+            <a:endParaRPr lang="en-US" dirty="0"/>
+          </a:p>
+          <a:p>
+            <a:r>
+              <a:rPr lang="el-GR" dirty="0"/>
+              <a:t>Το καθαρό αρχείο αποθηκεύεται ως </a:t>
+            </a:r>
+            <a:r>
+              <a:rPr lang="en-US" dirty="0"/>
+              <a:t>cleaned_data.csv</a:t>
+            </a:r>
             <a:endParaRPr lang="el-GR" dirty="0"/>
           </a:p>
         </p:txBody>
@@ -22445,7 +24469,228 @@
 </p:sld>
 </file>
 
-<file path=ppt/slides/slide6.xml><?xml version="1.0" encoding="utf-8"?>
+<file path=ppt/slides/slide7.xml><?xml version="1.0" encoding="utf-8"?>
+<p:sld xmlns:a="http://schemas.openxmlformats.org/drawingml/2006/main" xmlns:r="http://schemas.openxmlformats.org/officeDocument/2006/relationships" xmlns:p="http://schemas.openxmlformats.org/presentationml/2006/main">
+  <p:cSld>
+    <p:spTree>
+      <p:nvGrpSpPr>
+        <p:cNvPr id="1" name=""/>
+        <p:cNvGrpSpPr/>
+        <p:nvPr/>
+      </p:nvGrpSpPr>
+      <p:grpSpPr>
+        <a:xfrm>
+          <a:off x="0" y="0"/>
+          <a:ext cx="0" cy="0"/>
+          <a:chOff x="0" y="0"/>
+          <a:chExt cx="0" cy="0"/>
+        </a:xfrm>
+      </p:grpSpPr>
+      <p:sp>
+        <p:nvSpPr>
+          <p:cNvPr id="2" name="Τίτλος 1">
+            <a:extLst>
+              <a:ext uri="{FF2B5EF4-FFF2-40B4-BE49-F238E27FC236}">
+                <a16:creationId xmlns:a16="http://schemas.microsoft.com/office/drawing/2014/main" id="{5B96315E-5C5C-4204-AF62-3CFC44A1C5E5}"/>
+              </a:ext>
+            </a:extLst>
+          </p:cNvPr>
+          <p:cNvSpPr>
+            <a:spLocks noGrp="1"/>
+          </p:cNvSpPr>
+          <p:nvPr>
+            <p:ph type="title"/>
+          </p:nvPr>
+        </p:nvSpPr>
+        <p:spPr/>
+        <p:txBody>
+          <a:bodyPr/>
+          <a:lstStyle/>
+          <a:p>
+            <a:r>
+              <a:rPr lang="el-GR" dirty="0" err="1"/>
+              <a:t>Δημιουργια</a:t>
+            </a:r>
+            <a:r>
+              <a:rPr lang="el-GR" dirty="0"/>
+              <a:t> </a:t>
+            </a:r>
+            <a:r>
+              <a:rPr lang="el-GR" dirty="0" err="1"/>
+              <a:t>συγκεντρωτικησ</a:t>
+            </a:r>
+            <a:r>
+              <a:rPr lang="el-GR" dirty="0"/>
+              <a:t> </a:t>
+            </a:r>
+            <a:r>
+              <a:rPr lang="el-GR" dirty="0" err="1"/>
+              <a:t>χρονοσειρασ</a:t>
+            </a:r>
+            <a:endParaRPr lang="el-GR" dirty="0"/>
+          </a:p>
+        </p:txBody>
+      </p:sp>
+      <p:sp>
+        <p:nvSpPr>
+          <p:cNvPr id="3" name="Θέση περιεχομένου 2">
+            <a:extLst>
+              <a:ext uri="{FF2B5EF4-FFF2-40B4-BE49-F238E27FC236}">
+                <a16:creationId xmlns:a16="http://schemas.microsoft.com/office/drawing/2014/main" id="{1A307192-E203-44FD-B7F3-F02C1578A37B}"/>
+              </a:ext>
+            </a:extLst>
+          </p:cNvPr>
+          <p:cNvSpPr>
+            <a:spLocks noGrp="1"/>
+          </p:cNvSpPr>
+          <p:nvPr>
+            <p:ph idx="1"/>
+          </p:nvPr>
+        </p:nvSpPr>
+        <p:spPr/>
+        <p:txBody>
+          <a:bodyPr/>
+          <a:lstStyle/>
+          <a:p>
+            <a:pPr algn="just">
+              <a:buFont typeface="Wingdings" panose="05000000000000000000" pitchFamily="2" charset="2"/>
+              <a:buChar char="§"/>
+            </a:pPr>
+            <a:r>
+              <a:rPr lang="el-GR" dirty="0"/>
+              <a:t>Το συγκεκριμένο </a:t>
+            </a:r>
+            <a:r>
+              <a:rPr lang="en-US" dirty="0"/>
+              <a:t>dataset </a:t>
+            </a:r>
+            <a:r>
+              <a:rPr lang="el-GR" dirty="0"/>
+              <a:t>περιείχε 10.283 διαφορετικά </a:t>
+            </a:r>
+            <a:r>
+              <a:rPr lang="en-US" dirty="0"/>
+              <a:t>machines.</a:t>
+            </a:r>
+            <a:r>
+              <a:rPr lang="el-GR" dirty="0"/>
+              <a:t>Οι επιμέρους </a:t>
+            </a:r>
+            <a:r>
+              <a:rPr lang="el-GR" dirty="0" err="1"/>
+              <a:t>χρονοσειρές</a:t>
+            </a:r>
+            <a:r>
+              <a:rPr lang="el-GR" dirty="0"/>
+              <a:t> ανά </a:t>
+            </a:r>
+            <a:r>
+              <a:rPr lang="en-US" dirty="0" err="1"/>
+              <a:t>machine_id</a:t>
+            </a:r>
+            <a:r>
+              <a:rPr lang="en-US" dirty="0"/>
+              <a:t> </a:t>
+            </a:r>
+            <a:r>
+              <a:rPr lang="el-GR" dirty="0"/>
+              <a:t>ήταν πολύ μικρές για την αξιόπιστη εκπαίδευση των μοντέλων βαθιάς μηχανικής μάθησης</a:t>
+            </a:r>
+            <a:r>
+              <a:rPr lang="en-US" dirty="0"/>
+              <a:t>.</a:t>
+            </a:r>
+            <a:r>
+              <a:rPr lang="el-GR" dirty="0"/>
+              <a:t> Η πρόβλεψη δεν πραγματοποιήθηκε σε επίπεδο μεμονωμένου </a:t>
+            </a:r>
+            <a:r>
+              <a:rPr lang="en-US" dirty="0"/>
+              <a:t>node, </a:t>
+            </a:r>
+            <a:r>
+              <a:rPr lang="el-GR" dirty="0"/>
+              <a:t>αλλά στη μέση χρήση πόρων του </a:t>
+            </a:r>
+            <a:r>
+              <a:rPr lang="en-US" dirty="0"/>
+              <a:t>cluster </a:t>
+            </a:r>
+            <a:r>
+              <a:rPr lang="el-GR" dirty="0"/>
+              <a:t>ανά χρονική στιγμή.</a:t>
+            </a:r>
+          </a:p>
+          <a:p>
+            <a:pPr>
+              <a:buFont typeface="Wingdings" panose="05000000000000000000" pitchFamily="2" charset="2"/>
+              <a:buChar char="§"/>
+            </a:pPr>
+            <a:r>
+              <a:rPr lang="el-GR" dirty="0"/>
+              <a:t> Για τον λόγο αυτό δημιουργήθηκε μια </a:t>
+            </a:r>
+            <a:r>
+              <a:rPr lang="en-US" dirty="0"/>
+              <a:t>aggregated series:</a:t>
+            </a:r>
+            <a:endParaRPr lang="el-GR" dirty="0"/>
+          </a:p>
+          <a:p>
+            <a:pPr marL="0" indent="0">
+              <a:buNone/>
+            </a:pPr>
+            <a:r>
+              <a:rPr lang="el-GR" dirty="0"/>
+              <a:t>  -ομαδοποίηση ανά </a:t>
+            </a:r>
+            <a:r>
+              <a:rPr lang="en-US" dirty="0"/>
+              <a:t>timestamp </a:t>
+            </a:r>
+          </a:p>
+          <a:p>
+            <a:pPr marL="0" indent="0">
+              <a:buNone/>
+            </a:pPr>
+            <a:r>
+              <a:rPr lang="el-GR" dirty="0"/>
+              <a:t> -υπολογισμός μέσης τιμής </a:t>
+            </a:r>
+            <a:r>
+              <a:rPr lang="en-US" dirty="0" err="1"/>
+              <a:t>cpu_usage</a:t>
+            </a:r>
+            <a:r>
+              <a:rPr lang="en-US" dirty="0"/>
+              <a:t> </a:t>
+            </a:r>
+            <a:r>
+              <a:rPr lang="el-GR" dirty="0"/>
+              <a:t>και </a:t>
+            </a:r>
+            <a:r>
+              <a:rPr lang="en-US" dirty="0" err="1"/>
+              <a:t>memory_usage</a:t>
+            </a:r>
+            <a:endParaRPr lang="en-US" dirty="0"/>
+          </a:p>
+        </p:txBody>
+      </p:sp>
+    </p:spTree>
+    <p:extLst>
+      <p:ext uri="{BB962C8B-B14F-4D97-AF65-F5344CB8AC3E}">
+        <p14:creationId xmlns:p14="http://schemas.microsoft.com/office/powerpoint/2010/main" val="3051968699"/>
+      </p:ext>
+    </p:extLst>
+  </p:cSld>
+  <p:clrMapOvr>
+    <a:masterClrMapping/>
+  </p:clrMapOvr>
+</p:sld>
+</file>
+
+<file path=ppt/slides/slide8.xml><?xml version="1.0" encoding="utf-8"?>
 <p:sld xmlns:a="http://schemas.openxmlformats.org/drawingml/2006/main" xmlns:r="http://schemas.openxmlformats.org/officeDocument/2006/relationships" xmlns:p="http://schemas.openxmlformats.org/presentationml/2006/main">
   <p:cSld>
     <p:spTree>
@@ -22478,20 +24723,36 @@
             <p:ph type="title"/>
           </p:nvPr>
         </p:nvSpPr>
-        <p:spPr/>
+        <p:spPr>
+          <a:xfrm>
+            <a:off x="1049866" y="585216"/>
+            <a:ext cx="9694333" cy="967201"/>
+          </a:xfrm>
+        </p:spPr>
         <p:txBody>
           <a:bodyPr/>
           <a:lstStyle/>
           <a:p>
             <a:r>
+              <a:rPr lang="el-GR" dirty="0"/>
+              <a:t>Η </a:t>
+            </a:r>
+            <a:r>
               <a:rPr lang="el-GR" dirty="0" err="1"/>
-              <a:t>Προεπεξεργασία</a:t>
-            </a:r>
-            <a:r>
-              <a:rPr lang="en-US" dirty="0"/>
-              <a:t>(2)</a:t>
-            </a:r>
-            <a:endParaRPr lang="el-GR" dirty="0"/>
+              <a:t>Αναλυση</a:t>
+            </a:r>
+            <a:r>
+              <a:rPr lang="el-GR" dirty="0"/>
+              <a:t> των </a:t>
+            </a:r>
+            <a:r>
+              <a:rPr lang="el-GR" dirty="0" err="1"/>
+              <a:t>δεδομενων</a:t>
+            </a:r>
+            <a:r>
+              <a:rPr lang="el-GR" dirty="0"/>
+              <a:t>(1)</a:t>
+            </a:r>
           </a:p>
         </p:txBody>
       </p:sp>
@@ -22511,67 +24772,17 @@
             <p:ph idx="1"/>
           </p:nvPr>
         </p:nvSpPr>
-        <p:spPr/>
+        <p:spPr>
+          <a:xfrm>
+            <a:off x="194733" y="1930400"/>
+            <a:ext cx="10549469" cy="4378960"/>
+          </a:xfrm>
+        </p:spPr>
         <p:txBody>
           <a:bodyPr/>
           <a:lstStyle/>
           <a:p>
-            <a:r>
-              <a:rPr lang="el-GR" dirty="0" err="1"/>
-              <a:t>Οπτικοποίηση</a:t>
-            </a:r>
-            <a:r>
-              <a:rPr lang="en-US" dirty="0"/>
-              <a:t>,</a:t>
-            </a:r>
-            <a:r>
-              <a:rPr lang="el-GR" dirty="0"/>
-              <a:t> Αποσύνθεση </a:t>
-            </a:r>
-            <a:r>
-              <a:rPr lang="el-GR" dirty="0" err="1"/>
-              <a:t>Χρονοσειράς</a:t>
-            </a:r>
-            <a:r>
-              <a:rPr lang="en-US" dirty="0"/>
-              <a:t>,  Trend</a:t>
-            </a:r>
-          </a:p>
-          <a:p>
-            <a:r>
-              <a:rPr lang="en-US" dirty="0"/>
-              <a:t> Seasonality</a:t>
-            </a:r>
-          </a:p>
-          <a:p>
-            <a:r>
-              <a:rPr lang="en-US" dirty="0"/>
-              <a:t> Residual</a:t>
-            </a:r>
-          </a:p>
-          <a:p>
-            <a:r>
-              <a:rPr lang="en-US" dirty="0"/>
-              <a:t> </a:t>
-            </a:r>
-            <a:r>
-              <a:rPr lang="el-GR" dirty="0"/>
-              <a:t>Κατανόηση δομής δεδομένων</a:t>
-            </a:r>
             <a:endParaRPr lang="en-US" dirty="0"/>
-          </a:p>
-          <a:p>
-            <a:endParaRPr lang="en-US" dirty="0"/>
-          </a:p>
-          <a:p>
-            <a:r>
-              <a:rPr lang="en-US" dirty="0"/>
-              <a:t>+</a:t>
-            </a:r>
-            <a:r>
-              <a:rPr lang="el-GR" dirty="0"/>
-              <a:t>Στατιστικά</a:t>
-            </a:r>
           </a:p>
           <a:p>
             <a:endParaRPr lang="el-GR" dirty="0"/>
@@ -22580,10 +24791,10 @@
       </p:sp>
       <p:pic>
         <p:nvPicPr>
-          <p:cNvPr id="6" name="Εικόνα 5">
+          <p:cNvPr id="5" name="Εικόνα 4">
             <a:extLst>
               <a:ext uri="{FF2B5EF4-FFF2-40B4-BE49-F238E27FC236}">
-                <a16:creationId xmlns:a16="http://schemas.microsoft.com/office/drawing/2014/main" id="{1246D02A-3514-45D5-96EE-882ED9D84B59}"/>
+                <a16:creationId xmlns:a16="http://schemas.microsoft.com/office/drawing/2014/main" id="{53010ACD-DFD6-466E-8DB6-CAD5606CFD43}"/>
               </a:ext>
             </a:extLst>
           </p:cNvPr>
@@ -22600,108 +24811,114 @@
         </p:blipFill>
         <p:spPr>
           <a:xfrm>
-            <a:off x="3067468" y="3765176"/>
-            <a:ext cx="7994240" cy="2242540"/>
+            <a:off x="7742373" y="1714637"/>
+            <a:ext cx="1511693" cy="2129259"/>
           </a:xfrm>
           <a:prstGeom prst="rect">
             <a:avLst/>
           </a:prstGeom>
         </p:spPr>
       </p:pic>
-    </p:spTree>
-    <p:extLst>
-      <p:ext uri="{BB962C8B-B14F-4D97-AF65-F5344CB8AC3E}">
-        <p14:creationId xmlns:p14="http://schemas.microsoft.com/office/powerpoint/2010/main" val="3551492529"/>
-      </p:ext>
-    </p:extLst>
-  </p:cSld>
-  <p:clrMapOvr>
-    <a:masterClrMapping/>
-  </p:clrMapOvr>
-</p:sld>
-</file>
-
-<file path=ppt/slides/slide7.xml><?xml version="1.0" encoding="utf-8"?>
-<p:sld xmlns:a="http://schemas.openxmlformats.org/drawingml/2006/main" xmlns:r="http://schemas.openxmlformats.org/officeDocument/2006/relationships" xmlns:p="http://schemas.openxmlformats.org/presentationml/2006/main">
-  <p:cSld>
-    <p:spTree>
-      <p:nvGrpSpPr>
-        <p:cNvPr id="1" name=""/>
-        <p:cNvGrpSpPr/>
-        <p:nvPr/>
-      </p:nvGrpSpPr>
-      <p:grpSpPr>
-        <a:xfrm>
-          <a:off x="0" y="0"/>
-          <a:ext cx="0" cy="0"/>
-          <a:chOff x="0" y="0"/>
-          <a:chExt cx="0" cy="0"/>
-        </a:xfrm>
-      </p:grpSpPr>
       <p:sp>
         <p:nvSpPr>
-          <p:cNvPr id="2" name="Τίτλος 1">
+          <p:cNvPr id="10" name="Ορθογώνιο 9">
             <a:extLst>
               <a:ext uri="{FF2B5EF4-FFF2-40B4-BE49-F238E27FC236}">
-                <a16:creationId xmlns:a16="http://schemas.microsoft.com/office/drawing/2014/main" id="{7718DFC3-34AC-4DEC-8EB8-A30B31F8166D}"/>
+                <a16:creationId xmlns:a16="http://schemas.microsoft.com/office/drawing/2014/main" id="{7B6A2F29-4920-40EB-A528-000ECEC0940F}"/>
               </a:ext>
             </a:extLst>
           </p:cNvPr>
-          <p:cNvSpPr>
-            <a:spLocks noGrp="1"/>
-          </p:cNvSpPr>
-          <p:nvPr>
-            <p:ph type="title"/>
-          </p:nvPr>
+          <p:cNvSpPr/>
+          <p:nvPr/>
         </p:nvSpPr>
-        <p:spPr/>
+        <p:spPr>
+          <a:xfrm>
+            <a:off x="6814047" y="4181945"/>
+            <a:ext cx="4841816" cy="2308324"/>
+          </a:xfrm>
+          <a:prstGeom prst="rect">
+            <a:avLst/>
+          </a:prstGeom>
+        </p:spPr>
         <p:txBody>
-          <a:bodyPr/>
+          <a:bodyPr wrap="square">
+            <a:spAutoFit/>
+          </a:bodyPr>
           <a:lstStyle/>
           <a:p>
+            <a:pPr marL="285750" indent="-285750" algn="just">
+              <a:buClr>
+                <a:schemeClr val="accent1">
+                  <a:lumMod val="75000"/>
+                </a:schemeClr>
+              </a:buClr>
+              <a:buFont typeface="Wingdings" panose="05000000000000000000" pitchFamily="2" charset="2"/>
+              <a:buChar char="§"/>
+            </a:pPr>
+            <a:r>
+              <a:rPr lang="el-GR" dirty="0"/>
+              <a:t>Η </a:t>
+            </a:r>
+            <a:r>
+              <a:rPr lang="en-US" dirty="0" err="1"/>
+              <a:t>cpu_usage</a:t>
+            </a:r>
+            <a:r>
+              <a:rPr lang="el-GR" dirty="0"/>
+              <a:t> εμφανίζει μεγαλύτερη διακύμανση.</a:t>
+            </a:r>
             <a:r>
               <a:rPr lang="en-US" dirty="0"/>
-              <a:t>LSTM MODEL</a:t>
-            </a:r>
-            <a:endParaRPr lang="el-GR" dirty="0"/>
+              <a:t> </a:t>
+            </a:r>
+            <a:r>
+              <a:rPr lang="el-GR" dirty="0"/>
+              <a:t>Η </a:t>
+            </a:r>
+            <a:r>
+              <a:rPr lang="en-US" dirty="0" err="1"/>
+              <a:t>memory_usage</a:t>
+            </a:r>
+            <a:r>
+              <a:rPr lang="en-US" dirty="0"/>
+              <a:t> </a:t>
+            </a:r>
+            <a:r>
+              <a:rPr lang="el-GR" dirty="0"/>
+              <a:t>είναι πολύ πιο σταθερή, με μικρό εύρος τιμών και χαμηλή τυπική απόκλιση.</a:t>
+            </a:r>
+          </a:p>
+          <a:p>
+            <a:pPr marL="285750" indent="-285750" algn="just">
+              <a:buClr>
+                <a:schemeClr val="accent1">
+                  <a:lumMod val="75000"/>
+                </a:schemeClr>
+              </a:buClr>
+              <a:buFont typeface="Wingdings" panose="05000000000000000000" pitchFamily="2" charset="2"/>
+              <a:buChar char="§"/>
+            </a:pPr>
+            <a:r>
+              <a:rPr lang="el-GR" dirty="0"/>
+              <a:t>Η CPU είναι πιο προβλέψιμη, επειδή παρουσιάζει μεγαλύτερη μεταβλητότητα, ισχυρότερη </a:t>
+            </a:r>
+            <a:r>
+              <a:rPr lang="el-GR" dirty="0" err="1"/>
+              <a:t>αυτοσυσχέτιση</a:t>
+            </a:r>
+            <a:r>
+              <a:rPr lang="el-GR" dirty="0"/>
+              <a:t> και πιο καθαρή χρονική δομή από τη μνήμη.</a:t>
+            </a:r>
           </a:p>
         </p:txBody>
       </p:sp>
       <p:pic>
         <p:nvPicPr>
-          <p:cNvPr id="5" name="Θέση περιεχομένου 4">
+          <p:cNvPr id="12" name="Θέση περιεχομένου 3">
             <a:extLst>
               <a:ext uri="{FF2B5EF4-FFF2-40B4-BE49-F238E27FC236}">
-                <a16:creationId xmlns:a16="http://schemas.microsoft.com/office/drawing/2014/main" id="{37CCD86A-B033-432B-A9D4-E8E55E8D4F48}"/>
-              </a:ext>
-            </a:extLst>
-          </p:cNvPr>
-          <p:cNvPicPr>
-            <a:picLocks noGrp="1" noChangeAspect="1"/>
-          </p:cNvPicPr>
-          <p:nvPr>
-            <p:ph idx="1"/>
-          </p:nvPr>
-        </p:nvPicPr>
-        <p:blipFill>
-          <a:blip r:embed="rId2"/>
-          <a:stretch>
-            <a:fillRect/>
-          </a:stretch>
-        </p:blipFill>
-        <p:spPr>
-          <a:xfrm>
-            <a:off x="368768" y="1751249"/>
-            <a:ext cx="5979888" cy="2917801"/>
-          </a:xfrm>
-        </p:spPr>
-      </p:pic>
-      <p:pic>
-        <p:nvPicPr>
-          <p:cNvPr id="7" name="Εικόνα 6">
-            <a:extLst>
-              <a:ext uri="{FF2B5EF4-FFF2-40B4-BE49-F238E27FC236}">
-                <a16:creationId xmlns:a16="http://schemas.microsoft.com/office/drawing/2014/main" id="{3AEA134B-1E93-426B-B309-73429B6BEDB0}"/>
+                <a16:creationId xmlns:a16="http://schemas.microsoft.com/office/drawing/2014/main" id="{2955BDBE-CE22-4378-AA7E-43DAC086C7E2}"/>
               </a:ext>
             </a:extLst>
           </p:cNvPr>
@@ -22718,102 +24935,192 @@
         </p:blipFill>
         <p:spPr>
           <a:xfrm>
-            <a:off x="6885227" y="421342"/>
-            <a:ext cx="4209533" cy="3564829"/>
+            <a:off x="718047" y="1763345"/>
+            <a:ext cx="4964674" cy="2443630"/>
           </a:xfrm>
           <a:prstGeom prst="rect">
             <a:avLst/>
           </a:prstGeom>
         </p:spPr>
       </p:pic>
-    </p:spTree>
-    <p:extLst>
-      <p:ext uri="{BB962C8B-B14F-4D97-AF65-F5344CB8AC3E}">
-        <p14:creationId xmlns:p14="http://schemas.microsoft.com/office/powerpoint/2010/main" val="2047836088"/>
-      </p:ext>
-    </p:extLst>
-  </p:cSld>
-  <p:clrMapOvr>
-    <a:masterClrMapping/>
-  </p:clrMapOvr>
-</p:sld>
-</file>
-
-<file path=ppt/slides/slide8.xml><?xml version="1.0" encoding="utf-8"?>
-<p:sld xmlns:a="http://schemas.openxmlformats.org/drawingml/2006/main" xmlns:r="http://schemas.openxmlformats.org/officeDocument/2006/relationships" xmlns:p="http://schemas.openxmlformats.org/presentationml/2006/main">
-  <p:cSld>
-    <p:spTree>
-      <p:nvGrpSpPr>
-        <p:cNvPr id="1" name=""/>
-        <p:cNvGrpSpPr/>
-        <p:nvPr/>
-      </p:nvGrpSpPr>
-      <p:grpSpPr>
-        <a:xfrm>
-          <a:off x="0" y="0"/>
-          <a:ext cx="0" cy="0"/>
-          <a:chOff x="0" y="0"/>
-          <a:chExt cx="0" cy="0"/>
-        </a:xfrm>
-      </p:grpSpPr>
       <p:sp>
         <p:nvSpPr>
-          <p:cNvPr id="2" name="Τίτλος 1">
+          <p:cNvPr id="13" name="Ορθογώνιο 12">
             <a:extLst>
               <a:ext uri="{FF2B5EF4-FFF2-40B4-BE49-F238E27FC236}">
-                <a16:creationId xmlns:a16="http://schemas.microsoft.com/office/drawing/2014/main" id="{9ADAA3A8-AB1A-4C0E-83C1-18DF22D28B73}"/>
+                <a16:creationId xmlns:a16="http://schemas.microsoft.com/office/drawing/2014/main" id="{EAAE0A07-DF66-4842-A82B-A65C0B08D5C5}"/>
               </a:ext>
             </a:extLst>
           </p:cNvPr>
-          <p:cNvSpPr>
-            <a:spLocks noGrp="1"/>
-          </p:cNvSpPr>
-          <p:nvPr>
-            <p:ph type="title"/>
-          </p:nvPr>
+          <p:cNvSpPr/>
+          <p:nvPr/>
         </p:nvSpPr>
-        <p:spPr/>
+        <p:spPr>
+          <a:xfrm>
+            <a:off x="504110" y="4206975"/>
+            <a:ext cx="6096000" cy="2585323"/>
+          </a:xfrm>
+          <a:prstGeom prst="rect">
+            <a:avLst/>
+          </a:prstGeom>
+        </p:spPr>
         <p:txBody>
-          <a:bodyPr/>
+          <a:bodyPr>
+            <a:spAutoFit/>
+          </a:bodyPr>
           <a:lstStyle/>
           <a:p>
-            <a:r>
-              <a:rPr lang="en-US" dirty="0"/>
-              <a:t>GRU MODEL</a:t>
-            </a:r>
-            <a:endParaRPr lang="el-GR" dirty="0"/>
+            <a:pPr algn="just">
+              <a:buClr>
+                <a:schemeClr val="accent2">
+                  <a:lumMod val="75000"/>
+                </a:schemeClr>
+              </a:buClr>
+            </a:pPr>
+            <a:r>
+              <a:rPr lang="el-GR" dirty="0"/>
+              <a:t>Η </a:t>
+            </a:r>
+            <a:r>
+              <a:rPr lang="el-GR" dirty="0" err="1"/>
+              <a:t>χρονοσειρά</a:t>
+            </a:r>
+            <a:r>
+              <a:rPr lang="el-GR" dirty="0"/>
+              <a:t> της CPU παρουσιάζει:</a:t>
+            </a:r>
           </a:p>
-        </p:txBody>
-      </p:sp>
-      <p:sp>
-        <p:nvSpPr>
-          <p:cNvPr id="3" name="Θέση περιεχομένου 2">
-            <a:extLst>
-              <a:ext uri="{FF2B5EF4-FFF2-40B4-BE49-F238E27FC236}">
-                <a16:creationId xmlns:a16="http://schemas.microsoft.com/office/drawing/2014/main" id="{423FF861-58D2-4EA5-8E10-B4D94ED0DC21}"/>
-              </a:ext>
-            </a:extLst>
-          </p:cNvPr>
-          <p:cNvSpPr>
-            <a:spLocks noGrp="1"/>
-          </p:cNvSpPr>
-          <p:nvPr>
-            <p:ph idx="1"/>
-          </p:nvPr>
-        </p:nvSpPr>
-        <p:spPr/>
-        <p:txBody>
-          <a:bodyPr/>
-          <a:lstStyle/>
           <a:p>
-            <a:endParaRPr lang="el-GR"/>
+            <a:pPr marL="285750" indent="-285750" algn="just">
+              <a:buClr>
+                <a:schemeClr val="accent2">
+                  <a:lumMod val="75000"/>
+                </a:schemeClr>
+              </a:buClr>
+              <a:buFont typeface="Wingdings" panose="05000000000000000000" pitchFamily="2" charset="2"/>
+              <a:buChar char="§"/>
+            </a:pPr>
+            <a:r>
+              <a:rPr lang="el-GR" dirty="0"/>
+              <a:t>σαφή τάση</a:t>
+            </a:r>
+          </a:p>
+          <a:p>
+            <a:pPr marL="285750" indent="-285750" algn="just">
+              <a:buClr>
+                <a:schemeClr val="accent2">
+                  <a:lumMod val="75000"/>
+                </a:schemeClr>
+              </a:buClr>
+              <a:buFont typeface="Wingdings" panose="05000000000000000000" pitchFamily="2" charset="2"/>
+              <a:buChar char="§"/>
+            </a:pPr>
+            <a:r>
+              <a:rPr lang="el-GR" dirty="0"/>
+              <a:t>έντονη μεταβλητότητα</a:t>
+            </a:r>
+          </a:p>
+          <a:p>
+            <a:pPr marL="285750" indent="-285750" algn="just">
+              <a:buClr>
+                <a:schemeClr val="accent2">
+                  <a:lumMod val="75000"/>
+                </a:schemeClr>
+              </a:buClr>
+              <a:buFont typeface="Wingdings" panose="05000000000000000000" pitchFamily="2" charset="2"/>
+              <a:buChar char="§"/>
+            </a:pPr>
+            <a:r>
+              <a:rPr lang="el-GR" dirty="0"/>
+              <a:t>ισχυρή χρονική εξάρτηση</a:t>
+            </a:r>
+          </a:p>
+          <a:p>
+            <a:pPr algn="just">
+              <a:buClr>
+                <a:schemeClr val="accent2">
+                  <a:lumMod val="75000"/>
+                </a:schemeClr>
+              </a:buClr>
+            </a:pPr>
+            <a:r>
+              <a:rPr lang="el-GR" dirty="0"/>
+              <a:t>Η </a:t>
+            </a:r>
+            <a:r>
+              <a:rPr lang="el-GR" dirty="0" err="1"/>
+              <a:t>χρονοσειρά</a:t>
+            </a:r>
+            <a:r>
+              <a:rPr lang="el-GR" dirty="0"/>
+              <a:t> της μνήμης παρουσιάζει:</a:t>
+            </a:r>
+          </a:p>
+          <a:p>
+            <a:pPr marL="285750" indent="-285750" algn="just">
+              <a:buClr>
+                <a:schemeClr val="accent2">
+                  <a:lumMod val="75000"/>
+                </a:schemeClr>
+              </a:buClr>
+              <a:buFont typeface="Wingdings" panose="05000000000000000000" pitchFamily="2" charset="2"/>
+              <a:buChar char="§"/>
+            </a:pPr>
+            <a:r>
+              <a:rPr lang="el-GR" dirty="0"/>
+              <a:t>πιο ομαλή συμπεριφορά ,μικρότερη μεταβλητότητα</a:t>
+            </a:r>
+          </a:p>
+          <a:p>
+            <a:pPr marL="285750" indent="-285750" algn="just">
+              <a:buClr>
+                <a:schemeClr val="accent2">
+                  <a:lumMod val="75000"/>
+                </a:schemeClr>
+              </a:buClr>
+              <a:buFont typeface="Wingdings" panose="05000000000000000000" pitchFamily="2" charset="2"/>
+              <a:buChar char="§"/>
+            </a:pPr>
+            <a:r>
+              <a:rPr lang="el-GR" dirty="0"/>
+              <a:t>ασθενέστερο </a:t>
+            </a:r>
+            <a:r>
+              <a:rPr lang="el-GR" dirty="0" err="1"/>
+              <a:t>forecasting</a:t>
+            </a:r>
+            <a:r>
+              <a:rPr lang="el-GR" dirty="0"/>
+              <a:t> </a:t>
+            </a:r>
+          </a:p>
+          <a:p>
+            <a:pPr algn="just">
+              <a:buClr>
+                <a:schemeClr val="accent2">
+                  <a:lumMod val="75000"/>
+                </a:schemeClr>
+              </a:buClr>
+            </a:pPr>
+            <a:r>
+              <a:rPr lang="el-GR" dirty="0"/>
+              <a:t>Οι δύο μεταβλητές έχουν διαφορετική χρονική δομή και επομένως διαφορετικό βαθμό </a:t>
+            </a:r>
+            <a:r>
+              <a:rPr lang="el-GR" dirty="0" err="1"/>
+              <a:t>προβλεψιμότητας</a:t>
+            </a:r>
+            <a:r>
+              <a:rPr lang="el-GR" dirty="0"/>
+              <a:t>.</a:t>
+            </a:r>
           </a:p>
         </p:txBody>
       </p:sp>
     </p:spTree>
     <p:extLst>
       <p:ext uri="{BB962C8B-B14F-4D97-AF65-F5344CB8AC3E}">
-        <p14:creationId xmlns:p14="http://schemas.microsoft.com/office/powerpoint/2010/main" val="2703931260"/>
+        <p14:creationId xmlns:p14="http://schemas.microsoft.com/office/powerpoint/2010/main" val="3551492529"/>
       </p:ext>
     </p:extLst>
   </p:cSld>
@@ -22845,7 +25152,7 @@
           <p:cNvPr id="2" name="Τίτλος 1">
             <a:extLst>
               <a:ext uri="{FF2B5EF4-FFF2-40B4-BE49-F238E27FC236}">
-                <a16:creationId xmlns:a16="http://schemas.microsoft.com/office/drawing/2014/main" id="{35868DF7-0EC0-439B-AC94-9DFBDE2E2368}"/>
+                <a16:creationId xmlns:a16="http://schemas.microsoft.com/office/drawing/2014/main" id="{18481AEB-32E9-4EF1-971D-A85E64839078}"/>
               </a:ext>
             </a:extLst>
           </p:cNvPr>
@@ -22856,73 +25163,40 @@
             <p:ph type="title"/>
           </p:nvPr>
         </p:nvSpPr>
-        <p:spPr>
-          <a:xfrm>
-            <a:off x="1024129" y="881050"/>
-            <a:ext cx="9720072" cy="873522"/>
-          </a:xfrm>
-        </p:spPr>
+        <p:spPr/>
         <p:txBody>
           <a:bodyPr/>
           <a:lstStyle/>
           <a:p>
             <a:r>
               <a:rPr lang="el-GR" dirty="0"/>
-              <a:t>Η ΕΡΓΑΣΙΑ ΣΤΟ </a:t>
-            </a:r>
-            <a:r>
-              <a:rPr lang="en-US" dirty="0"/>
-              <a:t>GITHUB</a:t>
-            </a:r>
-            <a:endParaRPr lang="el-GR" dirty="0"/>
-          </a:p>
-        </p:txBody>
-      </p:sp>
-      <p:sp>
-        <p:nvSpPr>
-          <p:cNvPr id="3" name="Θέση περιεχομένου 2">
-            <a:extLst>
-              <a:ext uri="{FF2B5EF4-FFF2-40B4-BE49-F238E27FC236}">
-                <a16:creationId xmlns:a16="http://schemas.microsoft.com/office/drawing/2014/main" id="{781143FF-632A-44B1-A75D-754A0F96369E}"/>
-              </a:ext>
-            </a:extLst>
-          </p:cNvPr>
-          <p:cNvSpPr>
-            <a:spLocks noGrp="1"/>
-          </p:cNvSpPr>
-          <p:nvPr>
-            <p:ph idx="1"/>
-          </p:nvPr>
-        </p:nvSpPr>
-        <p:spPr>
-          <a:xfrm>
-            <a:off x="1024128" y="1882587"/>
-            <a:ext cx="9720073" cy="4652683"/>
-          </a:xfrm>
-        </p:spPr>
-        <p:txBody>
-          <a:bodyPr/>
-          <a:lstStyle/>
-          <a:p>
-            <a:r>
-              <a:rPr lang="en-US" dirty="0"/>
-              <a:t>https://github.com/grgmyl/alibabacluster.git</a:t>
-            </a:r>
-          </a:p>
-          <a:p>
-            <a:endParaRPr lang="en-US" dirty="0"/>
-          </a:p>
-          <a:p>
-            <a:endParaRPr lang="el-GR" dirty="0"/>
+              <a:t>Η </a:t>
+            </a:r>
+            <a:r>
+              <a:rPr lang="el-GR" dirty="0" err="1"/>
+              <a:t>Αναλυση</a:t>
+            </a:r>
+            <a:r>
+              <a:rPr lang="el-GR" dirty="0"/>
+              <a:t> των </a:t>
+            </a:r>
+            <a:r>
+              <a:rPr lang="el-GR" dirty="0" err="1"/>
+              <a:t>δεδομενων</a:t>
+            </a:r>
+            <a:r>
+              <a:rPr lang="el-GR" dirty="0"/>
+              <a:t>(2)</a:t>
+            </a:r>
           </a:p>
         </p:txBody>
       </p:sp>
       <p:pic>
         <p:nvPicPr>
-          <p:cNvPr id="5" name="Εικόνα 4">
+          <p:cNvPr id="8" name="Εικόνα 7">
             <a:extLst>
               <a:ext uri="{FF2B5EF4-FFF2-40B4-BE49-F238E27FC236}">
-                <a16:creationId xmlns:a16="http://schemas.microsoft.com/office/drawing/2014/main" id="{B383B069-ED51-46B9-9E49-2D99EC0CC26F}"/>
+                <a16:creationId xmlns:a16="http://schemas.microsoft.com/office/drawing/2014/main" id="{88FF4872-EC54-492C-BFB4-A6147E2E76F1}"/>
               </a:ext>
             </a:extLst>
           </p:cNvPr>
@@ -22939,18 +25213,164 @@
         </p:blipFill>
         <p:spPr>
           <a:xfrm>
-            <a:off x="1193019" y="2446185"/>
-            <a:ext cx="4311309" cy="3826599"/>
+            <a:off x="263044" y="2006600"/>
+            <a:ext cx="7247082" cy="4266184"/>
           </a:xfrm>
           <a:prstGeom prst="rect">
             <a:avLst/>
           </a:prstGeom>
         </p:spPr>
       </p:pic>
+      <p:sp>
+        <p:nvSpPr>
+          <p:cNvPr id="11" name="Ορθογώνιο 10">
+            <a:extLst>
+              <a:ext uri="{FF2B5EF4-FFF2-40B4-BE49-F238E27FC236}">
+                <a16:creationId xmlns:a16="http://schemas.microsoft.com/office/drawing/2014/main" id="{B912425B-3124-4394-9966-CF639D761A45}"/>
+              </a:ext>
+            </a:extLst>
+          </p:cNvPr>
+          <p:cNvSpPr/>
+          <p:nvPr/>
+        </p:nvSpPr>
+        <p:spPr>
+          <a:xfrm>
+            <a:off x="7696200" y="2006600"/>
+            <a:ext cx="3911021" cy="4524315"/>
+          </a:xfrm>
+          <a:prstGeom prst="rect">
+            <a:avLst/>
+          </a:prstGeom>
+        </p:spPr>
+        <p:txBody>
+          <a:bodyPr wrap="square">
+            <a:spAutoFit/>
+          </a:bodyPr>
+          <a:lstStyle/>
+          <a:p>
+            <a:pPr algn="just"/>
+            <a:r>
+              <a:rPr lang="el-GR" dirty="0"/>
+              <a:t>Το </a:t>
+            </a:r>
+            <a:r>
+              <a:rPr lang="el-GR" b="1" dirty="0" err="1"/>
+              <a:t>decomposition</a:t>
+            </a:r>
+            <a:r>
+              <a:rPr lang="el-GR" dirty="0"/>
+              <a:t> διαχώρισε  κάθε </a:t>
+            </a:r>
+            <a:r>
+              <a:rPr lang="el-GR" dirty="0" err="1"/>
+              <a:t>χρονοσειρά</a:t>
+            </a:r>
+            <a:r>
+              <a:rPr lang="el-GR" dirty="0"/>
+              <a:t> σε τέσσερα μέρη:</a:t>
+            </a:r>
+          </a:p>
+          <a:p>
+            <a:pPr algn="just"/>
+            <a:r>
+              <a:rPr lang="el-GR" b="1" dirty="0" err="1"/>
+              <a:t>Original</a:t>
+            </a:r>
+            <a:r>
+              <a:rPr lang="el-GR" dirty="0"/>
+              <a:t>: η αρχική σειρά </a:t>
+            </a:r>
+          </a:p>
+          <a:p>
+            <a:pPr algn="just"/>
+            <a:r>
+              <a:rPr lang="el-GR" b="1" dirty="0" err="1"/>
+              <a:t>Trend</a:t>
+            </a:r>
+            <a:r>
+              <a:rPr lang="el-GR" dirty="0"/>
+              <a:t>: η μακροχρόνια τάση</a:t>
+            </a:r>
+          </a:p>
+          <a:p>
+            <a:pPr algn="just"/>
+            <a:r>
+              <a:rPr lang="el-GR" b="1" dirty="0" err="1"/>
+              <a:t>Seasonal</a:t>
+            </a:r>
+            <a:r>
+              <a:rPr lang="el-GR" dirty="0" err="1"/>
+              <a:t>:η</a:t>
+            </a:r>
+            <a:r>
+              <a:rPr lang="el-GR" dirty="0"/>
+              <a:t> επαναλαμβανόμενη περιοδική συμπεριφορά</a:t>
+            </a:r>
+          </a:p>
+          <a:p>
+            <a:pPr algn="just"/>
+            <a:r>
+              <a:rPr lang="el-GR" b="1" dirty="0" err="1"/>
+              <a:t>Residual</a:t>
+            </a:r>
+            <a:r>
+              <a:rPr lang="el-GR" dirty="0"/>
+              <a:t>: ο θόρυβος ή ό,τι δεν εξηγείται από </a:t>
+            </a:r>
+            <a:r>
+              <a:rPr lang="el-GR" dirty="0" err="1"/>
+              <a:t>trend</a:t>
+            </a:r>
+            <a:r>
+              <a:rPr lang="el-GR" dirty="0"/>
+              <a:t> και </a:t>
+            </a:r>
+            <a:r>
+              <a:rPr lang="el-GR" dirty="0" err="1"/>
+              <a:t>seasonality</a:t>
+            </a:r>
+            <a:r>
+              <a:rPr lang="el-GR" dirty="0"/>
+              <a:t>.</a:t>
+            </a:r>
+          </a:p>
+          <a:p>
+            <a:pPr algn="just"/>
+            <a:r>
+              <a:rPr lang="el-GR" dirty="0"/>
+              <a:t>Η CPU έχει ισχυρότερη τάση, καθαρότερη εποχικότητα και ισχυρότερη χρονική </a:t>
+            </a:r>
+            <a:r>
+              <a:rPr lang="el-GR" dirty="0" err="1"/>
+              <a:t>εξάρτηση.Η</a:t>
+            </a:r>
+            <a:r>
+              <a:rPr lang="el-GR" dirty="0"/>
+              <a:t> Memory είναι πιο επίπεδη, με ασθενέστερη τάση και μικρότερη </a:t>
+            </a:r>
+            <a:r>
+              <a:rPr lang="el-GR" dirty="0" err="1"/>
+              <a:t>εποχικότητα.Επομένως</a:t>
+            </a:r>
+            <a:r>
+              <a:rPr lang="el-GR" dirty="0"/>
+              <a:t> η CPU αναμένεται να είναι πιο κατάλληλη για </a:t>
+            </a:r>
+            <a:r>
+              <a:rPr lang="el-GR" dirty="0" err="1"/>
+              <a:t>forecasting</a:t>
+            </a:r>
+            <a:r>
+              <a:rPr lang="el-GR" dirty="0"/>
+              <a:t> από τη μνήμη.</a:t>
+            </a:r>
+          </a:p>
+        </p:txBody>
+      </p:sp>
     </p:spTree>
     <p:extLst>
       <p:ext uri="{BB962C8B-B14F-4D97-AF65-F5344CB8AC3E}">
-        <p14:creationId xmlns:p14="http://schemas.microsoft.com/office/powerpoint/2010/main" val="1803626025"/>
+        <p14:creationId xmlns:p14="http://schemas.microsoft.com/office/powerpoint/2010/main" val="530243244"/>
       </p:ext>
     </p:extLst>
   </p:cSld>
@@ -24034,16 +26454,16 @@
 <file path=customXml/itemProps2.xml><?xml version="1.0" encoding="utf-8"?>
 <ds:datastoreItem xmlns:ds="http://schemas.openxmlformats.org/officeDocument/2006/customXml" ds:itemID="{788A2F88-55C5-4ED1-9541-807C65424763}">
   <ds:schemaRefs>
+    <ds:schemaRef ds:uri="http://purl.org/dc/dcmitype/"/>
+    <ds:schemaRef ds:uri="71af3243-3dd4-4a8d-8c0d-dd76da1f02a5"/>
+    <ds:schemaRef ds:uri="http://schemas.microsoft.com/office/infopath/2007/PartnerControls"/>
+    <ds:schemaRef ds:uri="http://schemas.openxmlformats.org/package/2006/metadata/core-properties"/>
+    <ds:schemaRef ds:uri="16c05727-aa75-4e4a-9b5f-8a80a1165891"/>
     <ds:schemaRef ds:uri="http://purl.org/dc/elements/1.1/"/>
-    <ds:schemaRef ds:uri="http://schemas.microsoft.com/office/2006/metadata/properties"/>
     <ds:schemaRef ds:uri="http://www.w3.org/XML/1998/namespace"/>
     <ds:schemaRef ds:uri="http://schemas.microsoft.com/office/2006/documentManagement/types"/>
-    <ds:schemaRef ds:uri="71af3243-3dd4-4a8d-8c0d-dd76da1f02a5"/>
-    <ds:schemaRef ds:uri="16c05727-aa75-4e4a-9b5f-8a80a1165891"/>
-    <ds:schemaRef ds:uri="http://purl.org/dc/dcmitype/"/>
+    <ds:schemaRef ds:uri="http://schemas.microsoft.com/office/2006/metadata/properties"/>
     <ds:schemaRef ds:uri="http://purl.org/dc/terms/"/>
-    <ds:schemaRef ds:uri="http://schemas.microsoft.com/office/infopath/2007/PartnerControls"/>
-    <ds:schemaRef ds:uri="http://schemas.openxmlformats.org/package/2006/metadata/core-properties"/>
   </ds:schemaRefs>
 </ds:datastoreItem>
 </file>

--- a/parousiasidiktia.pptx
+++ b/parousiasidiktia.pptx
@@ -23229,10 +23229,10 @@
       </p:sp>
       <p:pic>
         <p:nvPicPr>
-          <p:cNvPr id="5" name="Εικόνα 4">
+          <p:cNvPr id="6" name="Εικόνα 5">
             <a:extLst>
               <a:ext uri="{FF2B5EF4-FFF2-40B4-BE49-F238E27FC236}">
-                <a16:creationId xmlns:a16="http://schemas.microsoft.com/office/drawing/2014/main" id="{B383B069-ED51-46B9-9E49-2D99EC0CC26F}"/>
+                <a16:creationId xmlns:a16="http://schemas.microsoft.com/office/drawing/2014/main" id="{D0DF6CF2-46F9-4387-8D15-9BF091975B9B}"/>
               </a:ext>
             </a:extLst>
           </p:cNvPr>
@@ -23249,8 +23249,8 @@
         </p:blipFill>
         <p:spPr>
           <a:xfrm>
-            <a:off x="1193019" y="2446185"/>
-            <a:ext cx="4311309" cy="3826599"/>
+            <a:off x="1205531" y="2611482"/>
+            <a:ext cx="4036432" cy="3365468"/>
           </a:xfrm>
           <a:prstGeom prst="rect">
             <a:avLst/>
@@ -26454,16 +26454,16 @@
 <file path=customXml/itemProps2.xml><?xml version="1.0" encoding="utf-8"?>
 <ds:datastoreItem xmlns:ds="http://schemas.openxmlformats.org/officeDocument/2006/customXml" ds:itemID="{788A2F88-55C5-4ED1-9541-807C65424763}">
   <ds:schemaRefs>
+    <ds:schemaRef ds:uri="http://purl.org/dc/terms/"/>
+    <ds:schemaRef ds:uri="http://purl.org/dc/elements/1.1/"/>
+    <ds:schemaRef ds:uri="http://schemas.microsoft.com/office/2006/metadata/properties"/>
+    <ds:schemaRef ds:uri="16c05727-aa75-4e4a-9b5f-8a80a1165891"/>
+    <ds:schemaRef ds:uri="71af3243-3dd4-4a8d-8c0d-dd76da1f02a5"/>
     <ds:schemaRef ds:uri="http://purl.org/dc/dcmitype/"/>
-    <ds:schemaRef ds:uri="71af3243-3dd4-4a8d-8c0d-dd76da1f02a5"/>
+    <ds:schemaRef ds:uri="http://schemas.microsoft.com/office/2006/documentManagement/types"/>
     <ds:schemaRef ds:uri="http://schemas.microsoft.com/office/infopath/2007/PartnerControls"/>
     <ds:schemaRef ds:uri="http://schemas.openxmlformats.org/package/2006/metadata/core-properties"/>
-    <ds:schemaRef ds:uri="16c05727-aa75-4e4a-9b5f-8a80a1165891"/>
-    <ds:schemaRef ds:uri="http://purl.org/dc/elements/1.1/"/>
     <ds:schemaRef ds:uri="http://www.w3.org/XML/1998/namespace"/>
-    <ds:schemaRef ds:uri="http://schemas.microsoft.com/office/2006/documentManagement/types"/>
-    <ds:schemaRef ds:uri="http://schemas.microsoft.com/office/2006/metadata/properties"/>
-    <ds:schemaRef ds:uri="http://purl.org/dc/terms/"/>
   </ds:schemaRefs>
 </ds:datastoreItem>
 </file>
